--- a/template_inspector/templates/template.pptx
+++ b/template_inspector/templates/template.pptx
@@ -1,8 +1,8 @@
 
 <file path=ppt/presentation.xml><?xml version="1.0" encoding="utf-8"?>
-<p:presentation xmlns:a="http://schemas.openxmlformats.org/drawingml/2006/main" xmlns:r="http://schemas.openxmlformats.org/officeDocument/2006/relationships" xmlns:p="http://schemas.openxmlformats.org/presentationml/2006/main" saveSubsetFonts="1" autoCompressPictures="0">
+<p:presentation xmlns:a="http://schemas.openxmlformats.org/drawingml/2006/main" xmlns:r="http://schemas.openxmlformats.org/officeDocument/2006/relationships" xmlns:p="http://schemas.openxmlformats.org/presentationml/2006/main" saveSubsetFonts="1">
   <p:sldMasterIdLst>
-    <p:sldMasterId id="2147483648" r:id="rId1"/>
+    <p:sldMasterId id="2147483660" r:id="rId1"/>
   </p:sldMasterIdLst>
   <p:notesMasterIdLst>
     <p:notesMasterId r:id="rId3"/>
@@ -10,7 +10,7 @@
   <p:sldIdLst>
     <p:sldId id="256" r:id="rId2"/>
   </p:sldIdLst>
-  <p:sldSz cx="7772400" cy="10058400"/>
+  <p:sldSz cx="6858000" cy="9906000" type="A4"/>
   <p:notesSz cx="6858000" cy="9144000"/>
   <p:defaultTextStyle>
     <a:defPPr>
@@ -109,18 +109,7 @@
   </p:defaultTextStyle>
   <p:extLst>
     <p:ext uri="{EFAFB233-063F-42B5-8137-9DF3F51BA10A}">
-      <p15:sldGuideLst xmlns:p15="http://schemas.microsoft.com/office/powerpoint/2012/main">
-        <p15:guide id="1" orient="horz" pos="2160">
-          <p15:clr>
-            <a:srgbClr val="A4A3A4"/>
-          </p15:clr>
-        </p15:guide>
-        <p15:guide id="2" pos="2880">
-          <p15:clr>
-            <a:srgbClr val="A4A3A4"/>
-          </p15:clr>
-        </p15:guide>
-      </p15:sldGuideLst>
+      <p15:sldGuideLst xmlns:p15="http://schemas.microsoft.com/office/powerpoint/2012/main"/>
     </p:ext>
   </p:extLst>
 </p:presentation>
@@ -129,7 +118,7 @@
 <file path=ppt/revisionInfo.xml><?xml version="1.0" encoding="utf-8"?>
 <p1510:revInfo xmlns:a="http://schemas.openxmlformats.org/drawingml/2006/main" xmlns:r="http://schemas.openxmlformats.org/officeDocument/2006/relationships" xmlns:p1510="http://schemas.microsoft.com/office/powerpoint/2015/10/main">
   <p1510:revLst>
-    <p1510:client id="{D5FB29B2-EEB3-41BA-B983-AF0EA5F620D8}" v="8" dt="2026-03-11T23:17:45.816"/>
+    <p1510:client id="{CC7FB41C-B7F2-4A42-AC91-86A30993332F}" v="49" dt="2026-08-21T01:16:25.921"/>
   </p1510:revLst>
 </p1510:revInfo>
 </file>
@@ -139,510 +128,336 @@
   <pc:docChgLst>
     <pc:chgData name="Yahir Adrian Ortiz Estrella" userId="f05236199d9cb247" providerId="LiveId" clId="{3CBD77D6-72C8-44D6-A27B-976CC077C692}"/>
     <pc:docChg chg="modSld">
-      <pc:chgData name="Yahir Adrian Ortiz Estrella" userId="f05236199d9cb247" providerId="LiveId" clId="{3CBD77D6-72C8-44D6-A27B-976CC077C692}" dt="2026-03-11T23:17:45.816" v="28"/>
+      <pc:chgData name="Yahir Adrian Ortiz Estrella" userId="f05236199d9cb247" providerId="LiveId" clId="{3CBD77D6-72C8-44D6-A27B-976CC077C692}" dt="2026-08-21T01:16:25.921" v="85" actId="962"/>
       <pc:docMkLst>
         <pc:docMk/>
       </pc:docMkLst>
-      <pc:sldChg chg="addSp modSp mod">
-        <pc:chgData name="Yahir Adrian Ortiz Estrella" userId="f05236199d9cb247" providerId="LiveId" clId="{3CBD77D6-72C8-44D6-A27B-976CC077C692}" dt="2026-03-11T23:17:06.808" v="26" actId="122"/>
+      <pc:sldChg chg="modSp">
+        <pc:chgData name="Yahir Adrian Ortiz Estrella" userId="f05236199d9cb247" providerId="LiveId" clId="{3CBD77D6-72C8-44D6-A27B-976CC077C692}" dt="2026-08-21T01:16:25.921" v="85" actId="962"/>
         <pc:sldMkLst>
           <pc:docMk/>
-          <pc:sldMk cId="0" sldId="256"/>
+          <pc:sldMk cId="3091835037" sldId="256"/>
         </pc:sldMkLst>
-        <pc:spChg chg="mod">
-          <ac:chgData name="Yahir Adrian Ortiz Estrella" userId="f05236199d9cb247" providerId="LiveId" clId="{3CBD77D6-72C8-44D6-A27B-976CC077C692}" dt="2026-03-11T23:16:53.502" v="17" actId="122"/>
-          <ac:spMkLst>
+        <pc:picChg chg="mod">
+          <ac:chgData name="Yahir Adrian Ortiz Estrella" userId="f05236199d9cb247" providerId="LiveId" clId="{3CBD77D6-72C8-44D6-A27B-976CC077C692}" dt="2026-08-21T01:08:04.163" v="45" actId="962"/>
+          <ac:picMkLst>
             <pc:docMk/>
-            <pc:sldMk cId="0" sldId="256"/>
-            <ac:spMk id="2" creationId="{00000000-0000-0000-0000-000000000000}"/>
-          </ac:spMkLst>
-        </pc:spChg>
-        <pc:spChg chg="mod">
-          <ac:chgData name="Yahir Adrian Ortiz Estrella" userId="f05236199d9cb247" providerId="LiveId" clId="{3CBD77D6-72C8-44D6-A27B-976CC077C692}" dt="2026-03-11T23:16:55.366" v="18" actId="122"/>
-          <ac:spMkLst>
+            <pc:sldMk cId="3091835037" sldId="256"/>
+            <ac:picMk id="15" creationId="{1D316950-56FE-AFAE-F0DE-772829164868}"/>
+          </ac:picMkLst>
+        </pc:picChg>
+        <pc:picChg chg="mod">
+          <ac:chgData name="Yahir Adrian Ortiz Estrella" userId="f05236199d9cb247" providerId="LiveId" clId="{3CBD77D6-72C8-44D6-A27B-976CC077C692}" dt="2026-08-21T01:16:12.293" v="82" actId="962"/>
+          <ac:picMkLst>
             <pc:docMk/>
-            <pc:sldMk cId="0" sldId="256"/>
-            <ac:spMk id="3" creationId="{00000000-0000-0000-0000-000000000000}"/>
-          </ac:spMkLst>
-        </pc:spChg>
-        <pc:spChg chg="mod">
-          <ac:chgData name="Yahir Adrian Ortiz Estrella" userId="f05236199d9cb247" providerId="LiveId" clId="{3CBD77D6-72C8-44D6-A27B-976CC077C692}" dt="2026-03-11T23:16:56.713" v="19" actId="122"/>
-          <ac:spMkLst>
+            <pc:sldMk cId="3091835037" sldId="256"/>
+            <ac:picMk id="19" creationId="{58ACBC8B-6106-5591-70F0-D1F96696E6FD}"/>
+          </ac:picMkLst>
+        </pc:picChg>
+        <pc:picChg chg="mod">
+          <ac:chgData name="Yahir Adrian Ortiz Estrella" userId="f05236199d9cb247" providerId="LiveId" clId="{3CBD77D6-72C8-44D6-A27B-976CC077C692}" dt="2026-08-21T01:16:16.537" v="83" actId="962"/>
+          <ac:picMkLst>
             <pc:docMk/>
-            <pc:sldMk cId="0" sldId="256"/>
-            <ac:spMk id="4" creationId="{00000000-0000-0000-0000-000000000000}"/>
-          </ac:spMkLst>
-        </pc:spChg>
-        <pc:spChg chg="mod">
-          <ac:chgData name="Yahir Adrian Ortiz Estrella" userId="f05236199d9cb247" providerId="LiveId" clId="{3CBD77D6-72C8-44D6-A27B-976CC077C692}" dt="2026-03-11T23:16:58.185" v="20" actId="122"/>
-          <ac:spMkLst>
+            <pc:sldMk cId="3091835037" sldId="256"/>
+            <ac:picMk id="23" creationId="{CE22F6B8-48A1-C6DF-A49E-1242A55DA255}"/>
+          </ac:picMkLst>
+        </pc:picChg>
+        <pc:picChg chg="mod">
+          <ac:chgData name="Yahir Adrian Ortiz Estrella" userId="f05236199d9cb247" providerId="LiveId" clId="{3CBD77D6-72C8-44D6-A27B-976CC077C692}" dt="2026-08-21T01:08:16.960" v="46" actId="962"/>
+          <ac:picMkLst>
             <pc:docMk/>
-            <pc:sldMk cId="0" sldId="256"/>
-            <ac:spMk id="5" creationId="{00000000-0000-0000-0000-000000000000}"/>
-          </ac:spMkLst>
-        </pc:spChg>
-        <pc:spChg chg="mod">
-          <ac:chgData name="Yahir Adrian Ortiz Estrella" userId="f05236199d9cb247" providerId="LiveId" clId="{3CBD77D6-72C8-44D6-A27B-976CC077C692}" dt="2026-03-11T23:16:59.235" v="21" actId="122"/>
-          <ac:spMkLst>
+            <pc:sldMk cId="3091835037" sldId="256"/>
+            <ac:picMk id="25" creationId="{1E3EDAD6-2DFB-8872-7EDD-6BD54EFF596C}"/>
+          </ac:picMkLst>
+        </pc:picChg>
+        <pc:picChg chg="mod">
+          <ac:chgData name="Yahir Adrian Ortiz Estrella" userId="f05236199d9cb247" providerId="LiveId" clId="{3CBD77D6-72C8-44D6-A27B-976CC077C692}" dt="2026-08-21T01:16:21.568" v="84" actId="962"/>
+          <ac:picMkLst>
             <pc:docMk/>
-            <pc:sldMk cId="0" sldId="256"/>
-            <ac:spMk id="6" creationId="{00000000-0000-0000-0000-000000000000}"/>
-          </ac:spMkLst>
-        </pc:spChg>
-        <pc:spChg chg="mod">
-          <ac:chgData name="Yahir Adrian Ortiz Estrella" userId="f05236199d9cb247" providerId="LiveId" clId="{3CBD77D6-72C8-44D6-A27B-976CC077C692}" dt="2026-03-11T23:17:00.685" v="22" actId="122"/>
-          <ac:spMkLst>
+            <pc:sldMk cId="3091835037" sldId="256"/>
+            <ac:picMk id="27" creationId="{DCCF5BC0-1C84-E48D-5095-D22ADEE9AC65}"/>
+          </ac:picMkLst>
+        </pc:picChg>
+        <pc:picChg chg="mod">
+          <ac:chgData name="Yahir Adrian Ortiz Estrella" userId="f05236199d9cb247" providerId="LiveId" clId="{3CBD77D6-72C8-44D6-A27B-976CC077C692}" dt="2026-08-21T01:16:25.921" v="85" actId="962"/>
+          <ac:picMkLst>
             <pc:docMk/>
-            <pc:sldMk cId="0" sldId="256"/>
-            <ac:spMk id="7" creationId="{00000000-0000-0000-0000-000000000000}"/>
-          </ac:spMkLst>
-        </pc:spChg>
-        <pc:spChg chg="mod">
-          <ac:chgData name="Yahir Adrian Ortiz Estrella" userId="f05236199d9cb247" providerId="LiveId" clId="{3CBD77D6-72C8-44D6-A27B-976CC077C692}" dt="2026-03-11T23:17:02.843" v="23" actId="122"/>
-          <ac:spMkLst>
+            <pc:sldMk cId="3091835037" sldId="256"/>
+            <ac:picMk id="30" creationId="{C90E3E91-F214-7C9A-722A-7DDD089D2903}"/>
+          </ac:picMkLst>
+        </pc:picChg>
+        <pc:picChg chg="mod">
+          <ac:chgData name="Yahir Adrian Ortiz Estrella" userId="f05236199d9cb247" providerId="LiveId" clId="{3CBD77D6-72C8-44D6-A27B-976CC077C692}" dt="2026-08-21T01:08:25.942" v="47" actId="962"/>
+          <ac:picMkLst>
             <pc:docMk/>
-            <pc:sldMk cId="0" sldId="256"/>
-            <ac:spMk id="8" creationId="{00000000-0000-0000-0000-000000000000}"/>
-          </ac:spMkLst>
-        </pc:spChg>
-        <pc:spChg chg="mod">
-          <ac:chgData name="Yahir Adrian Ortiz Estrella" userId="f05236199d9cb247" providerId="LiveId" clId="{3CBD77D6-72C8-44D6-A27B-976CC077C692}" dt="2026-03-11T23:17:04.036" v="24" actId="122"/>
-          <ac:spMkLst>
+            <pc:sldMk cId="3091835037" sldId="256"/>
+            <ac:picMk id="38" creationId="{6387CA0E-ACCC-5C99-DC5B-ED750183DCED}"/>
+          </ac:picMkLst>
+        </pc:picChg>
+        <pc:picChg chg="mod">
+          <ac:chgData name="Yahir Adrian Ortiz Estrella" userId="f05236199d9cb247" providerId="LiveId" clId="{3CBD77D6-72C8-44D6-A27B-976CC077C692}" dt="2026-08-21T01:08:34.682" v="48" actId="962"/>
+          <ac:picMkLst>
             <pc:docMk/>
-            <pc:sldMk cId="0" sldId="256"/>
-            <ac:spMk id="9" creationId="{00000000-0000-0000-0000-000000000000}"/>
-          </ac:spMkLst>
-        </pc:spChg>
-        <pc:spChg chg="mod">
-          <ac:chgData name="Yahir Adrian Ortiz Estrella" userId="f05236199d9cb247" providerId="LiveId" clId="{3CBD77D6-72C8-44D6-A27B-976CC077C692}" dt="2026-03-11T23:17:05.391" v="25" actId="122"/>
-          <ac:spMkLst>
+            <pc:sldMk cId="3091835037" sldId="256"/>
+            <ac:picMk id="40" creationId="{C0EF144E-7FA3-3998-4154-A1D24FA4344D}"/>
+          </ac:picMkLst>
+        </pc:picChg>
+        <pc:picChg chg="mod">
+          <ac:chgData name="Yahir Adrian Ortiz Estrella" userId="f05236199d9cb247" providerId="LiveId" clId="{3CBD77D6-72C8-44D6-A27B-976CC077C692}" dt="2026-08-21T01:08:51.335" v="49" actId="962"/>
+          <ac:picMkLst>
             <pc:docMk/>
-            <pc:sldMk cId="0" sldId="256"/>
-            <ac:spMk id="10" creationId="{00000000-0000-0000-0000-000000000000}"/>
-          </ac:spMkLst>
-        </pc:spChg>
-        <pc:spChg chg="mod">
-          <ac:chgData name="Yahir Adrian Ortiz Estrella" userId="f05236199d9cb247" providerId="LiveId" clId="{3CBD77D6-72C8-44D6-A27B-976CC077C692}" dt="2026-03-11T23:17:06.808" v="26" actId="122"/>
-          <ac:spMkLst>
+            <pc:sldMk cId="3091835037" sldId="256"/>
+            <ac:picMk id="50" creationId="{428B4195-3DB5-B003-FDCA-2AE06F62D7A6}"/>
+          </ac:picMkLst>
+        </pc:picChg>
+        <pc:picChg chg="mod">
+          <ac:chgData name="Yahir Adrian Ortiz Estrella" userId="f05236199d9cb247" providerId="LiveId" clId="{3CBD77D6-72C8-44D6-A27B-976CC077C692}" dt="2026-08-21T01:09:00.515" v="50" actId="962"/>
+          <ac:picMkLst>
             <pc:docMk/>
-            <pc:sldMk cId="0" sldId="256"/>
-            <ac:spMk id="11" creationId="{00000000-0000-0000-0000-000000000000}"/>
-          </ac:spMkLst>
-        </pc:spChg>
-        <pc:spChg chg="add mod">
-          <ac:chgData name="Yahir Adrian Ortiz Estrella" userId="f05236199d9cb247" providerId="LiveId" clId="{3CBD77D6-72C8-44D6-A27B-976CC077C692}" dt="2026-03-11T23:16:36.978" v="14" actId="2085"/>
-          <ac:spMkLst>
+            <pc:sldMk cId="3091835037" sldId="256"/>
+            <ac:picMk id="51" creationId="{70BE19C0-3205-EBB5-143E-D64D01C744EE}"/>
+          </ac:picMkLst>
+        </pc:picChg>
+        <pc:picChg chg="mod">
+          <ac:chgData name="Yahir Adrian Ortiz Estrella" userId="f05236199d9cb247" providerId="LiveId" clId="{3CBD77D6-72C8-44D6-A27B-976CC077C692}" dt="2026-08-21T01:09:07.915" v="51" actId="962"/>
+          <ac:picMkLst>
             <pc:docMk/>
-            <pc:sldMk cId="0" sldId="256"/>
-            <ac:spMk id="12" creationId="{ECF5FF8C-7E75-E181-FC44-D880A76BFAAF}"/>
-          </ac:spMkLst>
-        </pc:spChg>
-        <pc:spChg chg="add mod">
-          <ac:chgData name="Yahir Adrian Ortiz Estrella" userId="f05236199d9cb247" providerId="LiveId" clId="{3CBD77D6-72C8-44D6-A27B-976CC077C692}" dt="2026-03-11T23:16:36.978" v="14" actId="2085"/>
-          <ac:spMkLst>
+            <pc:sldMk cId="3091835037" sldId="256"/>
+            <ac:picMk id="52" creationId="{8F0E9EDC-2275-77F9-CFCE-D0ADD24863C9}"/>
+          </ac:picMkLst>
+        </pc:picChg>
+        <pc:picChg chg="mod">
+          <ac:chgData name="Yahir Adrian Ortiz Estrella" userId="f05236199d9cb247" providerId="LiveId" clId="{3CBD77D6-72C8-44D6-A27B-976CC077C692}" dt="2026-08-21T01:09:16.814" v="52" actId="962"/>
+          <ac:picMkLst>
             <pc:docMk/>
-            <pc:sldMk cId="0" sldId="256"/>
-            <ac:spMk id="13" creationId="{81C6A5B2-5841-D363-360E-1D58B495093A}"/>
-          </ac:spMkLst>
-        </pc:spChg>
-        <pc:spChg chg="add mod">
-          <ac:chgData name="Yahir Adrian Ortiz Estrella" userId="f05236199d9cb247" providerId="LiveId" clId="{3CBD77D6-72C8-44D6-A27B-976CC077C692}" dt="2026-03-11T23:16:36.978" v="14" actId="2085"/>
-          <ac:spMkLst>
+            <pc:sldMk cId="3091835037" sldId="256"/>
+            <ac:picMk id="53" creationId="{166569CA-E273-D8E2-A2F3-B9A76E78BCE5}"/>
+          </ac:picMkLst>
+        </pc:picChg>
+        <pc:picChg chg="mod">
+          <ac:chgData name="Yahir Adrian Ortiz Estrella" userId="f05236199d9cb247" providerId="LiveId" clId="{3CBD77D6-72C8-44D6-A27B-976CC077C692}" dt="2026-08-21T01:09:39.443" v="53" actId="962"/>
+          <ac:picMkLst>
             <pc:docMk/>
-            <pc:sldMk cId="0" sldId="256"/>
-            <ac:spMk id="14" creationId="{A4DBB08B-1E22-E2EE-B6B8-1E7CB137A5C1}"/>
-          </ac:spMkLst>
-        </pc:spChg>
-        <pc:spChg chg="add mod">
-          <ac:chgData name="Yahir Adrian Ortiz Estrella" userId="f05236199d9cb247" providerId="LiveId" clId="{3CBD77D6-72C8-44D6-A27B-976CC077C692}" dt="2026-03-11T23:16:24.043" v="11" actId="2085"/>
-          <ac:spMkLst>
+            <pc:sldMk cId="3091835037" sldId="256"/>
+            <ac:picMk id="62" creationId="{0E210B9E-6449-DFC5-671F-877670A18332}"/>
+          </ac:picMkLst>
+        </pc:picChg>
+        <pc:picChg chg="mod">
+          <ac:chgData name="Yahir Adrian Ortiz Estrella" userId="f05236199d9cb247" providerId="LiveId" clId="{3CBD77D6-72C8-44D6-A27B-976CC077C692}" dt="2026-08-21T01:09:45.875" v="54" actId="962"/>
+          <ac:picMkLst>
             <pc:docMk/>
-            <pc:sldMk cId="0" sldId="256"/>
-            <ac:spMk id="15" creationId="{00EC514B-CD88-C161-E3D2-E0989C6AED31}"/>
-          </ac:spMkLst>
-        </pc:spChg>
-        <pc:spChg chg="add mod">
-          <ac:chgData name="Yahir Adrian Ortiz Estrella" userId="f05236199d9cb247" providerId="LiveId" clId="{3CBD77D6-72C8-44D6-A27B-976CC077C692}" dt="2026-03-11T23:16:31.833" v="13" actId="207"/>
-          <ac:spMkLst>
+            <pc:sldMk cId="3091835037" sldId="256"/>
+            <ac:picMk id="63" creationId="{05D6E19B-A6F7-9F83-2272-46AAFFA07DB5}"/>
+          </ac:picMkLst>
+        </pc:picChg>
+        <pc:picChg chg="mod">
+          <ac:chgData name="Yahir Adrian Ortiz Estrella" userId="f05236199d9cb247" providerId="LiveId" clId="{3CBD77D6-72C8-44D6-A27B-976CC077C692}" dt="2026-08-21T01:09:55.254" v="55" actId="962"/>
+          <ac:picMkLst>
             <pc:docMk/>
-            <pc:sldMk cId="0" sldId="256"/>
-            <ac:spMk id="16" creationId="{EDD9BB94-997B-AD51-D5AD-BAC41265A65A}"/>
-          </ac:spMkLst>
-        </pc:spChg>
-        <pc:spChg chg="add mod">
-          <ac:chgData name="Yahir Adrian Ortiz Estrella" userId="f05236199d9cb247" providerId="LiveId" clId="{3CBD77D6-72C8-44D6-A27B-976CC077C692}" dt="2026-03-11T23:16:41.043" v="15" actId="571"/>
-          <ac:spMkLst>
+            <pc:sldMk cId="3091835037" sldId="256"/>
+            <ac:picMk id="64" creationId="{5D8E5F84-1BFB-3A2E-636B-E208FBC27915}"/>
+          </ac:picMkLst>
+        </pc:picChg>
+        <pc:picChg chg="mod">
+          <ac:chgData name="Yahir Adrian Ortiz Estrella" userId="f05236199d9cb247" providerId="LiveId" clId="{3CBD77D6-72C8-44D6-A27B-976CC077C692}" dt="2026-08-21T01:10:04.466" v="56" actId="962"/>
+          <ac:picMkLst>
             <pc:docMk/>
-            <pc:sldMk cId="0" sldId="256"/>
-            <ac:spMk id="17" creationId="{406E5E14-F39C-9E7D-BD86-A21408C8A2C9}"/>
-          </ac:spMkLst>
-        </pc:spChg>
-        <pc:spChg chg="add mod">
-          <ac:chgData name="Yahir Adrian Ortiz Estrella" userId="f05236199d9cb247" providerId="LiveId" clId="{3CBD77D6-72C8-44D6-A27B-976CC077C692}" dt="2026-03-11T23:16:41.043" v="15" actId="571"/>
-          <ac:spMkLst>
+            <pc:sldMk cId="3091835037" sldId="256"/>
+            <ac:picMk id="65" creationId="{D4EF2D7F-19DC-22DA-B3C3-E3F5872ACC78}"/>
+          </ac:picMkLst>
+        </pc:picChg>
+        <pc:picChg chg="mod">
+          <ac:chgData name="Yahir Adrian Ortiz Estrella" userId="f05236199d9cb247" providerId="LiveId" clId="{3CBD77D6-72C8-44D6-A27B-976CC077C692}" dt="2026-08-21T01:10:17.107" v="57" actId="962"/>
+          <ac:picMkLst>
             <pc:docMk/>
-            <pc:sldMk cId="0" sldId="256"/>
-            <ac:spMk id="18" creationId="{18529E87-1FCB-49B4-B574-466CCB5F82BA}"/>
-          </ac:spMkLst>
-        </pc:spChg>
-        <pc:spChg chg="add mod">
-          <ac:chgData name="Yahir Adrian Ortiz Estrella" userId="f05236199d9cb247" providerId="LiveId" clId="{3CBD77D6-72C8-44D6-A27B-976CC077C692}" dt="2026-03-11T23:16:41.043" v="15" actId="571"/>
-          <ac:spMkLst>
+            <pc:sldMk cId="3091835037" sldId="256"/>
+            <ac:picMk id="218" creationId="{B2525F8D-8EE8-7EF6-DC61-08708DB46062}"/>
+          </ac:picMkLst>
+        </pc:picChg>
+        <pc:picChg chg="mod">
+          <ac:chgData name="Yahir Adrian Ortiz Estrella" userId="f05236199d9cb247" providerId="LiveId" clId="{3CBD77D6-72C8-44D6-A27B-976CC077C692}" dt="2026-08-21T01:10:25.062" v="58" actId="962"/>
+          <ac:picMkLst>
             <pc:docMk/>
-            <pc:sldMk cId="0" sldId="256"/>
-            <ac:spMk id="19" creationId="{BD4D1176-C3BF-F64D-7672-E2857931D71A}"/>
-          </ac:spMkLst>
-        </pc:spChg>
-        <pc:spChg chg="add mod">
-          <ac:chgData name="Yahir Adrian Ortiz Estrella" userId="f05236199d9cb247" providerId="LiveId" clId="{3CBD77D6-72C8-44D6-A27B-976CC077C692}" dt="2026-03-11T23:16:48.957" v="16" actId="571"/>
-          <ac:spMkLst>
+            <pc:sldMk cId="3091835037" sldId="256"/>
+            <ac:picMk id="219" creationId="{008FFB2B-1EA0-6DAE-CAD6-D9BEEBAFCAAB}"/>
+          </ac:picMkLst>
+        </pc:picChg>
+        <pc:picChg chg="mod">
+          <ac:chgData name="Yahir Adrian Ortiz Estrella" userId="f05236199d9cb247" providerId="LiveId" clId="{3CBD77D6-72C8-44D6-A27B-976CC077C692}" dt="2026-08-21T01:10:35.494" v="59" actId="962"/>
+          <ac:picMkLst>
             <pc:docMk/>
-            <pc:sldMk cId="0" sldId="256"/>
-            <ac:spMk id="20" creationId="{EB778D72-D177-4683-750E-40C6686CA073}"/>
-          </ac:spMkLst>
-        </pc:spChg>
-        <pc:spChg chg="add mod">
-          <ac:chgData name="Yahir Adrian Ortiz Estrella" userId="f05236199d9cb247" providerId="LiveId" clId="{3CBD77D6-72C8-44D6-A27B-976CC077C692}" dt="2026-03-11T23:16:48.957" v="16" actId="571"/>
-          <ac:spMkLst>
+            <pc:sldMk cId="3091835037" sldId="256"/>
+            <ac:picMk id="220" creationId="{09EAC018-7236-7E27-648E-F2EEE09527A4}"/>
+          </ac:picMkLst>
+        </pc:picChg>
+        <pc:picChg chg="mod">
+          <ac:chgData name="Yahir Adrian Ortiz Estrella" userId="f05236199d9cb247" providerId="LiveId" clId="{3CBD77D6-72C8-44D6-A27B-976CC077C692}" dt="2026-08-21T01:10:48.578" v="60" actId="962"/>
+          <ac:picMkLst>
             <pc:docMk/>
-            <pc:sldMk cId="0" sldId="256"/>
-            <ac:spMk id="21" creationId="{D0B894DA-57BE-A345-AC02-58F7612E4C5C}"/>
-          </ac:spMkLst>
-        </pc:spChg>
-      </pc:sldChg>
-      <pc:sldChg chg="addSp modSp mod">
-        <pc:chgData name="Yahir Adrian Ortiz Estrella" userId="f05236199d9cb247" providerId="LiveId" clId="{3CBD77D6-72C8-44D6-A27B-976CC077C692}" dt="2026-03-11T23:17:43.366" v="27"/>
-        <pc:sldMkLst>
-          <pc:docMk/>
-          <pc:sldMk cId="0" sldId="257"/>
-        </pc:sldMkLst>
-        <pc:spChg chg="mod">
-          <ac:chgData name="Yahir Adrian Ortiz Estrella" userId="f05236199d9cb247" providerId="LiveId" clId="{3CBD77D6-72C8-44D6-A27B-976CC077C692}" dt="2026-03-11T23:15:20.624" v="1" actId="13822"/>
-          <ac:spMkLst>
+            <pc:sldMk cId="3091835037" sldId="256"/>
+            <ac:picMk id="221" creationId="{6030D41B-DB6E-FACB-08BE-379659753824}"/>
+          </ac:picMkLst>
+        </pc:picChg>
+        <pc:picChg chg="mod">
+          <ac:chgData name="Yahir Adrian Ortiz Estrella" userId="f05236199d9cb247" providerId="LiveId" clId="{3CBD77D6-72C8-44D6-A27B-976CC077C692}" dt="2026-08-21T01:11:08.911" v="61" actId="962"/>
+          <ac:picMkLst>
             <pc:docMk/>
-            <pc:sldMk cId="0" sldId="257"/>
-            <ac:spMk id="2" creationId="{00000000-0000-0000-0000-000000000000}"/>
-          </ac:spMkLst>
-        </pc:spChg>
-        <pc:spChg chg="mod">
-          <ac:chgData name="Yahir Adrian Ortiz Estrella" userId="f05236199d9cb247" providerId="LiveId" clId="{3CBD77D6-72C8-44D6-A27B-976CC077C692}" dt="2026-03-11T23:15:20.624" v="1" actId="13822"/>
-          <ac:spMkLst>
+            <pc:sldMk cId="3091835037" sldId="256"/>
+            <ac:picMk id="230" creationId="{389AC85A-8E3C-7479-3DAC-92F2AC2F85F5}"/>
+          </ac:picMkLst>
+        </pc:picChg>
+        <pc:picChg chg="mod">
+          <ac:chgData name="Yahir Adrian Ortiz Estrella" userId="f05236199d9cb247" providerId="LiveId" clId="{3CBD77D6-72C8-44D6-A27B-976CC077C692}" dt="2026-08-21T01:11:18.874" v="62" actId="962"/>
+          <ac:picMkLst>
             <pc:docMk/>
-            <pc:sldMk cId="0" sldId="257"/>
-            <ac:spMk id="3" creationId="{00000000-0000-0000-0000-000000000000}"/>
-          </ac:spMkLst>
-        </pc:spChg>
-        <pc:spChg chg="mod">
-          <ac:chgData name="Yahir Adrian Ortiz Estrella" userId="f05236199d9cb247" providerId="LiveId" clId="{3CBD77D6-72C8-44D6-A27B-976CC077C692}" dt="2026-03-11T23:15:20.624" v="1" actId="13822"/>
-          <ac:spMkLst>
+            <pc:sldMk cId="3091835037" sldId="256"/>
+            <ac:picMk id="231" creationId="{B8B814B2-77F2-B371-5F99-3FC64FEE8EEB}"/>
+          </ac:picMkLst>
+        </pc:picChg>
+        <pc:picChg chg="mod">
+          <ac:chgData name="Yahir Adrian Ortiz Estrella" userId="f05236199d9cb247" providerId="LiveId" clId="{3CBD77D6-72C8-44D6-A27B-976CC077C692}" dt="2026-08-21T01:11:28.790" v="63" actId="962"/>
+          <ac:picMkLst>
             <pc:docMk/>
-            <pc:sldMk cId="0" sldId="257"/>
-            <ac:spMk id="4" creationId="{00000000-0000-0000-0000-000000000000}"/>
-          </ac:spMkLst>
-        </pc:spChg>
-        <pc:spChg chg="mod">
-          <ac:chgData name="Yahir Adrian Ortiz Estrella" userId="f05236199d9cb247" providerId="LiveId" clId="{3CBD77D6-72C8-44D6-A27B-976CC077C692}" dt="2026-03-11T23:15:20.624" v="1" actId="13822"/>
-          <ac:spMkLst>
+            <pc:sldMk cId="3091835037" sldId="256"/>
+            <ac:picMk id="232" creationId="{4FD19755-2E96-808A-0F6F-15F51AC097A2}"/>
+          </ac:picMkLst>
+        </pc:picChg>
+        <pc:picChg chg="mod">
+          <ac:chgData name="Yahir Adrian Ortiz Estrella" userId="f05236199d9cb247" providerId="LiveId" clId="{3CBD77D6-72C8-44D6-A27B-976CC077C692}" dt="2026-08-21T01:11:39.607" v="64" actId="962"/>
+          <ac:picMkLst>
             <pc:docMk/>
-            <pc:sldMk cId="0" sldId="257"/>
-            <ac:spMk id="5" creationId="{00000000-0000-0000-0000-000000000000}"/>
-          </ac:spMkLst>
-        </pc:spChg>
-        <pc:spChg chg="mod">
-          <ac:chgData name="Yahir Adrian Ortiz Estrella" userId="f05236199d9cb247" providerId="LiveId" clId="{3CBD77D6-72C8-44D6-A27B-976CC077C692}" dt="2026-03-11T23:15:20.624" v="1" actId="13822"/>
-          <ac:spMkLst>
+            <pc:sldMk cId="3091835037" sldId="256"/>
+            <ac:picMk id="233" creationId="{AF25D470-1B6C-B803-8712-8544B751BE7C}"/>
+          </ac:picMkLst>
+        </pc:picChg>
+        <pc:picChg chg="mod">
+          <ac:chgData name="Yahir Adrian Ortiz Estrella" userId="f05236199d9cb247" providerId="LiveId" clId="{3CBD77D6-72C8-44D6-A27B-976CC077C692}" dt="2026-08-21T01:12:00.695" v="65" actId="962"/>
+          <ac:picMkLst>
             <pc:docMk/>
-            <pc:sldMk cId="0" sldId="257"/>
-            <ac:spMk id="6" creationId="{00000000-0000-0000-0000-000000000000}"/>
-          </ac:spMkLst>
-        </pc:spChg>
-        <pc:spChg chg="mod">
-          <ac:chgData name="Yahir Adrian Ortiz Estrella" userId="f05236199d9cb247" providerId="LiveId" clId="{3CBD77D6-72C8-44D6-A27B-976CC077C692}" dt="2026-03-11T23:15:20.624" v="1" actId="13822"/>
-          <ac:spMkLst>
+            <pc:sldMk cId="3091835037" sldId="256"/>
+            <ac:picMk id="254" creationId="{BCB983C2-4AEA-5226-4F91-24B15BC7ACFE}"/>
+          </ac:picMkLst>
+        </pc:picChg>
+        <pc:picChg chg="mod">
+          <ac:chgData name="Yahir Adrian Ortiz Estrella" userId="f05236199d9cb247" providerId="LiveId" clId="{3CBD77D6-72C8-44D6-A27B-976CC077C692}" dt="2026-08-21T01:12:09.398" v="66" actId="962"/>
+          <ac:picMkLst>
             <pc:docMk/>
-            <pc:sldMk cId="0" sldId="257"/>
-            <ac:spMk id="7" creationId="{00000000-0000-0000-0000-000000000000}"/>
-          </ac:spMkLst>
-        </pc:spChg>
-        <pc:spChg chg="mod">
-          <ac:chgData name="Yahir Adrian Ortiz Estrella" userId="f05236199d9cb247" providerId="LiveId" clId="{3CBD77D6-72C8-44D6-A27B-976CC077C692}" dt="2026-03-11T23:15:20.624" v="1" actId="13822"/>
-          <ac:spMkLst>
+            <pc:sldMk cId="3091835037" sldId="256"/>
+            <ac:picMk id="255" creationId="{03AEC558-3226-E31A-8095-6234F92D028B}"/>
+          </ac:picMkLst>
+        </pc:picChg>
+        <pc:picChg chg="mod">
+          <ac:chgData name="Yahir Adrian Ortiz Estrella" userId="f05236199d9cb247" providerId="LiveId" clId="{3CBD77D6-72C8-44D6-A27B-976CC077C692}" dt="2026-08-21T01:12:15.981" v="67" actId="962"/>
+          <ac:picMkLst>
             <pc:docMk/>
-            <pc:sldMk cId="0" sldId="257"/>
-            <ac:spMk id="8" creationId="{00000000-0000-0000-0000-000000000000}"/>
-          </ac:spMkLst>
-        </pc:spChg>
-        <pc:spChg chg="mod">
-          <ac:chgData name="Yahir Adrian Ortiz Estrella" userId="f05236199d9cb247" providerId="LiveId" clId="{3CBD77D6-72C8-44D6-A27B-976CC077C692}" dt="2026-03-11T23:15:20.624" v="1" actId="13822"/>
-          <ac:spMkLst>
+            <pc:sldMk cId="3091835037" sldId="256"/>
+            <ac:picMk id="256" creationId="{0124CDBB-79A7-ECFB-E729-22E483A33C95}"/>
+          </ac:picMkLst>
+        </pc:picChg>
+        <pc:picChg chg="mod">
+          <ac:chgData name="Yahir Adrian Ortiz Estrella" userId="f05236199d9cb247" providerId="LiveId" clId="{3CBD77D6-72C8-44D6-A27B-976CC077C692}" dt="2026-08-21T01:12:24.337" v="68" actId="962"/>
+          <ac:picMkLst>
             <pc:docMk/>
-            <pc:sldMk cId="0" sldId="257"/>
-            <ac:spMk id="9" creationId="{00000000-0000-0000-0000-000000000000}"/>
-          </ac:spMkLst>
-        </pc:spChg>
-        <pc:spChg chg="mod">
-          <ac:chgData name="Yahir Adrian Ortiz Estrella" userId="f05236199d9cb247" providerId="LiveId" clId="{3CBD77D6-72C8-44D6-A27B-976CC077C692}" dt="2026-03-11T23:15:20.624" v="1" actId="13822"/>
-          <ac:spMkLst>
+            <pc:sldMk cId="3091835037" sldId="256"/>
+            <ac:picMk id="257" creationId="{3CFF04BA-7372-A245-280B-57883B52F3AD}"/>
+          </ac:picMkLst>
+        </pc:picChg>
+        <pc:picChg chg="mod">
+          <ac:chgData name="Yahir Adrian Ortiz Estrella" userId="f05236199d9cb247" providerId="LiveId" clId="{3CBD77D6-72C8-44D6-A27B-976CC077C692}" dt="2026-08-21T01:12:53.938" v="70" actId="962"/>
+          <ac:picMkLst>
             <pc:docMk/>
-            <pc:sldMk cId="0" sldId="257"/>
-            <ac:spMk id="10" creationId="{00000000-0000-0000-0000-000000000000}"/>
-          </ac:spMkLst>
-        </pc:spChg>
-        <pc:spChg chg="mod">
-          <ac:chgData name="Yahir Adrian Ortiz Estrella" userId="f05236199d9cb247" providerId="LiveId" clId="{3CBD77D6-72C8-44D6-A27B-976CC077C692}" dt="2026-03-11T23:15:20.624" v="1" actId="13822"/>
-          <ac:spMkLst>
+            <pc:sldMk cId="3091835037" sldId="256"/>
+            <ac:picMk id="266" creationId="{464C969C-44D1-CE05-9233-BB0EFFE8FD8E}"/>
+          </ac:picMkLst>
+        </pc:picChg>
+        <pc:picChg chg="mod">
+          <ac:chgData name="Yahir Adrian Ortiz Estrella" userId="f05236199d9cb247" providerId="LiveId" clId="{3CBD77D6-72C8-44D6-A27B-976CC077C692}" dt="2026-08-21T01:13:01.634" v="71" actId="962"/>
+          <ac:picMkLst>
             <pc:docMk/>
-            <pc:sldMk cId="0" sldId="257"/>
-            <ac:spMk id="11" creationId="{00000000-0000-0000-0000-000000000000}"/>
-          </ac:spMkLst>
-        </pc:spChg>
-        <pc:spChg chg="add mod">
-          <ac:chgData name="Yahir Adrian Ortiz Estrella" userId="f05236199d9cb247" providerId="LiveId" clId="{3CBD77D6-72C8-44D6-A27B-976CC077C692}" dt="2026-03-11T23:17:43.366" v="27"/>
-          <ac:spMkLst>
+            <pc:sldMk cId="3091835037" sldId="256"/>
+            <ac:picMk id="267" creationId="{B9681CF5-7543-6F6B-EEAF-9854686E3EC3}"/>
+          </ac:picMkLst>
+        </pc:picChg>
+        <pc:picChg chg="mod">
+          <ac:chgData name="Yahir Adrian Ortiz Estrella" userId="f05236199d9cb247" providerId="LiveId" clId="{3CBD77D6-72C8-44D6-A27B-976CC077C692}" dt="2026-08-21T01:13:11.198" v="72" actId="962"/>
+          <ac:picMkLst>
             <pc:docMk/>
-            <pc:sldMk cId="0" sldId="257"/>
-            <ac:spMk id="12" creationId="{B7A1BF37-4BD5-B429-7EF4-B302413FD37E}"/>
-          </ac:spMkLst>
-        </pc:spChg>
-        <pc:spChg chg="add mod">
-          <ac:chgData name="Yahir Adrian Ortiz Estrella" userId="f05236199d9cb247" providerId="LiveId" clId="{3CBD77D6-72C8-44D6-A27B-976CC077C692}" dt="2026-03-11T23:17:43.366" v="27"/>
-          <ac:spMkLst>
+            <pc:sldMk cId="3091835037" sldId="256"/>
+            <ac:picMk id="268" creationId="{48A7E730-A7C6-338C-D329-33C8925F2994}"/>
+          </ac:picMkLst>
+        </pc:picChg>
+        <pc:picChg chg="mod">
+          <ac:chgData name="Yahir Adrian Ortiz Estrella" userId="f05236199d9cb247" providerId="LiveId" clId="{3CBD77D6-72C8-44D6-A27B-976CC077C692}" dt="2026-08-21T01:13:20.962" v="73" actId="962"/>
+          <ac:picMkLst>
             <pc:docMk/>
-            <pc:sldMk cId="0" sldId="257"/>
-            <ac:spMk id="13" creationId="{31F70EED-A781-6E86-D5E8-19B045C3E995}"/>
-          </ac:spMkLst>
-        </pc:spChg>
-        <pc:spChg chg="add mod">
-          <ac:chgData name="Yahir Adrian Ortiz Estrella" userId="f05236199d9cb247" providerId="LiveId" clId="{3CBD77D6-72C8-44D6-A27B-976CC077C692}" dt="2026-03-11T23:17:43.366" v="27"/>
-          <ac:spMkLst>
+            <pc:sldMk cId="3091835037" sldId="256"/>
+            <ac:picMk id="269" creationId="{417AD8CB-D7F5-8CC4-7B5D-33C92945C401}"/>
+          </ac:picMkLst>
+        </pc:picChg>
+        <pc:picChg chg="mod">
+          <ac:chgData name="Yahir Adrian Ortiz Estrella" userId="f05236199d9cb247" providerId="LiveId" clId="{3CBD77D6-72C8-44D6-A27B-976CC077C692}" dt="2026-08-21T01:13:32.865" v="74" actId="962"/>
+          <ac:picMkLst>
             <pc:docMk/>
-            <pc:sldMk cId="0" sldId="257"/>
-            <ac:spMk id="14" creationId="{175BCE5B-E3B9-9A51-597B-E2CFA56572FF}"/>
-          </ac:spMkLst>
-        </pc:spChg>
-        <pc:spChg chg="add mod">
-          <ac:chgData name="Yahir Adrian Ortiz Estrella" userId="f05236199d9cb247" providerId="LiveId" clId="{3CBD77D6-72C8-44D6-A27B-976CC077C692}" dt="2026-03-11T23:17:43.366" v="27"/>
-          <ac:spMkLst>
+            <pc:sldMk cId="3091835037" sldId="256"/>
+            <ac:picMk id="278" creationId="{DB7C8437-E58D-62DC-1220-5685B18434F5}"/>
+          </ac:picMkLst>
+        </pc:picChg>
+        <pc:picChg chg="mod">
+          <ac:chgData name="Yahir Adrian Ortiz Estrella" userId="f05236199d9cb247" providerId="LiveId" clId="{3CBD77D6-72C8-44D6-A27B-976CC077C692}" dt="2026-08-21T01:13:42.661" v="75" actId="962"/>
+          <ac:picMkLst>
             <pc:docMk/>
-            <pc:sldMk cId="0" sldId="257"/>
-            <ac:spMk id="15" creationId="{8700E818-4800-11D0-DC23-9DEC8DA26C5A}"/>
-          </ac:spMkLst>
-        </pc:spChg>
-        <pc:spChg chg="add mod">
-          <ac:chgData name="Yahir Adrian Ortiz Estrella" userId="f05236199d9cb247" providerId="LiveId" clId="{3CBD77D6-72C8-44D6-A27B-976CC077C692}" dt="2026-03-11T23:17:43.366" v="27"/>
-          <ac:spMkLst>
+            <pc:sldMk cId="3091835037" sldId="256"/>
+            <ac:picMk id="279" creationId="{DB68B9CE-D617-1141-CB0F-4B8804553112}"/>
+          </ac:picMkLst>
+        </pc:picChg>
+        <pc:picChg chg="mod">
+          <ac:chgData name="Yahir Adrian Ortiz Estrella" userId="f05236199d9cb247" providerId="LiveId" clId="{3CBD77D6-72C8-44D6-A27B-976CC077C692}" dt="2026-08-21T01:13:51.325" v="76" actId="962"/>
+          <ac:picMkLst>
             <pc:docMk/>
-            <pc:sldMk cId="0" sldId="257"/>
-            <ac:spMk id="16" creationId="{058D1234-E1E3-F043-F997-937C4148D26C}"/>
-          </ac:spMkLst>
-        </pc:spChg>
-        <pc:spChg chg="add mod">
-          <ac:chgData name="Yahir Adrian Ortiz Estrella" userId="f05236199d9cb247" providerId="LiveId" clId="{3CBD77D6-72C8-44D6-A27B-976CC077C692}" dt="2026-03-11T23:17:43.366" v="27"/>
-          <ac:spMkLst>
+            <pc:sldMk cId="3091835037" sldId="256"/>
+            <ac:picMk id="280" creationId="{A6FD0EDA-CE82-018C-2074-14E13E45D997}"/>
+          </ac:picMkLst>
+        </pc:picChg>
+        <pc:picChg chg="mod">
+          <ac:chgData name="Yahir Adrian Ortiz Estrella" userId="f05236199d9cb247" providerId="LiveId" clId="{3CBD77D6-72C8-44D6-A27B-976CC077C692}" dt="2026-08-21T01:14:01.754" v="77" actId="962"/>
+          <ac:picMkLst>
             <pc:docMk/>
-            <pc:sldMk cId="0" sldId="257"/>
-            <ac:spMk id="17" creationId="{AF4534CD-9171-7022-1D5D-90FC481FA424}"/>
-          </ac:spMkLst>
-        </pc:spChg>
-        <pc:spChg chg="add mod">
-          <ac:chgData name="Yahir Adrian Ortiz Estrella" userId="f05236199d9cb247" providerId="LiveId" clId="{3CBD77D6-72C8-44D6-A27B-976CC077C692}" dt="2026-03-11T23:17:43.366" v="27"/>
-          <ac:spMkLst>
+            <pc:sldMk cId="3091835037" sldId="256"/>
+            <ac:picMk id="281" creationId="{E72E5B1A-632B-D649-C3D7-DFDBE2BD810E}"/>
+          </ac:picMkLst>
+        </pc:picChg>
+        <pc:picChg chg="mod">
+          <ac:chgData name="Yahir Adrian Ortiz Estrella" userId="f05236199d9cb247" providerId="LiveId" clId="{3CBD77D6-72C8-44D6-A27B-976CC077C692}" dt="2026-08-21T01:14:44.686" v="78" actId="962"/>
+          <ac:picMkLst>
             <pc:docMk/>
-            <pc:sldMk cId="0" sldId="257"/>
-            <ac:spMk id="18" creationId="{6622AA48-BD18-CD87-6698-96D3D2C57E57}"/>
-          </ac:spMkLst>
-        </pc:spChg>
-        <pc:spChg chg="add mod">
-          <ac:chgData name="Yahir Adrian Ortiz Estrella" userId="f05236199d9cb247" providerId="LiveId" clId="{3CBD77D6-72C8-44D6-A27B-976CC077C692}" dt="2026-03-11T23:17:43.366" v="27"/>
-          <ac:spMkLst>
+            <pc:sldMk cId="3091835037" sldId="256"/>
+            <ac:picMk id="290" creationId="{BEB7A81E-87A9-C2C8-7582-939C3A38EE45}"/>
+          </ac:picMkLst>
+        </pc:picChg>
+        <pc:picChg chg="mod">
+          <ac:chgData name="Yahir Adrian Ortiz Estrella" userId="f05236199d9cb247" providerId="LiveId" clId="{3CBD77D6-72C8-44D6-A27B-976CC077C692}" dt="2026-08-21T01:14:51.486" v="79" actId="962"/>
+          <ac:picMkLst>
             <pc:docMk/>
-            <pc:sldMk cId="0" sldId="257"/>
-            <ac:spMk id="19" creationId="{A8F86979-18B5-7960-2AD7-CCFAC71D3908}"/>
-          </ac:spMkLst>
-        </pc:spChg>
-        <pc:spChg chg="add mod">
-          <ac:chgData name="Yahir Adrian Ortiz Estrella" userId="f05236199d9cb247" providerId="LiveId" clId="{3CBD77D6-72C8-44D6-A27B-976CC077C692}" dt="2026-03-11T23:17:43.366" v="27"/>
-          <ac:spMkLst>
+            <pc:sldMk cId="3091835037" sldId="256"/>
+            <ac:picMk id="291" creationId="{C2532499-9163-A0C8-2BC9-21C3EE207329}"/>
+          </ac:picMkLst>
+        </pc:picChg>
+        <pc:picChg chg="mod">
+          <ac:chgData name="Yahir Adrian Ortiz Estrella" userId="f05236199d9cb247" providerId="LiveId" clId="{3CBD77D6-72C8-44D6-A27B-976CC077C692}" dt="2026-08-21T01:14:58.705" v="80" actId="962"/>
+          <ac:picMkLst>
             <pc:docMk/>
-            <pc:sldMk cId="0" sldId="257"/>
-            <ac:spMk id="20" creationId="{27FD4022-0002-AEB6-21A8-FCD15BD760BF}"/>
-          </ac:spMkLst>
-        </pc:spChg>
-        <pc:spChg chg="add mod">
-          <ac:chgData name="Yahir Adrian Ortiz Estrella" userId="f05236199d9cb247" providerId="LiveId" clId="{3CBD77D6-72C8-44D6-A27B-976CC077C692}" dt="2026-03-11T23:17:43.366" v="27"/>
-          <ac:spMkLst>
+            <pc:sldMk cId="3091835037" sldId="256"/>
+            <ac:picMk id="292" creationId="{03FCA767-7987-4E2E-F463-19B9D7DDF0D1}"/>
+          </ac:picMkLst>
+        </pc:picChg>
+        <pc:picChg chg="mod">
+          <ac:chgData name="Yahir Adrian Ortiz Estrella" userId="f05236199d9cb247" providerId="LiveId" clId="{3CBD77D6-72C8-44D6-A27B-976CC077C692}" dt="2026-08-21T01:15:06.737" v="81" actId="962"/>
+          <ac:picMkLst>
             <pc:docMk/>
-            <pc:sldMk cId="0" sldId="257"/>
-            <ac:spMk id="21" creationId="{A5D0F54F-9A8F-CF11-FC19-7399E5FDF040}"/>
-          </ac:spMkLst>
-        </pc:spChg>
-      </pc:sldChg>
-      <pc:sldChg chg="addSp modSp mod">
-        <pc:chgData name="Yahir Adrian Ortiz Estrella" userId="f05236199d9cb247" providerId="LiveId" clId="{3CBD77D6-72C8-44D6-A27B-976CC077C692}" dt="2026-03-11T23:17:45.816" v="28"/>
-        <pc:sldMkLst>
-          <pc:docMk/>
-          <pc:sldMk cId="0" sldId="258"/>
-        </pc:sldMkLst>
-        <pc:spChg chg="mod">
-          <ac:chgData name="Yahir Adrian Ortiz Estrella" userId="f05236199d9cb247" providerId="LiveId" clId="{3CBD77D6-72C8-44D6-A27B-976CC077C692}" dt="2026-03-11T23:15:25.789" v="2" actId="13822"/>
-          <ac:spMkLst>
-            <pc:docMk/>
-            <pc:sldMk cId="0" sldId="258"/>
-            <ac:spMk id="2" creationId="{00000000-0000-0000-0000-000000000000}"/>
-          </ac:spMkLst>
-        </pc:spChg>
-        <pc:spChg chg="mod">
-          <ac:chgData name="Yahir Adrian Ortiz Estrella" userId="f05236199d9cb247" providerId="LiveId" clId="{3CBD77D6-72C8-44D6-A27B-976CC077C692}" dt="2026-03-11T23:15:25.789" v="2" actId="13822"/>
-          <ac:spMkLst>
-            <pc:docMk/>
-            <pc:sldMk cId="0" sldId="258"/>
-            <ac:spMk id="3" creationId="{00000000-0000-0000-0000-000000000000}"/>
-          </ac:spMkLst>
-        </pc:spChg>
-        <pc:spChg chg="mod">
-          <ac:chgData name="Yahir Adrian Ortiz Estrella" userId="f05236199d9cb247" providerId="LiveId" clId="{3CBD77D6-72C8-44D6-A27B-976CC077C692}" dt="2026-03-11T23:15:25.789" v="2" actId="13822"/>
-          <ac:spMkLst>
-            <pc:docMk/>
-            <pc:sldMk cId="0" sldId="258"/>
-            <ac:spMk id="4" creationId="{00000000-0000-0000-0000-000000000000}"/>
-          </ac:spMkLst>
-        </pc:spChg>
-        <pc:spChg chg="mod">
-          <ac:chgData name="Yahir Adrian Ortiz Estrella" userId="f05236199d9cb247" providerId="LiveId" clId="{3CBD77D6-72C8-44D6-A27B-976CC077C692}" dt="2026-03-11T23:15:25.789" v="2" actId="13822"/>
-          <ac:spMkLst>
-            <pc:docMk/>
-            <pc:sldMk cId="0" sldId="258"/>
-            <ac:spMk id="5" creationId="{00000000-0000-0000-0000-000000000000}"/>
-          </ac:spMkLst>
-        </pc:spChg>
-        <pc:spChg chg="mod">
-          <ac:chgData name="Yahir Adrian Ortiz Estrella" userId="f05236199d9cb247" providerId="LiveId" clId="{3CBD77D6-72C8-44D6-A27B-976CC077C692}" dt="2026-03-11T23:15:25.789" v="2" actId="13822"/>
-          <ac:spMkLst>
-            <pc:docMk/>
-            <pc:sldMk cId="0" sldId="258"/>
-            <ac:spMk id="6" creationId="{00000000-0000-0000-0000-000000000000}"/>
-          </ac:spMkLst>
-        </pc:spChg>
-        <pc:spChg chg="mod">
-          <ac:chgData name="Yahir Adrian Ortiz Estrella" userId="f05236199d9cb247" providerId="LiveId" clId="{3CBD77D6-72C8-44D6-A27B-976CC077C692}" dt="2026-03-11T23:15:25.789" v="2" actId="13822"/>
-          <ac:spMkLst>
-            <pc:docMk/>
-            <pc:sldMk cId="0" sldId="258"/>
-            <ac:spMk id="7" creationId="{00000000-0000-0000-0000-000000000000}"/>
-          </ac:spMkLst>
-        </pc:spChg>
-        <pc:spChg chg="mod">
-          <ac:chgData name="Yahir Adrian Ortiz Estrella" userId="f05236199d9cb247" providerId="LiveId" clId="{3CBD77D6-72C8-44D6-A27B-976CC077C692}" dt="2026-03-11T23:15:25.789" v="2" actId="13822"/>
-          <ac:spMkLst>
-            <pc:docMk/>
-            <pc:sldMk cId="0" sldId="258"/>
-            <ac:spMk id="8" creationId="{00000000-0000-0000-0000-000000000000}"/>
-          </ac:spMkLst>
-        </pc:spChg>
-        <pc:spChg chg="mod">
-          <ac:chgData name="Yahir Adrian Ortiz Estrella" userId="f05236199d9cb247" providerId="LiveId" clId="{3CBD77D6-72C8-44D6-A27B-976CC077C692}" dt="2026-03-11T23:15:25.789" v="2" actId="13822"/>
-          <ac:spMkLst>
-            <pc:docMk/>
-            <pc:sldMk cId="0" sldId="258"/>
-            <ac:spMk id="9" creationId="{00000000-0000-0000-0000-000000000000}"/>
-          </ac:spMkLst>
-        </pc:spChg>
-        <pc:spChg chg="mod">
-          <ac:chgData name="Yahir Adrian Ortiz Estrella" userId="f05236199d9cb247" providerId="LiveId" clId="{3CBD77D6-72C8-44D6-A27B-976CC077C692}" dt="2026-03-11T23:15:25.789" v="2" actId="13822"/>
-          <ac:spMkLst>
-            <pc:docMk/>
-            <pc:sldMk cId="0" sldId="258"/>
-            <ac:spMk id="10" creationId="{00000000-0000-0000-0000-000000000000}"/>
-          </ac:spMkLst>
-        </pc:spChg>
-        <pc:spChg chg="mod">
-          <ac:chgData name="Yahir Adrian Ortiz Estrella" userId="f05236199d9cb247" providerId="LiveId" clId="{3CBD77D6-72C8-44D6-A27B-976CC077C692}" dt="2026-03-11T23:15:25.789" v="2" actId="13822"/>
-          <ac:spMkLst>
-            <pc:docMk/>
-            <pc:sldMk cId="0" sldId="258"/>
-            <ac:spMk id="11" creationId="{00000000-0000-0000-0000-000000000000}"/>
-          </ac:spMkLst>
-        </pc:spChg>
-        <pc:spChg chg="add mod">
-          <ac:chgData name="Yahir Adrian Ortiz Estrella" userId="f05236199d9cb247" providerId="LiveId" clId="{3CBD77D6-72C8-44D6-A27B-976CC077C692}" dt="2026-03-11T23:17:45.816" v="28"/>
-          <ac:spMkLst>
-            <pc:docMk/>
-            <pc:sldMk cId="0" sldId="258"/>
-            <ac:spMk id="12" creationId="{46923CB0-7CED-5A14-0894-B6661EB05289}"/>
-          </ac:spMkLst>
-        </pc:spChg>
-        <pc:spChg chg="add mod">
-          <ac:chgData name="Yahir Adrian Ortiz Estrella" userId="f05236199d9cb247" providerId="LiveId" clId="{3CBD77D6-72C8-44D6-A27B-976CC077C692}" dt="2026-03-11T23:17:45.816" v="28"/>
-          <ac:spMkLst>
-            <pc:docMk/>
-            <pc:sldMk cId="0" sldId="258"/>
-            <ac:spMk id="13" creationId="{CAB5D600-0E2F-B95E-F880-156F448F1D2E}"/>
-          </ac:spMkLst>
-        </pc:spChg>
-        <pc:spChg chg="add mod">
-          <ac:chgData name="Yahir Adrian Ortiz Estrella" userId="f05236199d9cb247" providerId="LiveId" clId="{3CBD77D6-72C8-44D6-A27B-976CC077C692}" dt="2026-03-11T23:17:45.816" v="28"/>
-          <ac:spMkLst>
-            <pc:docMk/>
-            <pc:sldMk cId="0" sldId="258"/>
-            <ac:spMk id="14" creationId="{856A881B-FB45-34E7-8CB2-E2F95CABC825}"/>
-          </ac:spMkLst>
-        </pc:spChg>
-        <pc:spChg chg="add mod">
-          <ac:chgData name="Yahir Adrian Ortiz Estrella" userId="f05236199d9cb247" providerId="LiveId" clId="{3CBD77D6-72C8-44D6-A27B-976CC077C692}" dt="2026-03-11T23:17:45.816" v="28"/>
-          <ac:spMkLst>
-            <pc:docMk/>
-            <pc:sldMk cId="0" sldId="258"/>
-            <ac:spMk id="15" creationId="{87874172-E4DC-5B23-8AF6-912060C6F149}"/>
-          </ac:spMkLst>
-        </pc:spChg>
-        <pc:spChg chg="add mod">
-          <ac:chgData name="Yahir Adrian Ortiz Estrella" userId="f05236199d9cb247" providerId="LiveId" clId="{3CBD77D6-72C8-44D6-A27B-976CC077C692}" dt="2026-03-11T23:17:45.816" v="28"/>
-          <ac:spMkLst>
-            <pc:docMk/>
-            <pc:sldMk cId="0" sldId="258"/>
-            <ac:spMk id="16" creationId="{1E9F212E-C17A-03DF-77AB-7DA849932721}"/>
-          </ac:spMkLst>
-        </pc:spChg>
-        <pc:spChg chg="add mod">
-          <ac:chgData name="Yahir Adrian Ortiz Estrella" userId="f05236199d9cb247" providerId="LiveId" clId="{3CBD77D6-72C8-44D6-A27B-976CC077C692}" dt="2026-03-11T23:17:45.816" v="28"/>
-          <ac:spMkLst>
-            <pc:docMk/>
-            <pc:sldMk cId="0" sldId="258"/>
-            <ac:spMk id="17" creationId="{C98E114E-A221-6F23-09CE-4AEEF865ECB1}"/>
-          </ac:spMkLst>
-        </pc:spChg>
-        <pc:spChg chg="add mod">
-          <ac:chgData name="Yahir Adrian Ortiz Estrella" userId="f05236199d9cb247" providerId="LiveId" clId="{3CBD77D6-72C8-44D6-A27B-976CC077C692}" dt="2026-03-11T23:17:45.816" v="28"/>
-          <ac:spMkLst>
-            <pc:docMk/>
-            <pc:sldMk cId="0" sldId="258"/>
-            <ac:spMk id="18" creationId="{D56A2EBE-85AE-00BE-4040-792633843DD4}"/>
-          </ac:spMkLst>
-        </pc:spChg>
-        <pc:spChg chg="add mod">
-          <ac:chgData name="Yahir Adrian Ortiz Estrella" userId="f05236199d9cb247" providerId="LiveId" clId="{3CBD77D6-72C8-44D6-A27B-976CC077C692}" dt="2026-03-11T23:17:45.816" v="28"/>
-          <ac:spMkLst>
-            <pc:docMk/>
-            <pc:sldMk cId="0" sldId="258"/>
-            <ac:spMk id="19" creationId="{9BCB9DA7-6D49-330F-953D-08A64CAC85F2}"/>
-          </ac:spMkLst>
-        </pc:spChg>
-        <pc:spChg chg="add mod">
-          <ac:chgData name="Yahir Adrian Ortiz Estrella" userId="f05236199d9cb247" providerId="LiveId" clId="{3CBD77D6-72C8-44D6-A27B-976CC077C692}" dt="2026-03-11T23:17:45.816" v="28"/>
-          <ac:spMkLst>
-            <pc:docMk/>
-            <pc:sldMk cId="0" sldId="258"/>
-            <ac:spMk id="20" creationId="{217D560B-67D7-80DB-B364-57D10E734405}"/>
-          </ac:spMkLst>
-        </pc:spChg>
-        <pc:spChg chg="add mod">
-          <ac:chgData name="Yahir Adrian Ortiz Estrella" userId="f05236199d9cb247" providerId="LiveId" clId="{3CBD77D6-72C8-44D6-A27B-976CC077C692}" dt="2026-03-11T23:17:45.816" v="28"/>
-          <ac:spMkLst>
-            <pc:docMk/>
-            <pc:sldMk cId="0" sldId="258"/>
-            <ac:spMk id="21" creationId="{99FF5AB2-4A31-40BE-2970-3FAAAAD28067}"/>
-          </ac:spMkLst>
-        </pc:spChg>
+            <pc:sldMk cId="3091835037" sldId="256"/>
+            <ac:picMk id="293" creationId="{D63719E4-FCD8-BE19-239A-47A858447A80}"/>
+          </ac:picMkLst>
+        </pc:picChg>
       </pc:sldChg>
     </pc:docChg>
   </pc:docChgLst>
@@ -698,7 +513,7 @@
             </a:lvl1pPr>
           </a:lstStyle>
           <a:p>
-            <a:endParaRPr lang="es-MX"/>
+            <a:endParaRPr lang="en-US"/>
           </a:p>
         </p:txBody>
       </p:sp>
@@ -729,11 +544,11 @@
             </a:lvl1pPr>
           </a:lstStyle>
           <a:p>
-            <a:fld id="{B519BE20-8124-423B-A517-54471B0C3F7F}" type="datetimeFigureOut">
-              <a:rPr lang="es-MX" smtClean="0"/>
-              <a:t>20/08/2026</a:t>
+            <a:fld id="{996D37EC-11FB-48D2-949C-64D2BEBF1517}" type="datetimeFigureOut">
+              <a:rPr lang="en-US" smtClean="0"/>
+              <a:t>8/20/2026</a:t>
             </a:fld>
-            <a:endParaRPr lang="es-MX"/>
+            <a:endParaRPr lang="en-US"/>
           </a:p>
         </p:txBody>
       </p:sp>
@@ -749,8 +564,8 @@
         </p:nvSpPr>
         <p:spPr>
           <a:xfrm>
-            <a:off x="2236788" y="1143000"/>
-            <a:ext cx="2384425" cy="3086100"/>
+            <a:off x="2360613" y="1143000"/>
+            <a:ext cx="2136775" cy="3086100"/>
           </a:xfrm>
           <a:prstGeom prst="rect">
             <a:avLst/>
@@ -766,7 +581,7 @@
           <a:bodyPr vert="horz" lIns="91440" tIns="45720" rIns="91440" bIns="45720" rtlCol="0" anchor="ctr"/>
           <a:lstStyle/>
           <a:p>
-            <a:endParaRPr lang="es-MX"/>
+            <a:endParaRPr lang="en-US"/>
           </a:p>
         </p:txBody>
       </p:sp>
@@ -826,7 +641,6 @@
               <a:rPr lang="en-US"/>
               <a:t>Fifth level</a:t>
             </a:r>
-            <a:endParaRPr lang="es-MX"/>
           </a:p>
         </p:txBody>
       </p:sp>
@@ -857,7 +671,7 @@
             </a:lvl1pPr>
           </a:lstStyle>
           <a:p>
-            <a:endParaRPr lang="es-MX"/>
+            <a:endParaRPr lang="en-US"/>
           </a:p>
         </p:txBody>
       </p:sp>
@@ -888,18 +702,18 @@
             </a:lvl1pPr>
           </a:lstStyle>
           <a:p>
-            <a:fld id="{1F465A27-FC27-4F35-A92A-129CEC951A98}" type="slidenum">
-              <a:rPr lang="es-MX" smtClean="0"/>
+            <a:fld id="{5D7C4339-32C6-4E36-9C2D-6EEC715EEF89}" type="slidenum">
+              <a:rPr lang="en-US" smtClean="0"/>
               <a:t>‹#›</a:t>
             </a:fld>
-            <a:endParaRPr lang="es-MX"/>
+            <a:endParaRPr lang="en-US"/>
           </a:p>
         </p:txBody>
       </p:sp>
     </p:spTree>
     <p:extLst>
       <p:ext uri="{BB962C8B-B14F-4D97-AF65-F5344CB8AC3E}">
-        <p14:creationId xmlns:p14="http://schemas.microsoft.com/office/powerpoint/2010/main" val="3754972780"/>
+        <p14:creationId xmlns:p14="http://schemas.microsoft.com/office/powerpoint/2010/main" val="1793743912"/>
       </p:ext>
     </p:extLst>
   </p:cSld>
@@ -1043,7 +857,7 @@
           <a:bodyPr/>
           <a:lstStyle/>
           <a:p>
-            <a:endParaRPr lang="es-MX" dirty="0"/>
+            <a:endParaRPr lang="en-US" dirty="0"/>
           </a:p>
         </p:txBody>
       </p:sp>
@@ -1062,18 +876,18 @@
           <a:bodyPr/>
           <a:lstStyle/>
           <a:p>
-            <a:fld id="{1F465A27-FC27-4F35-A92A-129CEC951A98}" type="slidenum">
-              <a:rPr lang="es-MX" smtClean="0"/>
+            <a:fld id="{5D7C4339-32C6-4E36-9C2D-6EEC715EEF89}" type="slidenum">
+              <a:rPr lang="en-US" smtClean="0"/>
               <a:t>1</a:t>
             </a:fld>
-            <a:endParaRPr lang="es-MX"/>
+            <a:endParaRPr lang="en-US"/>
           </a:p>
         </p:txBody>
       </p:sp>
     </p:spTree>
     <p:extLst>
       <p:ext uri="{BB962C8B-B14F-4D97-AF65-F5344CB8AC3E}">
-        <p14:creationId xmlns:p14="http://schemas.microsoft.com/office/powerpoint/2010/main" val="2211098220"/>
+        <p14:creationId xmlns:p14="http://schemas.microsoft.com/office/powerpoint/2010/main" val="377995920"/>
       </p:ext>
     </p:extLst>
   </p:cSld>
@@ -1112,18 +926,23 @@
         </p:nvSpPr>
         <p:spPr>
           <a:xfrm>
-            <a:off x="685800" y="2130425"/>
-            <a:ext cx="7772400" cy="1470025"/>
+            <a:off x="514350" y="1621191"/>
+            <a:ext cx="5829300" cy="3448756"/>
           </a:xfrm>
         </p:spPr>
         <p:txBody>
-          <a:bodyPr/>
-          <a:lstStyle/>
+          <a:bodyPr anchor="b"/>
+          <a:lstStyle>
+            <a:lvl1pPr algn="ctr">
+              <a:defRPr sz="4500"/>
+            </a:lvl1pPr>
+          </a:lstStyle>
           <a:p>
             <a:r>
               <a:rPr lang="en-US"/>
               <a:t>Click to edit Master title style</a:t>
             </a:r>
+            <a:endParaRPr lang="en-US" dirty="0"/>
           </a:p>
         </p:txBody>
       </p:sp>
@@ -1139,8 +958,8 @@
         </p:nvSpPr>
         <p:spPr>
           <a:xfrm>
-            <a:off x="1371600" y="3886200"/>
-            <a:ext cx="6400800" cy="1752600"/>
+            <a:off x="857250" y="5202944"/>
+            <a:ext cx="5143500" cy="2391656"/>
           </a:xfrm>
         </p:spPr>
         <p:txBody>
@@ -1148,93 +967,39 @@
           <a:lstStyle>
             <a:lvl1pPr marL="0" indent="0" algn="ctr">
               <a:buNone/>
-              <a:defRPr>
-                <a:solidFill>
-                  <a:schemeClr val="tx1">
-                    <a:tint val="75000"/>
-                  </a:schemeClr>
-                </a:solidFill>
-              </a:defRPr>
+              <a:defRPr sz="1800"/>
             </a:lvl1pPr>
-            <a:lvl2pPr marL="457200" indent="0" algn="ctr">
+            <a:lvl2pPr marL="342900" indent="0" algn="ctr">
               <a:buNone/>
-              <a:defRPr>
-                <a:solidFill>
-                  <a:schemeClr val="tx1">
-                    <a:tint val="75000"/>
-                  </a:schemeClr>
-                </a:solidFill>
-              </a:defRPr>
+              <a:defRPr sz="1500"/>
             </a:lvl2pPr>
-            <a:lvl3pPr marL="914400" indent="0" algn="ctr">
+            <a:lvl3pPr marL="685800" indent="0" algn="ctr">
               <a:buNone/>
-              <a:defRPr>
-                <a:solidFill>
-                  <a:schemeClr val="tx1">
-                    <a:tint val="75000"/>
-                  </a:schemeClr>
-                </a:solidFill>
-              </a:defRPr>
+              <a:defRPr sz="1350"/>
             </a:lvl3pPr>
-            <a:lvl4pPr marL="1371600" indent="0" algn="ctr">
+            <a:lvl4pPr marL="1028700" indent="0" algn="ctr">
               <a:buNone/>
-              <a:defRPr>
-                <a:solidFill>
-                  <a:schemeClr val="tx1">
-                    <a:tint val="75000"/>
-                  </a:schemeClr>
-                </a:solidFill>
-              </a:defRPr>
+              <a:defRPr sz="1200"/>
             </a:lvl4pPr>
-            <a:lvl5pPr marL="1828800" indent="0" algn="ctr">
+            <a:lvl5pPr marL="1371600" indent="0" algn="ctr">
               <a:buNone/>
-              <a:defRPr>
-                <a:solidFill>
-                  <a:schemeClr val="tx1">
-                    <a:tint val="75000"/>
-                  </a:schemeClr>
-                </a:solidFill>
-              </a:defRPr>
+              <a:defRPr sz="1200"/>
             </a:lvl5pPr>
-            <a:lvl6pPr marL="2286000" indent="0" algn="ctr">
+            <a:lvl6pPr marL="1714500" indent="0" algn="ctr">
               <a:buNone/>
-              <a:defRPr>
-                <a:solidFill>
-                  <a:schemeClr val="tx1">
-                    <a:tint val="75000"/>
-                  </a:schemeClr>
-                </a:solidFill>
-              </a:defRPr>
+              <a:defRPr sz="1200"/>
             </a:lvl6pPr>
-            <a:lvl7pPr marL="2743200" indent="0" algn="ctr">
+            <a:lvl7pPr marL="2057400" indent="0" algn="ctr">
               <a:buNone/>
-              <a:defRPr>
-                <a:solidFill>
-                  <a:schemeClr val="tx1">
-                    <a:tint val="75000"/>
-                  </a:schemeClr>
-                </a:solidFill>
-              </a:defRPr>
+              <a:defRPr sz="1200"/>
             </a:lvl7pPr>
-            <a:lvl8pPr marL="3200400" indent="0" algn="ctr">
+            <a:lvl8pPr marL="2400300" indent="0" algn="ctr">
               <a:buNone/>
-              <a:defRPr>
-                <a:solidFill>
-                  <a:schemeClr val="tx1">
-                    <a:tint val="75000"/>
-                  </a:schemeClr>
-                </a:solidFill>
-              </a:defRPr>
+              <a:defRPr sz="1200"/>
             </a:lvl8pPr>
-            <a:lvl9pPr marL="3657600" indent="0" algn="ctr">
+            <a:lvl9pPr marL="2743200" indent="0" algn="ctr">
               <a:buNone/>
-              <a:defRPr>
-                <a:solidFill>
-                  <a:schemeClr val="tx1">
-                    <a:tint val="75000"/>
-                  </a:schemeClr>
-                </a:solidFill>
-              </a:defRPr>
+              <a:defRPr sz="1200"/>
             </a:lvl9pPr>
           </a:lstStyle>
           <a:p>
@@ -1242,6 +1007,7 @@
               <a:rPr lang="en-US"/>
               <a:t>Click to edit Master subtitle style</a:t>
             </a:r>
+            <a:endParaRPr lang="en-US" dirty="0"/>
           </a:p>
         </p:txBody>
       </p:sp>
@@ -1260,11 +1026,11 @@
           <a:bodyPr/>
           <a:lstStyle/>
           <a:p>
-            <a:fld id="{5BCAD085-E8A6-8845-BD4E-CB4CCA059FC4}" type="datetimeFigureOut">
-              <a:rPr lang="en-US" smtClean="0"/>
-              <a:t>8/20/2026</a:t>
+            <a:fld id="{D7D1D1ED-58D1-4761-9C35-C98D6A62E54D}" type="datetimeFigureOut">
+              <a:rPr lang="es-MX" smtClean="0"/>
+              <a:t>20/08/2026</a:t>
             </a:fld>
-            <a:endParaRPr lang="en-US"/>
+            <a:endParaRPr lang="es-MX"/>
           </a:p>
         </p:txBody>
       </p:sp>
@@ -1283,7 +1049,7 @@
           <a:bodyPr/>
           <a:lstStyle/>
           <a:p>
-            <a:endParaRPr lang="en-US"/>
+            <a:endParaRPr lang="es-MX"/>
           </a:p>
         </p:txBody>
       </p:sp>
@@ -1302,18 +1068,18 @@
           <a:bodyPr/>
           <a:lstStyle/>
           <a:p>
-            <a:fld id="{C1FF6DA9-008F-8B48-92A6-B652298478BF}" type="slidenum">
-              <a:rPr lang="en-US" smtClean="0"/>
+            <a:fld id="{D242DAED-DD37-4BC4-8CDE-29781368FEDD}" type="slidenum">
+              <a:rPr lang="es-MX" smtClean="0"/>
               <a:t>‹#›</a:t>
             </a:fld>
-            <a:endParaRPr lang="en-US"/>
+            <a:endParaRPr lang="es-MX"/>
           </a:p>
         </p:txBody>
       </p:sp>
     </p:spTree>
     <p:extLst>
       <p:ext uri="{BB962C8B-B14F-4D97-AF65-F5344CB8AC3E}">
-        <p14:creationId xmlns:p14="http://schemas.microsoft.com/office/powerpoint/2010/main" val="3168075583"/>
+        <p14:creationId xmlns:p14="http://schemas.microsoft.com/office/powerpoint/2010/main" val="1063773898"/>
       </p:ext>
     </p:extLst>
   </p:cSld>
@@ -1359,6 +1125,7 @@
               <a:rPr lang="en-US"/>
               <a:t>Click to edit Master title style</a:t>
             </a:r>
+            <a:endParaRPr lang="en-US" dirty="0"/>
           </a:p>
         </p:txBody>
       </p:sp>
@@ -1410,6 +1177,7 @@
               <a:rPr lang="en-US"/>
               <a:t>Fifth level</a:t>
             </a:r>
+            <a:endParaRPr lang="en-US" dirty="0"/>
           </a:p>
         </p:txBody>
       </p:sp>
@@ -1428,11 +1196,11 @@
           <a:bodyPr/>
           <a:lstStyle/>
           <a:p>
-            <a:fld id="{5BCAD085-E8A6-8845-BD4E-CB4CCA059FC4}" type="datetimeFigureOut">
-              <a:rPr lang="en-US" smtClean="0"/>
-              <a:t>8/20/2026</a:t>
+            <a:fld id="{D7D1D1ED-58D1-4761-9C35-C98D6A62E54D}" type="datetimeFigureOut">
+              <a:rPr lang="es-MX" smtClean="0"/>
+              <a:t>20/08/2026</a:t>
             </a:fld>
-            <a:endParaRPr lang="en-US"/>
+            <a:endParaRPr lang="es-MX"/>
           </a:p>
         </p:txBody>
       </p:sp>
@@ -1451,7 +1219,7 @@
           <a:bodyPr/>
           <a:lstStyle/>
           <a:p>
-            <a:endParaRPr lang="en-US"/>
+            <a:endParaRPr lang="es-MX"/>
           </a:p>
         </p:txBody>
       </p:sp>
@@ -1470,18 +1238,18 @@
           <a:bodyPr/>
           <a:lstStyle/>
           <a:p>
-            <a:fld id="{C1FF6DA9-008F-8B48-92A6-B652298478BF}" type="slidenum">
-              <a:rPr lang="en-US" smtClean="0"/>
+            <a:fld id="{D242DAED-DD37-4BC4-8CDE-29781368FEDD}" type="slidenum">
+              <a:rPr lang="es-MX" smtClean="0"/>
               <a:t>‹#›</a:t>
             </a:fld>
-            <a:endParaRPr lang="en-US"/>
+            <a:endParaRPr lang="es-MX"/>
           </a:p>
         </p:txBody>
       </p:sp>
     </p:spTree>
     <p:extLst>
       <p:ext uri="{BB962C8B-B14F-4D97-AF65-F5344CB8AC3E}">
-        <p14:creationId xmlns:p14="http://schemas.microsoft.com/office/powerpoint/2010/main" val="2910927964"/>
+        <p14:creationId xmlns:p14="http://schemas.microsoft.com/office/powerpoint/2010/main" val="3457341645"/>
       </p:ext>
     </p:extLst>
   </p:cSld>
@@ -1520,8 +1288,8 @@
         </p:nvSpPr>
         <p:spPr>
           <a:xfrm>
-            <a:off x="6629400" y="274638"/>
-            <a:ext cx="2057400" cy="5851525"/>
+            <a:off x="4907757" y="527403"/>
+            <a:ext cx="1478756" cy="8394877"/>
           </a:xfrm>
         </p:spPr>
         <p:txBody>
@@ -1532,6 +1300,7 @@
               <a:rPr lang="en-US"/>
               <a:t>Click to edit Master title style</a:t>
             </a:r>
+            <a:endParaRPr lang="en-US" dirty="0"/>
           </a:p>
         </p:txBody>
       </p:sp>
@@ -1547,8 +1316,8 @@
         </p:nvSpPr>
         <p:spPr>
           <a:xfrm>
-            <a:off x="457200" y="274638"/>
-            <a:ext cx="6019800" cy="5851525"/>
+            <a:off x="471488" y="527403"/>
+            <a:ext cx="4350544" cy="8394877"/>
           </a:xfrm>
         </p:spPr>
         <p:txBody>
@@ -1588,6 +1357,7 @@
               <a:rPr lang="en-US"/>
               <a:t>Fifth level</a:t>
             </a:r>
+            <a:endParaRPr lang="en-US" dirty="0"/>
           </a:p>
         </p:txBody>
       </p:sp>
@@ -1606,11 +1376,11 @@
           <a:bodyPr/>
           <a:lstStyle/>
           <a:p>
-            <a:fld id="{5BCAD085-E8A6-8845-BD4E-CB4CCA059FC4}" type="datetimeFigureOut">
-              <a:rPr lang="en-US" smtClean="0"/>
-              <a:t>8/20/2026</a:t>
+            <a:fld id="{D7D1D1ED-58D1-4761-9C35-C98D6A62E54D}" type="datetimeFigureOut">
+              <a:rPr lang="es-MX" smtClean="0"/>
+              <a:t>20/08/2026</a:t>
             </a:fld>
-            <a:endParaRPr lang="en-US"/>
+            <a:endParaRPr lang="es-MX"/>
           </a:p>
         </p:txBody>
       </p:sp>
@@ -1629,7 +1399,7 @@
           <a:bodyPr/>
           <a:lstStyle/>
           <a:p>
-            <a:endParaRPr lang="en-US"/>
+            <a:endParaRPr lang="es-MX"/>
           </a:p>
         </p:txBody>
       </p:sp>
@@ -1648,18 +1418,18 @@
           <a:bodyPr/>
           <a:lstStyle/>
           <a:p>
-            <a:fld id="{C1FF6DA9-008F-8B48-92A6-B652298478BF}" type="slidenum">
-              <a:rPr lang="en-US" smtClean="0"/>
+            <a:fld id="{D242DAED-DD37-4BC4-8CDE-29781368FEDD}" type="slidenum">
+              <a:rPr lang="es-MX" smtClean="0"/>
               <a:t>‹#›</a:t>
             </a:fld>
-            <a:endParaRPr lang="en-US"/>
+            <a:endParaRPr lang="es-MX"/>
           </a:p>
         </p:txBody>
       </p:sp>
     </p:spTree>
     <p:extLst>
       <p:ext uri="{BB962C8B-B14F-4D97-AF65-F5344CB8AC3E}">
-        <p14:creationId xmlns:p14="http://schemas.microsoft.com/office/powerpoint/2010/main" val="3612223792"/>
+        <p14:creationId xmlns:p14="http://schemas.microsoft.com/office/powerpoint/2010/main" val="1495574639"/>
       </p:ext>
     </p:extLst>
   </p:cSld>
@@ -1705,6 +1475,7 @@
               <a:rPr lang="en-US"/>
               <a:t>Click to edit Master title style</a:t>
             </a:r>
+            <a:endParaRPr lang="en-US" dirty="0"/>
           </a:p>
         </p:txBody>
       </p:sp>
@@ -1756,6 +1527,7 @@
               <a:rPr lang="en-US"/>
               <a:t>Fifth level</a:t>
             </a:r>
+            <a:endParaRPr lang="en-US" dirty="0"/>
           </a:p>
         </p:txBody>
       </p:sp>
@@ -1774,11 +1546,11 @@
           <a:bodyPr/>
           <a:lstStyle/>
           <a:p>
-            <a:fld id="{5BCAD085-E8A6-8845-BD4E-CB4CCA059FC4}" type="datetimeFigureOut">
-              <a:rPr lang="en-US" smtClean="0"/>
-              <a:t>8/20/2026</a:t>
+            <a:fld id="{D7D1D1ED-58D1-4761-9C35-C98D6A62E54D}" type="datetimeFigureOut">
+              <a:rPr lang="es-MX" smtClean="0"/>
+              <a:t>20/08/2026</a:t>
             </a:fld>
-            <a:endParaRPr lang="en-US"/>
+            <a:endParaRPr lang="es-MX"/>
           </a:p>
         </p:txBody>
       </p:sp>
@@ -1797,7 +1569,7 @@
           <a:bodyPr/>
           <a:lstStyle/>
           <a:p>
-            <a:endParaRPr lang="en-US"/>
+            <a:endParaRPr lang="es-MX"/>
           </a:p>
         </p:txBody>
       </p:sp>
@@ -1816,18 +1588,18 @@
           <a:bodyPr/>
           <a:lstStyle/>
           <a:p>
-            <a:fld id="{C1FF6DA9-008F-8B48-92A6-B652298478BF}" type="slidenum">
-              <a:rPr lang="en-US" smtClean="0"/>
+            <a:fld id="{D242DAED-DD37-4BC4-8CDE-29781368FEDD}" type="slidenum">
+              <a:rPr lang="es-MX" smtClean="0"/>
               <a:t>‹#›</a:t>
             </a:fld>
-            <a:endParaRPr lang="en-US"/>
+            <a:endParaRPr lang="es-MX"/>
           </a:p>
         </p:txBody>
       </p:sp>
     </p:spTree>
     <p:extLst>
       <p:ext uri="{BB962C8B-B14F-4D97-AF65-F5344CB8AC3E}">
-        <p14:creationId xmlns:p14="http://schemas.microsoft.com/office/powerpoint/2010/main" val="2614314258"/>
+        <p14:creationId xmlns:p14="http://schemas.microsoft.com/office/powerpoint/2010/main" val="1376198667"/>
       </p:ext>
     </p:extLst>
   </p:cSld>
@@ -1866,15 +1638,15 @@
         </p:nvSpPr>
         <p:spPr>
           <a:xfrm>
-            <a:off x="722313" y="4406900"/>
-            <a:ext cx="7772400" cy="1362075"/>
+            <a:off x="467916" y="2469624"/>
+            <a:ext cx="5915025" cy="4120620"/>
           </a:xfrm>
         </p:spPr>
         <p:txBody>
-          <a:bodyPr anchor="t"/>
+          <a:bodyPr anchor="b"/>
           <a:lstStyle>
-            <a:lvl1pPr algn="l">
-              <a:defRPr sz="4000" b="1" cap="all"/>
+            <a:lvl1pPr>
+              <a:defRPr sz="4500"/>
             </a:lvl1pPr>
           </a:lstStyle>
           <a:p>
@@ -1882,6 +1654,7 @@
               <a:rPr lang="en-US"/>
               <a:t>Click to edit Master title style</a:t>
             </a:r>
+            <a:endParaRPr lang="en-US" dirty="0"/>
           </a:p>
         </p:txBody>
       </p:sp>
@@ -1897,99 +1670,99 @@
         </p:nvSpPr>
         <p:spPr>
           <a:xfrm>
-            <a:off x="722313" y="2906713"/>
-            <a:ext cx="7772400" cy="1500187"/>
+            <a:off x="467916" y="6629226"/>
+            <a:ext cx="5915025" cy="2166937"/>
           </a:xfrm>
         </p:spPr>
         <p:txBody>
-          <a:bodyPr anchor="b"/>
+          <a:bodyPr/>
           <a:lstStyle>
             <a:lvl1pPr marL="0" indent="0">
               <a:buNone/>
-              <a:defRPr sz="2000">
+              <a:defRPr sz="1800">
                 <a:solidFill>
                   <a:schemeClr val="tx1">
-                    <a:tint val="75000"/>
+                    <a:tint val="82000"/>
                   </a:schemeClr>
                 </a:solidFill>
               </a:defRPr>
             </a:lvl1pPr>
-            <a:lvl2pPr marL="457200" indent="0">
+            <a:lvl2pPr marL="342900" indent="0">
               <a:buNone/>
-              <a:defRPr sz="1800">
+              <a:defRPr sz="1500">
                 <a:solidFill>
                   <a:schemeClr val="tx1">
-                    <a:tint val="75000"/>
+                    <a:tint val="82000"/>
                   </a:schemeClr>
                 </a:solidFill>
               </a:defRPr>
             </a:lvl2pPr>
-            <a:lvl3pPr marL="914400" indent="0">
+            <a:lvl3pPr marL="685800" indent="0">
               <a:buNone/>
-              <a:defRPr sz="1600">
+              <a:defRPr sz="1350">
                 <a:solidFill>
                   <a:schemeClr val="tx1">
-                    <a:tint val="75000"/>
+                    <a:tint val="82000"/>
                   </a:schemeClr>
                 </a:solidFill>
               </a:defRPr>
             </a:lvl3pPr>
-            <a:lvl4pPr marL="1371600" indent="0">
+            <a:lvl4pPr marL="1028700" indent="0">
               <a:buNone/>
-              <a:defRPr sz="1400">
+              <a:defRPr sz="1200">
                 <a:solidFill>
                   <a:schemeClr val="tx1">
-                    <a:tint val="75000"/>
+                    <a:tint val="82000"/>
                   </a:schemeClr>
                 </a:solidFill>
               </a:defRPr>
             </a:lvl4pPr>
-            <a:lvl5pPr marL="1828800" indent="0">
+            <a:lvl5pPr marL="1371600" indent="0">
               <a:buNone/>
-              <a:defRPr sz="1400">
+              <a:defRPr sz="1200">
                 <a:solidFill>
                   <a:schemeClr val="tx1">
-                    <a:tint val="75000"/>
+                    <a:tint val="82000"/>
                   </a:schemeClr>
                 </a:solidFill>
               </a:defRPr>
             </a:lvl5pPr>
-            <a:lvl6pPr marL="2286000" indent="0">
+            <a:lvl6pPr marL="1714500" indent="0">
               <a:buNone/>
-              <a:defRPr sz="1400">
+              <a:defRPr sz="1200">
                 <a:solidFill>
                   <a:schemeClr val="tx1">
-                    <a:tint val="75000"/>
+                    <a:tint val="82000"/>
                   </a:schemeClr>
                 </a:solidFill>
               </a:defRPr>
             </a:lvl6pPr>
-            <a:lvl7pPr marL="2743200" indent="0">
+            <a:lvl7pPr marL="2057400" indent="0">
               <a:buNone/>
-              <a:defRPr sz="1400">
+              <a:defRPr sz="1200">
                 <a:solidFill>
                   <a:schemeClr val="tx1">
-                    <a:tint val="75000"/>
+                    <a:tint val="82000"/>
                   </a:schemeClr>
                 </a:solidFill>
               </a:defRPr>
             </a:lvl7pPr>
-            <a:lvl8pPr marL="3200400" indent="0">
+            <a:lvl8pPr marL="2400300" indent="0">
               <a:buNone/>
-              <a:defRPr sz="1400">
+              <a:defRPr sz="1200">
                 <a:solidFill>
                   <a:schemeClr val="tx1">
-                    <a:tint val="75000"/>
+                    <a:tint val="82000"/>
                   </a:schemeClr>
                 </a:solidFill>
               </a:defRPr>
             </a:lvl8pPr>
-            <a:lvl9pPr marL="3657600" indent="0">
+            <a:lvl9pPr marL="2743200" indent="0">
               <a:buNone/>
-              <a:defRPr sz="1400">
+              <a:defRPr sz="1200">
                 <a:solidFill>
                   <a:schemeClr val="tx1">
-                    <a:tint val="75000"/>
+                    <a:tint val="82000"/>
                   </a:schemeClr>
                 </a:solidFill>
               </a:defRPr>
@@ -2019,11 +1792,11 @@
           <a:bodyPr/>
           <a:lstStyle/>
           <a:p>
-            <a:fld id="{5BCAD085-E8A6-8845-BD4E-CB4CCA059FC4}" type="datetimeFigureOut">
-              <a:rPr lang="en-US" smtClean="0"/>
-              <a:t>8/20/2026</a:t>
+            <a:fld id="{D7D1D1ED-58D1-4761-9C35-C98D6A62E54D}" type="datetimeFigureOut">
+              <a:rPr lang="es-MX" smtClean="0"/>
+              <a:t>20/08/2026</a:t>
             </a:fld>
-            <a:endParaRPr lang="en-US"/>
+            <a:endParaRPr lang="es-MX"/>
           </a:p>
         </p:txBody>
       </p:sp>
@@ -2042,7 +1815,7 @@
           <a:bodyPr/>
           <a:lstStyle/>
           <a:p>
-            <a:endParaRPr lang="en-US"/>
+            <a:endParaRPr lang="es-MX"/>
           </a:p>
         </p:txBody>
       </p:sp>
@@ -2061,18 +1834,18 @@
           <a:bodyPr/>
           <a:lstStyle/>
           <a:p>
-            <a:fld id="{C1FF6DA9-008F-8B48-92A6-B652298478BF}" type="slidenum">
-              <a:rPr lang="en-US" smtClean="0"/>
+            <a:fld id="{D242DAED-DD37-4BC4-8CDE-29781368FEDD}" type="slidenum">
+              <a:rPr lang="es-MX" smtClean="0"/>
               <a:t>‹#›</a:t>
             </a:fld>
-            <a:endParaRPr lang="en-US"/>
+            <a:endParaRPr lang="es-MX"/>
           </a:p>
         </p:txBody>
       </p:sp>
     </p:spTree>
     <p:extLst>
       <p:ext uri="{BB962C8B-B14F-4D97-AF65-F5344CB8AC3E}">
-        <p14:creationId xmlns:p14="http://schemas.microsoft.com/office/powerpoint/2010/main" val="960648375"/>
+        <p14:creationId xmlns:p14="http://schemas.microsoft.com/office/powerpoint/2010/main" val="15722505"/>
       </p:ext>
     </p:extLst>
   </p:cSld>
@@ -2118,6 +1891,7 @@
               <a:rPr lang="en-US"/>
               <a:t>Click to edit Master title style</a:t>
             </a:r>
+            <a:endParaRPr lang="en-US" dirty="0"/>
           </a:p>
         </p:txBody>
       </p:sp>
@@ -2133,41 +1907,13 @@
         </p:nvSpPr>
         <p:spPr>
           <a:xfrm>
-            <a:off x="457200" y="1600200"/>
-            <a:ext cx="4038600" cy="4525963"/>
+            <a:off x="471488" y="2637014"/>
+            <a:ext cx="2914650" cy="6285266"/>
           </a:xfrm>
         </p:spPr>
         <p:txBody>
           <a:bodyPr/>
-          <a:lstStyle>
-            <a:lvl1pPr>
-              <a:defRPr sz="2800"/>
-            </a:lvl1pPr>
-            <a:lvl2pPr>
-              <a:defRPr sz="2400"/>
-            </a:lvl2pPr>
-            <a:lvl3pPr>
-              <a:defRPr sz="2000"/>
-            </a:lvl3pPr>
-            <a:lvl4pPr>
-              <a:defRPr sz="1800"/>
-            </a:lvl4pPr>
-            <a:lvl5pPr>
-              <a:defRPr sz="1800"/>
-            </a:lvl5pPr>
-            <a:lvl6pPr>
-              <a:defRPr sz="1800"/>
-            </a:lvl6pPr>
-            <a:lvl7pPr>
-              <a:defRPr sz="1800"/>
-            </a:lvl7pPr>
-            <a:lvl8pPr>
-              <a:defRPr sz="1800"/>
-            </a:lvl8pPr>
-            <a:lvl9pPr>
-              <a:defRPr sz="1800"/>
-            </a:lvl9pPr>
-          </a:lstStyle>
+          <a:lstStyle/>
           <a:p>
             <a:pPr lvl="0"/>
             <a:r>
@@ -2202,6 +1948,7 @@
               <a:rPr lang="en-US"/>
               <a:t>Fifth level</a:t>
             </a:r>
+            <a:endParaRPr lang="en-US" dirty="0"/>
           </a:p>
         </p:txBody>
       </p:sp>
@@ -2217,41 +1964,13 @@
         </p:nvSpPr>
         <p:spPr>
           <a:xfrm>
-            <a:off x="4648200" y="1600200"/>
-            <a:ext cx="4038600" cy="4525963"/>
+            <a:off x="3471863" y="2637014"/>
+            <a:ext cx="2914650" cy="6285266"/>
           </a:xfrm>
         </p:spPr>
         <p:txBody>
           <a:bodyPr/>
-          <a:lstStyle>
-            <a:lvl1pPr>
-              <a:defRPr sz="2800"/>
-            </a:lvl1pPr>
-            <a:lvl2pPr>
-              <a:defRPr sz="2400"/>
-            </a:lvl2pPr>
-            <a:lvl3pPr>
-              <a:defRPr sz="2000"/>
-            </a:lvl3pPr>
-            <a:lvl4pPr>
-              <a:defRPr sz="1800"/>
-            </a:lvl4pPr>
-            <a:lvl5pPr>
-              <a:defRPr sz="1800"/>
-            </a:lvl5pPr>
-            <a:lvl6pPr>
-              <a:defRPr sz="1800"/>
-            </a:lvl6pPr>
-            <a:lvl7pPr>
-              <a:defRPr sz="1800"/>
-            </a:lvl7pPr>
-            <a:lvl8pPr>
-              <a:defRPr sz="1800"/>
-            </a:lvl8pPr>
-            <a:lvl9pPr>
-              <a:defRPr sz="1800"/>
-            </a:lvl9pPr>
-          </a:lstStyle>
+          <a:lstStyle/>
           <a:p>
             <a:pPr lvl="0"/>
             <a:r>
@@ -2286,6 +2005,7 @@
               <a:rPr lang="en-US"/>
               <a:t>Fifth level</a:t>
             </a:r>
+            <a:endParaRPr lang="en-US" dirty="0"/>
           </a:p>
         </p:txBody>
       </p:sp>
@@ -2304,11 +2024,11 @@
           <a:bodyPr/>
           <a:lstStyle/>
           <a:p>
-            <a:fld id="{5BCAD085-E8A6-8845-BD4E-CB4CCA059FC4}" type="datetimeFigureOut">
-              <a:rPr lang="en-US" smtClean="0"/>
-              <a:t>8/20/2026</a:t>
+            <a:fld id="{D7D1D1ED-58D1-4761-9C35-C98D6A62E54D}" type="datetimeFigureOut">
+              <a:rPr lang="es-MX" smtClean="0"/>
+              <a:t>20/08/2026</a:t>
             </a:fld>
-            <a:endParaRPr lang="en-US"/>
+            <a:endParaRPr lang="es-MX"/>
           </a:p>
         </p:txBody>
       </p:sp>
@@ -2327,7 +2047,7 @@
           <a:bodyPr/>
           <a:lstStyle/>
           <a:p>
-            <a:endParaRPr lang="en-US"/>
+            <a:endParaRPr lang="es-MX"/>
           </a:p>
         </p:txBody>
       </p:sp>
@@ -2346,18 +2066,18 @@
           <a:bodyPr/>
           <a:lstStyle/>
           <a:p>
-            <a:fld id="{C1FF6DA9-008F-8B48-92A6-B652298478BF}" type="slidenum">
-              <a:rPr lang="en-US" smtClean="0"/>
+            <a:fld id="{D242DAED-DD37-4BC4-8CDE-29781368FEDD}" type="slidenum">
+              <a:rPr lang="es-MX" smtClean="0"/>
               <a:t>‹#›</a:t>
             </a:fld>
-            <a:endParaRPr lang="en-US"/>
+            <a:endParaRPr lang="es-MX"/>
           </a:p>
         </p:txBody>
       </p:sp>
     </p:spTree>
     <p:extLst>
       <p:ext uri="{BB962C8B-B14F-4D97-AF65-F5344CB8AC3E}">
-        <p14:creationId xmlns:p14="http://schemas.microsoft.com/office/powerpoint/2010/main" val="2782244947"/>
+        <p14:creationId xmlns:p14="http://schemas.microsoft.com/office/powerpoint/2010/main" val="2282980912"/>
       </p:ext>
     </p:extLst>
   </p:cSld>
@@ -2394,19 +2114,21 @@
             <p:ph type="title"/>
           </p:nvPr>
         </p:nvSpPr>
-        <p:spPr/>
+        <p:spPr>
+          <a:xfrm>
+            <a:off x="472381" y="527405"/>
+            <a:ext cx="5915025" cy="1914702"/>
+          </a:xfrm>
+        </p:spPr>
         <p:txBody>
           <a:bodyPr/>
-          <a:lstStyle>
-            <a:lvl1pPr>
-              <a:defRPr/>
-            </a:lvl1pPr>
-          </a:lstStyle>
+          <a:lstStyle/>
           <a:p>
             <a:r>
               <a:rPr lang="en-US"/>
               <a:t>Click to edit Master title style</a:t>
             </a:r>
+            <a:endParaRPr lang="en-US" dirty="0"/>
           </a:p>
         </p:txBody>
       </p:sp>
@@ -2422,8 +2144,8 @@
         </p:nvSpPr>
         <p:spPr>
           <a:xfrm>
-            <a:off x="457200" y="1535113"/>
-            <a:ext cx="4040188" cy="639762"/>
+            <a:off x="472381" y="2428347"/>
+            <a:ext cx="2901255" cy="1190095"/>
           </a:xfrm>
         </p:spPr>
         <p:txBody>
@@ -2431,39 +2153,39 @@
           <a:lstStyle>
             <a:lvl1pPr marL="0" indent="0">
               <a:buNone/>
-              <a:defRPr sz="2400" b="1"/>
+              <a:defRPr sz="1800" b="1"/>
             </a:lvl1pPr>
-            <a:lvl2pPr marL="457200" indent="0">
+            <a:lvl2pPr marL="342900" indent="0">
               <a:buNone/>
-              <a:defRPr sz="2000" b="1"/>
+              <a:defRPr sz="1500" b="1"/>
             </a:lvl2pPr>
-            <a:lvl3pPr marL="914400" indent="0">
+            <a:lvl3pPr marL="685800" indent="0">
               <a:buNone/>
-              <a:defRPr sz="1800" b="1"/>
+              <a:defRPr sz="1350" b="1"/>
             </a:lvl3pPr>
-            <a:lvl4pPr marL="1371600" indent="0">
+            <a:lvl4pPr marL="1028700" indent="0">
               <a:buNone/>
-              <a:defRPr sz="1600" b="1"/>
+              <a:defRPr sz="1200" b="1"/>
             </a:lvl4pPr>
-            <a:lvl5pPr marL="1828800" indent="0">
+            <a:lvl5pPr marL="1371600" indent="0">
               <a:buNone/>
-              <a:defRPr sz="1600" b="1"/>
+              <a:defRPr sz="1200" b="1"/>
             </a:lvl5pPr>
-            <a:lvl6pPr marL="2286000" indent="0">
+            <a:lvl6pPr marL="1714500" indent="0">
               <a:buNone/>
-              <a:defRPr sz="1600" b="1"/>
+              <a:defRPr sz="1200" b="1"/>
             </a:lvl6pPr>
-            <a:lvl7pPr marL="2743200" indent="0">
+            <a:lvl7pPr marL="2057400" indent="0">
               <a:buNone/>
-              <a:defRPr sz="1600" b="1"/>
+              <a:defRPr sz="1200" b="1"/>
             </a:lvl7pPr>
-            <a:lvl8pPr marL="3200400" indent="0">
+            <a:lvl8pPr marL="2400300" indent="0">
               <a:buNone/>
-              <a:defRPr sz="1600" b="1"/>
+              <a:defRPr sz="1200" b="1"/>
             </a:lvl8pPr>
-            <a:lvl9pPr marL="3657600" indent="0">
+            <a:lvl9pPr marL="2743200" indent="0">
               <a:buNone/>
-              <a:defRPr sz="1600" b="1"/>
+              <a:defRPr sz="1200" b="1"/>
             </a:lvl9pPr>
           </a:lstStyle>
           <a:p>
@@ -2487,41 +2209,13 @@
         </p:nvSpPr>
         <p:spPr>
           <a:xfrm>
-            <a:off x="457200" y="2174875"/>
-            <a:ext cx="4040188" cy="3951288"/>
+            <a:off x="472381" y="3618442"/>
+            <a:ext cx="2901255" cy="5322183"/>
           </a:xfrm>
         </p:spPr>
         <p:txBody>
           <a:bodyPr/>
-          <a:lstStyle>
-            <a:lvl1pPr>
-              <a:defRPr sz="2400"/>
-            </a:lvl1pPr>
-            <a:lvl2pPr>
-              <a:defRPr sz="2000"/>
-            </a:lvl2pPr>
-            <a:lvl3pPr>
-              <a:defRPr sz="1800"/>
-            </a:lvl3pPr>
-            <a:lvl4pPr>
-              <a:defRPr sz="1600"/>
-            </a:lvl4pPr>
-            <a:lvl5pPr>
-              <a:defRPr sz="1600"/>
-            </a:lvl5pPr>
-            <a:lvl6pPr>
-              <a:defRPr sz="1600"/>
-            </a:lvl6pPr>
-            <a:lvl7pPr>
-              <a:defRPr sz="1600"/>
-            </a:lvl7pPr>
-            <a:lvl8pPr>
-              <a:defRPr sz="1600"/>
-            </a:lvl8pPr>
-            <a:lvl9pPr>
-              <a:defRPr sz="1600"/>
-            </a:lvl9pPr>
-          </a:lstStyle>
+          <a:lstStyle/>
           <a:p>
             <a:pPr lvl="0"/>
             <a:r>
@@ -2556,6 +2250,7 @@
               <a:rPr lang="en-US"/>
               <a:t>Fifth level</a:t>
             </a:r>
+            <a:endParaRPr lang="en-US" dirty="0"/>
           </a:p>
         </p:txBody>
       </p:sp>
@@ -2571,8 +2266,8 @@
         </p:nvSpPr>
         <p:spPr>
           <a:xfrm>
-            <a:off x="4645025" y="1535113"/>
-            <a:ext cx="4041775" cy="639762"/>
+            <a:off x="3471863" y="2428347"/>
+            <a:ext cx="2915543" cy="1190095"/>
           </a:xfrm>
         </p:spPr>
         <p:txBody>
@@ -2580,39 +2275,39 @@
           <a:lstStyle>
             <a:lvl1pPr marL="0" indent="0">
               <a:buNone/>
-              <a:defRPr sz="2400" b="1"/>
+              <a:defRPr sz="1800" b="1"/>
             </a:lvl1pPr>
-            <a:lvl2pPr marL="457200" indent="0">
+            <a:lvl2pPr marL="342900" indent="0">
               <a:buNone/>
-              <a:defRPr sz="2000" b="1"/>
+              <a:defRPr sz="1500" b="1"/>
             </a:lvl2pPr>
-            <a:lvl3pPr marL="914400" indent="0">
+            <a:lvl3pPr marL="685800" indent="0">
               <a:buNone/>
-              <a:defRPr sz="1800" b="1"/>
+              <a:defRPr sz="1350" b="1"/>
             </a:lvl3pPr>
-            <a:lvl4pPr marL="1371600" indent="0">
+            <a:lvl4pPr marL="1028700" indent="0">
               <a:buNone/>
-              <a:defRPr sz="1600" b="1"/>
+              <a:defRPr sz="1200" b="1"/>
             </a:lvl4pPr>
-            <a:lvl5pPr marL="1828800" indent="0">
+            <a:lvl5pPr marL="1371600" indent="0">
               <a:buNone/>
-              <a:defRPr sz="1600" b="1"/>
+              <a:defRPr sz="1200" b="1"/>
             </a:lvl5pPr>
-            <a:lvl6pPr marL="2286000" indent="0">
+            <a:lvl6pPr marL="1714500" indent="0">
               <a:buNone/>
-              <a:defRPr sz="1600" b="1"/>
+              <a:defRPr sz="1200" b="1"/>
             </a:lvl6pPr>
-            <a:lvl7pPr marL="2743200" indent="0">
+            <a:lvl7pPr marL="2057400" indent="0">
               <a:buNone/>
-              <a:defRPr sz="1600" b="1"/>
+              <a:defRPr sz="1200" b="1"/>
             </a:lvl7pPr>
-            <a:lvl8pPr marL="3200400" indent="0">
+            <a:lvl8pPr marL="2400300" indent="0">
               <a:buNone/>
-              <a:defRPr sz="1600" b="1"/>
+              <a:defRPr sz="1200" b="1"/>
             </a:lvl8pPr>
-            <a:lvl9pPr marL="3657600" indent="0">
+            <a:lvl9pPr marL="2743200" indent="0">
               <a:buNone/>
-              <a:defRPr sz="1600" b="1"/>
+              <a:defRPr sz="1200" b="1"/>
             </a:lvl9pPr>
           </a:lstStyle>
           <a:p>
@@ -2636,41 +2331,13 @@
         </p:nvSpPr>
         <p:spPr>
           <a:xfrm>
-            <a:off x="4645025" y="2174875"/>
-            <a:ext cx="4041775" cy="3951288"/>
+            <a:off x="3471863" y="3618442"/>
+            <a:ext cx="2915543" cy="5322183"/>
           </a:xfrm>
         </p:spPr>
         <p:txBody>
           <a:bodyPr/>
-          <a:lstStyle>
-            <a:lvl1pPr>
-              <a:defRPr sz="2400"/>
-            </a:lvl1pPr>
-            <a:lvl2pPr>
-              <a:defRPr sz="2000"/>
-            </a:lvl2pPr>
-            <a:lvl3pPr>
-              <a:defRPr sz="1800"/>
-            </a:lvl3pPr>
-            <a:lvl4pPr>
-              <a:defRPr sz="1600"/>
-            </a:lvl4pPr>
-            <a:lvl5pPr>
-              <a:defRPr sz="1600"/>
-            </a:lvl5pPr>
-            <a:lvl6pPr>
-              <a:defRPr sz="1600"/>
-            </a:lvl6pPr>
-            <a:lvl7pPr>
-              <a:defRPr sz="1600"/>
-            </a:lvl7pPr>
-            <a:lvl8pPr>
-              <a:defRPr sz="1600"/>
-            </a:lvl8pPr>
-            <a:lvl9pPr>
-              <a:defRPr sz="1600"/>
-            </a:lvl9pPr>
-          </a:lstStyle>
+          <a:lstStyle/>
           <a:p>
             <a:pPr lvl="0"/>
             <a:r>
@@ -2705,6 +2372,7 @@
               <a:rPr lang="en-US"/>
               <a:t>Fifth level</a:t>
             </a:r>
+            <a:endParaRPr lang="en-US" dirty="0"/>
           </a:p>
         </p:txBody>
       </p:sp>
@@ -2723,11 +2391,11 @@
           <a:bodyPr/>
           <a:lstStyle/>
           <a:p>
-            <a:fld id="{5BCAD085-E8A6-8845-BD4E-CB4CCA059FC4}" type="datetimeFigureOut">
-              <a:rPr lang="en-US" smtClean="0"/>
-              <a:t>8/20/2026</a:t>
+            <a:fld id="{D7D1D1ED-58D1-4761-9C35-C98D6A62E54D}" type="datetimeFigureOut">
+              <a:rPr lang="es-MX" smtClean="0"/>
+              <a:t>20/08/2026</a:t>
             </a:fld>
-            <a:endParaRPr lang="en-US"/>
+            <a:endParaRPr lang="es-MX"/>
           </a:p>
         </p:txBody>
       </p:sp>
@@ -2746,7 +2414,7 @@
           <a:bodyPr/>
           <a:lstStyle/>
           <a:p>
-            <a:endParaRPr lang="en-US"/>
+            <a:endParaRPr lang="es-MX"/>
           </a:p>
         </p:txBody>
       </p:sp>
@@ -2765,18 +2433,18 @@
           <a:bodyPr/>
           <a:lstStyle/>
           <a:p>
-            <a:fld id="{C1FF6DA9-008F-8B48-92A6-B652298478BF}" type="slidenum">
-              <a:rPr lang="en-US" smtClean="0"/>
+            <a:fld id="{D242DAED-DD37-4BC4-8CDE-29781368FEDD}" type="slidenum">
+              <a:rPr lang="es-MX" smtClean="0"/>
               <a:t>‹#›</a:t>
             </a:fld>
-            <a:endParaRPr lang="en-US"/>
+            <a:endParaRPr lang="es-MX"/>
           </a:p>
         </p:txBody>
       </p:sp>
     </p:spTree>
     <p:extLst>
       <p:ext uri="{BB962C8B-B14F-4D97-AF65-F5344CB8AC3E}">
-        <p14:creationId xmlns:p14="http://schemas.microsoft.com/office/powerpoint/2010/main" val="990158736"/>
+        <p14:creationId xmlns:p14="http://schemas.microsoft.com/office/powerpoint/2010/main" val="2579162169"/>
       </p:ext>
     </p:extLst>
   </p:cSld>
@@ -2822,6 +2490,7 @@
               <a:rPr lang="en-US"/>
               <a:t>Click to edit Master title style</a:t>
             </a:r>
+            <a:endParaRPr lang="en-US" dirty="0"/>
           </a:p>
         </p:txBody>
       </p:sp>
@@ -2840,11 +2509,11 @@
           <a:bodyPr/>
           <a:lstStyle/>
           <a:p>
-            <a:fld id="{5BCAD085-E8A6-8845-BD4E-CB4CCA059FC4}" type="datetimeFigureOut">
-              <a:rPr lang="en-US" smtClean="0"/>
-              <a:t>8/20/2026</a:t>
+            <a:fld id="{D7D1D1ED-58D1-4761-9C35-C98D6A62E54D}" type="datetimeFigureOut">
+              <a:rPr lang="es-MX" smtClean="0"/>
+              <a:t>20/08/2026</a:t>
             </a:fld>
-            <a:endParaRPr lang="en-US"/>
+            <a:endParaRPr lang="es-MX"/>
           </a:p>
         </p:txBody>
       </p:sp>
@@ -2863,7 +2532,7 @@
           <a:bodyPr/>
           <a:lstStyle/>
           <a:p>
-            <a:endParaRPr lang="en-US"/>
+            <a:endParaRPr lang="es-MX"/>
           </a:p>
         </p:txBody>
       </p:sp>
@@ -2882,18 +2551,18 @@
           <a:bodyPr/>
           <a:lstStyle/>
           <a:p>
-            <a:fld id="{C1FF6DA9-008F-8B48-92A6-B652298478BF}" type="slidenum">
-              <a:rPr lang="en-US" smtClean="0"/>
+            <a:fld id="{D242DAED-DD37-4BC4-8CDE-29781368FEDD}" type="slidenum">
+              <a:rPr lang="es-MX" smtClean="0"/>
               <a:t>‹#›</a:t>
             </a:fld>
-            <a:endParaRPr lang="en-US"/>
+            <a:endParaRPr lang="es-MX"/>
           </a:p>
         </p:txBody>
       </p:sp>
     </p:spTree>
     <p:extLst>
       <p:ext uri="{BB962C8B-B14F-4D97-AF65-F5344CB8AC3E}">
-        <p14:creationId xmlns:p14="http://schemas.microsoft.com/office/powerpoint/2010/main" val="727027711"/>
+        <p14:creationId xmlns:p14="http://schemas.microsoft.com/office/powerpoint/2010/main" val="113763943"/>
       </p:ext>
     </p:extLst>
   </p:cSld>
@@ -2935,11 +2604,11 @@
           <a:bodyPr/>
           <a:lstStyle/>
           <a:p>
-            <a:fld id="{5BCAD085-E8A6-8845-BD4E-CB4CCA059FC4}" type="datetimeFigureOut">
-              <a:rPr lang="en-US" smtClean="0"/>
-              <a:t>8/20/2026</a:t>
+            <a:fld id="{D7D1D1ED-58D1-4761-9C35-C98D6A62E54D}" type="datetimeFigureOut">
+              <a:rPr lang="es-MX" smtClean="0"/>
+              <a:t>20/08/2026</a:t>
             </a:fld>
-            <a:endParaRPr lang="en-US"/>
+            <a:endParaRPr lang="es-MX"/>
           </a:p>
         </p:txBody>
       </p:sp>
@@ -2958,7 +2627,7 @@
           <a:bodyPr/>
           <a:lstStyle/>
           <a:p>
-            <a:endParaRPr lang="en-US"/>
+            <a:endParaRPr lang="es-MX"/>
           </a:p>
         </p:txBody>
       </p:sp>
@@ -2977,18 +2646,18 @@
           <a:bodyPr/>
           <a:lstStyle/>
           <a:p>
-            <a:fld id="{C1FF6DA9-008F-8B48-92A6-B652298478BF}" type="slidenum">
-              <a:rPr lang="en-US" smtClean="0"/>
+            <a:fld id="{D242DAED-DD37-4BC4-8CDE-29781368FEDD}" type="slidenum">
+              <a:rPr lang="es-MX" smtClean="0"/>
               <a:t>‹#›</a:t>
             </a:fld>
-            <a:endParaRPr lang="en-US"/>
+            <a:endParaRPr lang="es-MX"/>
           </a:p>
         </p:txBody>
       </p:sp>
     </p:spTree>
     <p:extLst>
       <p:ext uri="{BB962C8B-B14F-4D97-AF65-F5344CB8AC3E}">
-        <p14:creationId xmlns:p14="http://schemas.microsoft.com/office/powerpoint/2010/main" val="1212999818"/>
+        <p14:creationId xmlns:p14="http://schemas.microsoft.com/office/powerpoint/2010/main" val="841381618"/>
       </p:ext>
     </p:extLst>
   </p:cSld>
@@ -3027,15 +2696,15 @@
         </p:nvSpPr>
         <p:spPr>
           <a:xfrm>
-            <a:off x="457200" y="273050"/>
-            <a:ext cx="3008313" cy="1162050"/>
+            <a:off x="472381" y="660400"/>
+            <a:ext cx="2211884" cy="2311400"/>
           </a:xfrm>
         </p:spPr>
         <p:txBody>
           <a:bodyPr anchor="b"/>
           <a:lstStyle>
-            <a:lvl1pPr algn="l">
-              <a:defRPr sz="2000" b="1"/>
+            <a:lvl1pPr>
+              <a:defRPr sz="2400"/>
             </a:lvl1pPr>
           </a:lstStyle>
           <a:p>
@@ -3043,6 +2712,7 @@
               <a:rPr lang="en-US"/>
               <a:t>Click to edit Master title style</a:t>
             </a:r>
+            <a:endParaRPr lang="en-US" dirty="0"/>
           </a:p>
         </p:txBody>
       </p:sp>
@@ -3058,39 +2728,39 @@
         </p:nvSpPr>
         <p:spPr>
           <a:xfrm>
-            <a:off x="3575050" y="273050"/>
-            <a:ext cx="5111750" cy="5853113"/>
+            <a:off x="2915543" y="1426283"/>
+            <a:ext cx="3471863" cy="7039681"/>
           </a:xfrm>
         </p:spPr>
         <p:txBody>
           <a:bodyPr/>
           <a:lstStyle>
             <a:lvl1pPr>
-              <a:defRPr sz="3200"/>
+              <a:defRPr sz="2400"/>
             </a:lvl1pPr>
             <a:lvl2pPr>
-              <a:defRPr sz="2800"/>
+              <a:defRPr sz="2100"/>
             </a:lvl2pPr>
             <a:lvl3pPr>
-              <a:defRPr sz="2400"/>
+              <a:defRPr sz="1800"/>
             </a:lvl3pPr>
             <a:lvl4pPr>
-              <a:defRPr sz="2000"/>
+              <a:defRPr sz="1500"/>
             </a:lvl4pPr>
             <a:lvl5pPr>
-              <a:defRPr sz="2000"/>
+              <a:defRPr sz="1500"/>
             </a:lvl5pPr>
             <a:lvl6pPr>
-              <a:defRPr sz="2000"/>
+              <a:defRPr sz="1500"/>
             </a:lvl6pPr>
             <a:lvl7pPr>
-              <a:defRPr sz="2000"/>
+              <a:defRPr sz="1500"/>
             </a:lvl7pPr>
             <a:lvl8pPr>
-              <a:defRPr sz="2000"/>
+              <a:defRPr sz="1500"/>
             </a:lvl8pPr>
             <a:lvl9pPr>
-              <a:defRPr sz="2000"/>
+              <a:defRPr sz="1500"/>
             </a:lvl9pPr>
           </a:lstStyle>
           <a:p>
@@ -3127,6 +2797,7 @@
               <a:rPr lang="en-US"/>
               <a:t>Fifth level</a:t>
             </a:r>
+            <a:endParaRPr lang="en-US" dirty="0"/>
           </a:p>
         </p:txBody>
       </p:sp>
@@ -3142,8 +2813,8 @@
         </p:nvSpPr>
         <p:spPr>
           <a:xfrm>
-            <a:off x="457200" y="1435100"/>
-            <a:ext cx="3008313" cy="4691063"/>
+            <a:off x="472381" y="2971800"/>
+            <a:ext cx="2211884" cy="5505627"/>
           </a:xfrm>
         </p:spPr>
         <p:txBody>
@@ -3151,39 +2822,39 @@
           <a:lstStyle>
             <a:lvl1pPr marL="0" indent="0">
               <a:buNone/>
-              <a:defRPr sz="1400"/>
+              <a:defRPr sz="1200"/>
             </a:lvl1pPr>
-            <a:lvl2pPr marL="457200" indent="0">
+            <a:lvl2pPr marL="342900" indent="0">
               <a:buNone/>
-              <a:defRPr sz="1200"/>
+              <a:defRPr sz="1050"/>
             </a:lvl2pPr>
-            <a:lvl3pPr marL="914400" indent="0">
-              <a:buNone/>
-              <a:defRPr sz="1000"/>
-            </a:lvl3pPr>
-            <a:lvl4pPr marL="1371600" indent="0">
+            <a:lvl3pPr marL="685800" indent="0">
               <a:buNone/>
               <a:defRPr sz="900"/>
+            </a:lvl3pPr>
+            <a:lvl4pPr marL="1028700" indent="0">
+              <a:buNone/>
+              <a:defRPr sz="750"/>
             </a:lvl4pPr>
-            <a:lvl5pPr marL="1828800" indent="0">
+            <a:lvl5pPr marL="1371600" indent="0">
               <a:buNone/>
-              <a:defRPr sz="900"/>
+              <a:defRPr sz="750"/>
             </a:lvl5pPr>
-            <a:lvl6pPr marL="2286000" indent="0">
+            <a:lvl6pPr marL="1714500" indent="0">
               <a:buNone/>
-              <a:defRPr sz="900"/>
+              <a:defRPr sz="750"/>
             </a:lvl6pPr>
-            <a:lvl7pPr marL="2743200" indent="0">
+            <a:lvl7pPr marL="2057400" indent="0">
               <a:buNone/>
-              <a:defRPr sz="900"/>
+              <a:defRPr sz="750"/>
             </a:lvl7pPr>
-            <a:lvl8pPr marL="3200400" indent="0">
+            <a:lvl8pPr marL="2400300" indent="0">
               <a:buNone/>
-              <a:defRPr sz="900"/>
+              <a:defRPr sz="750"/>
             </a:lvl8pPr>
-            <a:lvl9pPr marL="3657600" indent="0">
+            <a:lvl9pPr marL="2743200" indent="0">
               <a:buNone/>
-              <a:defRPr sz="900"/>
+              <a:defRPr sz="750"/>
             </a:lvl9pPr>
           </a:lstStyle>
           <a:p>
@@ -3210,11 +2881,11 @@
           <a:bodyPr/>
           <a:lstStyle/>
           <a:p>
-            <a:fld id="{5BCAD085-E8A6-8845-BD4E-CB4CCA059FC4}" type="datetimeFigureOut">
-              <a:rPr lang="en-US" smtClean="0"/>
-              <a:t>8/20/2026</a:t>
+            <a:fld id="{D7D1D1ED-58D1-4761-9C35-C98D6A62E54D}" type="datetimeFigureOut">
+              <a:rPr lang="es-MX" smtClean="0"/>
+              <a:t>20/08/2026</a:t>
             </a:fld>
-            <a:endParaRPr lang="en-US"/>
+            <a:endParaRPr lang="es-MX"/>
           </a:p>
         </p:txBody>
       </p:sp>
@@ -3233,7 +2904,7 @@
           <a:bodyPr/>
           <a:lstStyle/>
           <a:p>
-            <a:endParaRPr lang="en-US"/>
+            <a:endParaRPr lang="es-MX"/>
           </a:p>
         </p:txBody>
       </p:sp>
@@ -3252,18 +2923,18 @@
           <a:bodyPr/>
           <a:lstStyle/>
           <a:p>
-            <a:fld id="{C1FF6DA9-008F-8B48-92A6-B652298478BF}" type="slidenum">
-              <a:rPr lang="en-US" smtClean="0"/>
+            <a:fld id="{D242DAED-DD37-4BC4-8CDE-29781368FEDD}" type="slidenum">
+              <a:rPr lang="es-MX" smtClean="0"/>
               <a:t>‹#›</a:t>
             </a:fld>
-            <a:endParaRPr lang="en-US"/>
+            <a:endParaRPr lang="es-MX"/>
           </a:p>
         </p:txBody>
       </p:sp>
     </p:spTree>
     <p:extLst>
       <p:ext uri="{BB962C8B-B14F-4D97-AF65-F5344CB8AC3E}">
-        <p14:creationId xmlns:p14="http://schemas.microsoft.com/office/powerpoint/2010/main" val="1840726560"/>
+        <p14:creationId xmlns:p14="http://schemas.microsoft.com/office/powerpoint/2010/main" val="3546615358"/>
       </p:ext>
     </p:extLst>
   </p:cSld>
@@ -3302,15 +2973,15 @@
         </p:nvSpPr>
         <p:spPr>
           <a:xfrm>
-            <a:off x="1792288" y="4800600"/>
-            <a:ext cx="5486400" cy="566738"/>
+            <a:off x="472381" y="660400"/>
+            <a:ext cx="2211884" cy="2311400"/>
           </a:xfrm>
         </p:spPr>
         <p:txBody>
           <a:bodyPr anchor="b"/>
           <a:lstStyle>
-            <a:lvl1pPr algn="l">
-              <a:defRPr sz="2000" b="1"/>
+            <a:lvl1pPr>
+              <a:defRPr sz="2400"/>
             </a:lvl1pPr>
           </a:lstStyle>
           <a:p>
@@ -3318,6 +2989,7 @@
               <a:rPr lang="en-US"/>
               <a:t>Click to edit Master title style</a:t>
             </a:r>
+            <a:endParaRPr lang="en-US" dirty="0"/>
           </a:p>
         </p:txBody>
       </p:sp>
@@ -3325,7 +2997,7 @@
         <p:nvSpPr>
           <p:cNvPr id="3" name="Picture Placeholder 2"/>
           <p:cNvSpPr>
-            <a:spLocks noGrp="1"/>
+            <a:spLocks noGrp="1" noChangeAspect="1"/>
           </p:cNvSpPr>
           <p:nvPr>
             <p:ph type="pic" idx="1"/>
@@ -3333,52 +3005,56 @@
         </p:nvSpPr>
         <p:spPr>
           <a:xfrm>
-            <a:off x="1792288" y="612775"/>
-            <a:ext cx="5486400" cy="4114800"/>
+            <a:off x="2915543" y="1426283"/>
+            <a:ext cx="3471863" cy="7039681"/>
           </a:xfrm>
         </p:spPr>
         <p:txBody>
-          <a:bodyPr/>
+          <a:bodyPr anchor="t"/>
           <a:lstStyle>
             <a:lvl1pPr marL="0" indent="0">
               <a:buNone/>
-              <a:defRPr sz="3200"/>
+              <a:defRPr sz="2400"/>
             </a:lvl1pPr>
-            <a:lvl2pPr marL="457200" indent="0">
+            <a:lvl2pPr marL="342900" indent="0">
               <a:buNone/>
-              <a:defRPr sz="2800"/>
+              <a:defRPr sz="2100"/>
             </a:lvl2pPr>
-            <a:lvl3pPr marL="914400" indent="0">
+            <a:lvl3pPr marL="685800" indent="0">
               <a:buNone/>
-              <a:defRPr sz="2400"/>
+              <a:defRPr sz="1800"/>
             </a:lvl3pPr>
-            <a:lvl4pPr marL="1371600" indent="0">
+            <a:lvl4pPr marL="1028700" indent="0">
               <a:buNone/>
-              <a:defRPr sz="2000"/>
+              <a:defRPr sz="1500"/>
             </a:lvl4pPr>
-            <a:lvl5pPr marL="1828800" indent="0">
+            <a:lvl5pPr marL="1371600" indent="0">
               <a:buNone/>
-              <a:defRPr sz="2000"/>
+              <a:defRPr sz="1500"/>
             </a:lvl5pPr>
-            <a:lvl6pPr marL="2286000" indent="0">
+            <a:lvl6pPr marL="1714500" indent="0">
               <a:buNone/>
-              <a:defRPr sz="2000"/>
+              <a:defRPr sz="1500"/>
             </a:lvl6pPr>
-            <a:lvl7pPr marL="2743200" indent="0">
+            <a:lvl7pPr marL="2057400" indent="0">
               <a:buNone/>
-              <a:defRPr sz="2000"/>
+              <a:defRPr sz="1500"/>
             </a:lvl7pPr>
-            <a:lvl8pPr marL="3200400" indent="0">
+            <a:lvl8pPr marL="2400300" indent="0">
               <a:buNone/>
-              <a:defRPr sz="2000"/>
+              <a:defRPr sz="1500"/>
             </a:lvl8pPr>
-            <a:lvl9pPr marL="3657600" indent="0">
+            <a:lvl9pPr marL="2743200" indent="0">
               <a:buNone/>
-              <a:defRPr sz="2000"/>
+              <a:defRPr sz="1500"/>
             </a:lvl9pPr>
           </a:lstStyle>
           <a:p>
-            <a:endParaRPr lang="en-US"/>
+            <a:r>
+              <a:rPr lang="en-US"/>
+              <a:t>Click icon to add picture</a:t>
+            </a:r>
+            <a:endParaRPr lang="en-US" dirty="0"/>
           </a:p>
         </p:txBody>
       </p:sp>
@@ -3394,8 +3070,8 @@
         </p:nvSpPr>
         <p:spPr>
           <a:xfrm>
-            <a:off x="1792288" y="5367338"/>
-            <a:ext cx="5486400" cy="804862"/>
+            <a:off x="472381" y="2971800"/>
+            <a:ext cx="2211884" cy="5505627"/>
           </a:xfrm>
         </p:spPr>
         <p:txBody>
@@ -3403,39 +3079,39 @@
           <a:lstStyle>
             <a:lvl1pPr marL="0" indent="0">
               <a:buNone/>
-              <a:defRPr sz="1400"/>
+              <a:defRPr sz="1200"/>
             </a:lvl1pPr>
-            <a:lvl2pPr marL="457200" indent="0">
+            <a:lvl2pPr marL="342900" indent="0">
               <a:buNone/>
-              <a:defRPr sz="1200"/>
+              <a:defRPr sz="1050"/>
             </a:lvl2pPr>
-            <a:lvl3pPr marL="914400" indent="0">
-              <a:buNone/>
-              <a:defRPr sz="1000"/>
-            </a:lvl3pPr>
-            <a:lvl4pPr marL="1371600" indent="0">
+            <a:lvl3pPr marL="685800" indent="0">
               <a:buNone/>
               <a:defRPr sz="900"/>
+            </a:lvl3pPr>
+            <a:lvl4pPr marL="1028700" indent="0">
+              <a:buNone/>
+              <a:defRPr sz="750"/>
             </a:lvl4pPr>
-            <a:lvl5pPr marL="1828800" indent="0">
+            <a:lvl5pPr marL="1371600" indent="0">
               <a:buNone/>
-              <a:defRPr sz="900"/>
+              <a:defRPr sz="750"/>
             </a:lvl5pPr>
-            <a:lvl6pPr marL="2286000" indent="0">
+            <a:lvl6pPr marL="1714500" indent="0">
               <a:buNone/>
-              <a:defRPr sz="900"/>
+              <a:defRPr sz="750"/>
             </a:lvl6pPr>
-            <a:lvl7pPr marL="2743200" indent="0">
+            <a:lvl7pPr marL="2057400" indent="0">
               <a:buNone/>
-              <a:defRPr sz="900"/>
+              <a:defRPr sz="750"/>
             </a:lvl7pPr>
-            <a:lvl8pPr marL="3200400" indent="0">
+            <a:lvl8pPr marL="2400300" indent="0">
               <a:buNone/>
-              <a:defRPr sz="900"/>
+              <a:defRPr sz="750"/>
             </a:lvl8pPr>
-            <a:lvl9pPr marL="3657600" indent="0">
+            <a:lvl9pPr marL="2743200" indent="0">
               <a:buNone/>
-              <a:defRPr sz="900"/>
+              <a:defRPr sz="750"/>
             </a:lvl9pPr>
           </a:lstStyle>
           <a:p>
@@ -3462,11 +3138,11 @@
           <a:bodyPr/>
           <a:lstStyle/>
           <a:p>
-            <a:fld id="{5BCAD085-E8A6-8845-BD4E-CB4CCA059FC4}" type="datetimeFigureOut">
-              <a:rPr lang="en-US" smtClean="0"/>
-              <a:t>8/20/2026</a:t>
+            <a:fld id="{D7D1D1ED-58D1-4761-9C35-C98D6A62E54D}" type="datetimeFigureOut">
+              <a:rPr lang="es-MX" smtClean="0"/>
+              <a:t>20/08/2026</a:t>
             </a:fld>
-            <a:endParaRPr lang="en-US"/>
+            <a:endParaRPr lang="es-MX"/>
           </a:p>
         </p:txBody>
       </p:sp>
@@ -3485,7 +3161,7 @@
           <a:bodyPr/>
           <a:lstStyle/>
           <a:p>
-            <a:endParaRPr lang="en-US"/>
+            <a:endParaRPr lang="es-MX"/>
           </a:p>
         </p:txBody>
       </p:sp>
@@ -3504,18 +3180,18 @@
           <a:bodyPr/>
           <a:lstStyle/>
           <a:p>
-            <a:fld id="{C1FF6DA9-008F-8B48-92A6-B652298478BF}" type="slidenum">
-              <a:rPr lang="en-US" smtClean="0"/>
+            <a:fld id="{D242DAED-DD37-4BC4-8CDE-29781368FEDD}" type="slidenum">
+              <a:rPr lang="es-MX" smtClean="0"/>
               <a:t>‹#›</a:t>
             </a:fld>
-            <a:endParaRPr lang="en-US"/>
+            <a:endParaRPr lang="es-MX"/>
           </a:p>
         </p:txBody>
       </p:sp>
     </p:spTree>
     <p:extLst>
       <p:ext uri="{BB962C8B-B14F-4D97-AF65-F5344CB8AC3E}">
-        <p14:creationId xmlns:p14="http://schemas.microsoft.com/office/powerpoint/2010/main" val="3889236939"/>
+        <p14:creationId xmlns:p14="http://schemas.microsoft.com/office/powerpoint/2010/main" val="2018634946"/>
       </p:ext>
     </p:extLst>
   </p:cSld>
@@ -3559,8 +3235,8 @@
         </p:nvSpPr>
         <p:spPr>
           <a:xfrm>
-            <a:off x="457200" y="274638"/>
-            <a:ext cx="8229600" cy="1143000"/>
+            <a:off x="471488" y="527405"/>
+            <a:ext cx="5915025" cy="1914702"/>
           </a:xfrm>
           <a:prstGeom prst="rect">
             <a:avLst/>
@@ -3576,6 +3252,7 @@
               <a:rPr lang="en-US"/>
               <a:t>Click to edit Master title style</a:t>
             </a:r>
+            <a:endParaRPr lang="en-US" dirty="0"/>
           </a:p>
         </p:txBody>
       </p:sp>
@@ -3591,8 +3268,8 @@
         </p:nvSpPr>
         <p:spPr>
           <a:xfrm>
-            <a:off x="457200" y="1600200"/>
-            <a:ext cx="8229600" cy="4525963"/>
+            <a:off x="471488" y="2637014"/>
+            <a:ext cx="5915025" cy="6285266"/>
           </a:xfrm>
           <a:prstGeom prst="rect">
             <a:avLst/>
@@ -3637,6 +3314,7 @@
               <a:rPr lang="en-US"/>
               <a:t>Fifth level</a:t>
             </a:r>
+            <a:endParaRPr lang="en-US" dirty="0"/>
           </a:p>
         </p:txBody>
       </p:sp>
@@ -3652,8 +3330,8 @@
         </p:nvSpPr>
         <p:spPr>
           <a:xfrm>
-            <a:off x="457200" y="6356350"/>
-            <a:ext cx="2133600" cy="365125"/>
+            <a:off x="471488" y="9181397"/>
+            <a:ext cx="1543050" cy="527403"/>
           </a:xfrm>
           <a:prstGeom prst="rect">
             <a:avLst/>
@@ -3663,21 +3341,21 @@
           <a:bodyPr vert="horz" lIns="91440" tIns="45720" rIns="91440" bIns="45720" rtlCol="0" anchor="ctr"/>
           <a:lstStyle>
             <a:lvl1pPr algn="l">
-              <a:defRPr sz="1200">
+              <a:defRPr sz="900">
                 <a:solidFill>
                   <a:schemeClr val="tx1">
-                    <a:tint val="75000"/>
+                    <a:tint val="82000"/>
                   </a:schemeClr>
                 </a:solidFill>
               </a:defRPr>
             </a:lvl1pPr>
           </a:lstStyle>
           <a:p>
-            <a:fld id="{5BCAD085-E8A6-8845-BD4E-CB4CCA059FC4}" type="datetimeFigureOut">
-              <a:rPr lang="en-US" smtClean="0"/>
-              <a:t>8/20/2026</a:t>
+            <a:fld id="{D7D1D1ED-58D1-4761-9C35-C98D6A62E54D}" type="datetimeFigureOut">
+              <a:rPr lang="es-MX" smtClean="0"/>
+              <a:t>20/08/2026</a:t>
             </a:fld>
-            <a:endParaRPr lang="en-US"/>
+            <a:endParaRPr lang="es-MX"/>
           </a:p>
         </p:txBody>
       </p:sp>
@@ -3693,8 +3371,8 @@
         </p:nvSpPr>
         <p:spPr>
           <a:xfrm>
-            <a:off x="3124200" y="6356350"/>
-            <a:ext cx="2895600" cy="365125"/>
+            <a:off x="2271713" y="9181397"/>
+            <a:ext cx="2314575" cy="527403"/>
           </a:xfrm>
           <a:prstGeom prst="rect">
             <a:avLst/>
@@ -3704,17 +3382,17 @@
           <a:bodyPr vert="horz" lIns="91440" tIns="45720" rIns="91440" bIns="45720" rtlCol="0" anchor="ctr"/>
           <a:lstStyle>
             <a:lvl1pPr algn="ctr">
-              <a:defRPr sz="1200">
+              <a:defRPr sz="900">
                 <a:solidFill>
                   <a:schemeClr val="tx1">
-                    <a:tint val="75000"/>
+                    <a:tint val="82000"/>
                   </a:schemeClr>
                 </a:solidFill>
               </a:defRPr>
             </a:lvl1pPr>
           </a:lstStyle>
           <a:p>
-            <a:endParaRPr lang="en-US"/>
+            <a:endParaRPr lang="es-MX"/>
           </a:p>
         </p:txBody>
       </p:sp>
@@ -3730,8 +3408,8 @@
         </p:nvSpPr>
         <p:spPr>
           <a:xfrm>
-            <a:off x="6553200" y="6356350"/>
-            <a:ext cx="2133600" cy="365125"/>
+            <a:off x="4843463" y="9181397"/>
+            <a:ext cx="1543050" cy="527403"/>
           </a:xfrm>
           <a:prstGeom prst="rect">
             <a:avLst/>
@@ -3741,53 +3419,56 @@
           <a:bodyPr vert="horz" lIns="91440" tIns="45720" rIns="91440" bIns="45720" rtlCol="0" anchor="ctr"/>
           <a:lstStyle>
             <a:lvl1pPr algn="r">
-              <a:defRPr sz="1200">
+              <a:defRPr sz="900">
                 <a:solidFill>
                   <a:schemeClr val="tx1">
-                    <a:tint val="75000"/>
+                    <a:tint val="82000"/>
                   </a:schemeClr>
                 </a:solidFill>
               </a:defRPr>
             </a:lvl1pPr>
           </a:lstStyle>
           <a:p>
-            <a:fld id="{C1FF6DA9-008F-8B48-92A6-B652298478BF}" type="slidenum">
-              <a:rPr lang="en-US" smtClean="0"/>
+            <a:fld id="{D242DAED-DD37-4BC4-8CDE-29781368FEDD}" type="slidenum">
+              <a:rPr lang="es-MX" smtClean="0"/>
               <a:t>‹#›</a:t>
             </a:fld>
-            <a:endParaRPr lang="en-US"/>
+            <a:endParaRPr lang="es-MX"/>
           </a:p>
         </p:txBody>
       </p:sp>
     </p:spTree>
     <p:extLst>
       <p:ext uri="{BB962C8B-B14F-4D97-AF65-F5344CB8AC3E}">
-        <p14:creationId xmlns:p14="http://schemas.microsoft.com/office/powerpoint/2010/main" val="2209977519"/>
+        <p14:creationId xmlns:p14="http://schemas.microsoft.com/office/powerpoint/2010/main" val="958622585"/>
       </p:ext>
     </p:extLst>
   </p:cSld>
   <p:clrMap bg1="lt1" tx1="dk1" bg2="lt2" tx2="dk2" accent1="accent1" accent2="accent2" accent3="accent3" accent4="accent4" accent5="accent5" accent6="accent6" hlink="hlink" folHlink="folHlink"/>
   <p:sldLayoutIdLst>
-    <p:sldLayoutId id="2147483649" r:id="rId1"/>
-    <p:sldLayoutId id="2147483650" r:id="rId2"/>
-    <p:sldLayoutId id="2147483651" r:id="rId3"/>
-    <p:sldLayoutId id="2147483652" r:id="rId4"/>
-    <p:sldLayoutId id="2147483653" r:id="rId5"/>
-    <p:sldLayoutId id="2147483654" r:id="rId6"/>
-    <p:sldLayoutId id="2147483655" r:id="rId7"/>
-    <p:sldLayoutId id="2147483656" r:id="rId8"/>
-    <p:sldLayoutId id="2147483657" r:id="rId9"/>
-    <p:sldLayoutId id="2147483658" r:id="rId10"/>
-    <p:sldLayoutId id="2147483659" r:id="rId11"/>
+    <p:sldLayoutId id="2147483661" r:id="rId1"/>
+    <p:sldLayoutId id="2147483662" r:id="rId2"/>
+    <p:sldLayoutId id="2147483663" r:id="rId3"/>
+    <p:sldLayoutId id="2147483664" r:id="rId4"/>
+    <p:sldLayoutId id="2147483665" r:id="rId5"/>
+    <p:sldLayoutId id="2147483666" r:id="rId6"/>
+    <p:sldLayoutId id="2147483667" r:id="rId7"/>
+    <p:sldLayoutId id="2147483668" r:id="rId8"/>
+    <p:sldLayoutId id="2147483669" r:id="rId9"/>
+    <p:sldLayoutId id="2147483670" r:id="rId10"/>
+    <p:sldLayoutId id="2147483671" r:id="rId11"/>
   </p:sldLayoutIdLst>
   <p:txStyles>
     <p:titleStyle>
-      <a:lvl1pPr algn="ctr" defTabSz="457200" rtl="0" eaLnBrk="1" latinLnBrk="0" hangingPunct="1">
+      <a:lvl1pPr algn="l" defTabSz="685800" rtl="0" eaLnBrk="1" latinLnBrk="0" hangingPunct="1">
+        <a:lnSpc>
+          <a:spcPct val="90000"/>
+        </a:lnSpc>
         <a:spcBef>
           <a:spcPct val="0"/>
         </a:spcBef>
         <a:buNone/>
-        <a:defRPr sz="4400" kern="1200">
+        <a:defRPr sz="3300" kern="1200">
           <a:solidFill>
             <a:schemeClr val="tx1"/>
           </a:solidFill>
@@ -3798,13 +3479,16 @@
       </a:lvl1pPr>
     </p:titleStyle>
     <p:bodyStyle>
-      <a:lvl1pPr marL="342900" indent="-342900" algn="l" defTabSz="457200" rtl="0" eaLnBrk="1" latinLnBrk="0" hangingPunct="1">
+      <a:lvl1pPr marL="171450" indent="-171450" algn="l" defTabSz="685800" rtl="0" eaLnBrk="1" latinLnBrk="0" hangingPunct="1">
+        <a:lnSpc>
+          <a:spcPct val="90000"/>
+        </a:lnSpc>
         <a:spcBef>
-          <a:spcPct val="20000"/>
+          <a:spcPts val="750"/>
         </a:spcBef>
-        <a:buFont typeface="Arial"/>
+        <a:buFont typeface="Arial" panose="020B0604020202020204" pitchFamily="34" charset="0"/>
         <a:buChar char="•"/>
-        <a:defRPr sz="3200" kern="1200">
+        <a:defRPr sz="2100" kern="1200">
           <a:solidFill>
             <a:schemeClr val="tx1"/>
           </a:solidFill>
@@ -3813,13 +3497,16 @@
           <a:cs typeface="+mn-cs"/>
         </a:defRPr>
       </a:lvl1pPr>
-      <a:lvl2pPr marL="742950" indent="-285750" algn="l" defTabSz="457200" rtl="0" eaLnBrk="1" latinLnBrk="0" hangingPunct="1">
+      <a:lvl2pPr marL="514350" indent="-171450" algn="l" defTabSz="685800" rtl="0" eaLnBrk="1" latinLnBrk="0" hangingPunct="1">
+        <a:lnSpc>
+          <a:spcPct val="90000"/>
+        </a:lnSpc>
         <a:spcBef>
-          <a:spcPct val="20000"/>
+          <a:spcPts val="375"/>
         </a:spcBef>
-        <a:buFont typeface="Arial"/>
-        <a:buChar char="–"/>
-        <a:defRPr sz="2800" kern="1200">
+        <a:buFont typeface="Arial" panose="020B0604020202020204" pitchFamily="34" charset="0"/>
+        <a:buChar char="•"/>
+        <a:defRPr sz="1800" kern="1200">
           <a:solidFill>
             <a:schemeClr val="tx1"/>
           </a:solidFill>
@@ -3828,13 +3515,16 @@
           <a:cs typeface="+mn-cs"/>
         </a:defRPr>
       </a:lvl2pPr>
-      <a:lvl3pPr marL="1143000" indent="-228600" algn="l" defTabSz="457200" rtl="0" eaLnBrk="1" latinLnBrk="0" hangingPunct="1">
+      <a:lvl3pPr marL="857250" indent="-171450" algn="l" defTabSz="685800" rtl="0" eaLnBrk="1" latinLnBrk="0" hangingPunct="1">
+        <a:lnSpc>
+          <a:spcPct val="90000"/>
+        </a:lnSpc>
         <a:spcBef>
-          <a:spcPct val="20000"/>
+          <a:spcPts val="375"/>
         </a:spcBef>
-        <a:buFont typeface="Arial"/>
+        <a:buFont typeface="Arial" panose="020B0604020202020204" pitchFamily="34" charset="0"/>
         <a:buChar char="•"/>
-        <a:defRPr sz="2400" kern="1200">
+        <a:defRPr sz="1500" kern="1200">
           <a:solidFill>
             <a:schemeClr val="tx1"/>
           </a:solidFill>
@@ -3843,13 +3533,16 @@
           <a:cs typeface="+mn-cs"/>
         </a:defRPr>
       </a:lvl3pPr>
-      <a:lvl4pPr marL="1600200" indent="-228600" algn="l" defTabSz="457200" rtl="0" eaLnBrk="1" latinLnBrk="0" hangingPunct="1">
+      <a:lvl4pPr marL="1200150" indent="-171450" algn="l" defTabSz="685800" rtl="0" eaLnBrk="1" latinLnBrk="0" hangingPunct="1">
+        <a:lnSpc>
+          <a:spcPct val="90000"/>
+        </a:lnSpc>
         <a:spcBef>
-          <a:spcPct val="20000"/>
+          <a:spcPts val="375"/>
         </a:spcBef>
-        <a:buFont typeface="Arial"/>
-        <a:buChar char="–"/>
-        <a:defRPr sz="2000" kern="1200">
+        <a:buFont typeface="Arial" panose="020B0604020202020204" pitchFamily="34" charset="0"/>
+        <a:buChar char="•"/>
+        <a:defRPr sz="1350" kern="1200">
           <a:solidFill>
             <a:schemeClr val="tx1"/>
           </a:solidFill>
@@ -3858,13 +3551,16 @@
           <a:cs typeface="+mn-cs"/>
         </a:defRPr>
       </a:lvl4pPr>
-      <a:lvl5pPr marL="2057400" indent="-228600" algn="l" defTabSz="457200" rtl="0" eaLnBrk="1" latinLnBrk="0" hangingPunct="1">
+      <a:lvl5pPr marL="1543050" indent="-171450" algn="l" defTabSz="685800" rtl="0" eaLnBrk="1" latinLnBrk="0" hangingPunct="1">
+        <a:lnSpc>
+          <a:spcPct val="90000"/>
+        </a:lnSpc>
         <a:spcBef>
-          <a:spcPct val="20000"/>
+          <a:spcPts val="375"/>
         </a:spcBef>
-        <a:buFont typeface="Arial"/>
-        <a:buChar char="»"/>
-        <a:defRPr sz="2000" kern="1200">
+        <a:buFont typeface="Arial" panose="020B0604020202020204" pitchFamily="34" charset="0"/>
+        <a:buChar char="•"/>
+        <a:defRPr sz="1350" kern="1200">
           <a:solidFill>
             <a:schemeClr val="tx1"/>
           </a:solidFill>
@@ -3873,13 +3569,16 @@
           <a:cs typeface="+mn-cs"/>
         </a:defRPr>
       </a:lvl5pPr>
-      <a:lvl6pPr marL="2514600" indent="-228600" algn="l" defTabSz="457200" rtl="0" eaLnBrk="1" latinLnBrk="0" hangingPunct="1">
+      <a:lvl6pPr marL="1885950" indent="-171450" algn="l" defTabSz="685800" rtl="0" eaLnBrk="1" latinLnBrk="0" hangingPunct="1">
+        <a:lnSpc>
+          <a:spcPct val="90000"/>
+        </a:lnSpc>
         <a:spcBef>
-          <a:spcPct val="20000"/>
+          <a:spcPts val="375"/>
         </a:spcBef>
-        <a:buFont typeface="Arial"/>
+        <a:buFont typeface="Arial" panose="020B0604020202020204" pitchFamily="34" charset="0"/>
         <a:buChar char="•"/>
-        <a:defRPr sz="2000" kern="1200">
+        <a:defRPr sz="1350" kern="1200">
           <a:solidFill>
             <a:schemeClr val="tx1"/>
           </a:solidFill>
@@ -3888,13 +3587,16 @@
           <a:cs typeface="+mn-cs"/>
         </a:defRPr>
       </a:lvl6pPr>
-      <a:lvl7pPr marL="2971800" indent="-228600" algn="l" defTabSz="457200" rtl="0" eaLnBrk="1" latinLnBrk="0" hangingPunct="1">
+      <a:lvl7pPr marL="2228850" indent="-171450" algn="l" defTabSz="685800" rtl="0" eaLnBrk="1" latinLnBrk="0" hangingPunct="1">
+        <a:lnSpc>
+          <a:spcPct val="90000"/>
+        </a:lnSpc>
         <a:spcBef>
-          <a:spcPct val="20000"/>
+          <a:spcPts val="375"/>
         </a:spcBef>
-        <a:buFont typeface="Arial"/>
+        <a:buFont typeface="Arial" panose="020B0604020202020204" pitchFamily="34" charset="0"/>
         <a:buChar char="•"/>
-        <a:defRPr sz="2000" kern="1200">
+        <a:defRPr sz="1350" kern="1200">
           <a:solidFill>
             <a:schemeClr val="tx1"/>
           </a:solidFill>
@@ -3903,13 +3605,16 @@
           <a:cs typeface="+mn-cs"/>
         </a:defRPr>
       </a:lvl7pPr>
-      <a:lvl8pPr marL="3429000" indent="-228600" algn="l" defTabSz="457200" rtl="0" eaLnBrk="1" latinLnBrk="0" hangingPunct="1">
+      <a:lvl8pPr marL="2571750" indent="-171450" algn="l" defTabSz="685800" rtl="0" eaLnBrk="1" latinLnBrk="0" hangingPunct="1">
+        <a:lnSpc>
+          <a:spcPct val="90000"/>
+        </a:lnSpc>
         <a:spcBef>
-          <a:spcPct val="20000"/>
+          <a:spcPts val="375"/>
         </a:spcBef>
-        <a:buFont typeface="Arial"/>
+        <a:buFont typeface="Arial" panose="020B0604020202020204" pitchFamily="34" charset="0"/>
         <a:buChar char="•"/>
-        <a:defRPr sz="2000" kern="1200">
+        <a:defRPr sz="1350" kern="1200">
           <a:solidFill>
             <a:schemeClr val="tx1"/>
           </a:solidFill>
@@ -3918,13 +3623,16 @@
           <a:cs typeface="+mn-cs"/>
         </a:defRPr>
       </a:lvl8pPr>
-      <a:lvl9pPr marL="3886200" indent="-228600" algn="l" defTabSz="457200" rtl="0" eaLnBrk="1" latinLnBrk="0" hangingPunct="1">
+      <a:lvl9pPr marL="2914650" indent="-171450" algn="l" defTabSz="685800" rtl="0" eaLnBrk="1" latinLnBrk="0" hangingPunct="1">
+        <a:lnSpc>
+          <a:spcPct val="90000"/>
+        </a:lnSpc>
         <a:spcBef>
-          <a:spcPct val="20000"/>
+          <a:spcPts val="375"/>
         </a:spcBef>
-        <a:buFont typeface="Arial"/>
+        <a:buFont typeface="Arial" panose="020B0604020202020204" pitchFamily="34" charset="0"/>
         <a:buChar char="•"/>
-        <a:defRPr sz="2000" kern="1200">
+        <a:defRPr sz="1350" kern="1200">
           <a:solidFill>
             <a:schemeClr val="tx1"/>
           </a:solidFill>
@@ -3938,8 +3646,8 @@
       <a:defPPr>
         <a:defRPr lang="en-US"/>
       </a:defPPr>
-      <a:lvl1pPr marL="0" algn="l" defTabSz="457200" rtl="0" eaLnBrk="1" latinLnBrk="0" hangingPunct="1">
-        <a:defRPr sz="1800" kern="1200">
+      <a:lvl1pPr marL="0" algn="l" defTabSz="685800" rtl="0" eaLnBrk="1" latinLnBrk="0" hangingPunct="1">
+        <a:defRPr sz="1350" kern="1200">
           <a:solidFill>
             <a:schemeClr val="tx1"/>
           </a:solidFill>
@@ -3948,8 +3656,8 @@
           <a:cs typeface="+mn-cs"/>
         </a:defRPr>
       </a:lvl1pPr>
-      <a:lvl2pPr marL="457200" algn="l" defTabSz="457200" rtl="0" eaLnBrk="1" latinLnBrk="0" hangingPunct="1">
-        <a:defRPr sz="1800" kern="1200">
+      <a:lvl2pPr marL="342900" algn="l" defTabSz="685800" rtl="0" eaLnBrk="1" latinLnBrk="0" hangingPunct="1">
+        <a:defRPr sz="1350" kern="1200">
           <a:solidFill>
             <a:schemeClr val="tx1"/>
           </a:solidFill>
@@ -3958,8 +3666,8 @@
           <a:cs typeface="+mn-cs"/>
         </a:defRPr>
       </a:lvl2pPr>
-      <a:lvl3pPr marL="914400" algn="l" defTabSz="457200" rtl="0" eaLnBrk="1" latinLnBrk="0" hangingPunct="1">
-        <a:defRPr sz="1800" kern="1200">
+      <a:lvl3pPr marL="685800" algn="l" defTabSz="685800" rtl="0" eaLnBrk="1" latinLnBrk="0" hangingPunct="1">
+        <a:defRPr sz="1350" kern="1200">
           <a:solidFill>
             <a:schemeClr val="tx1"/>
           </a:solidFill>
@@ -3968,8 +3676,8 @@
           <a:cs typeface="+mn-cs"/>
         </a:defRPr>
       </a:lvl3pPr>
-      <a:lvl4pPr marL="1371600" algn="l" defTabSz="457200" rtl="0" eaLnBrk="1" latinLnBrk="0" hangingPunct="1">
-        <a:defRPr sz="1800" kern="1200">
+      <a:lvl4pPr marL="1028700" algn="l" defTabSz="685800" rtl="0" eaLnBrk="1" latinLnBrk="0" hangingPunct="1">
+        <a:defRPr sz="1350" kern="1200">
           <a:solidFill>
             <a:schemeClr val="tx1"/>
           </a:solidFill>
@@ -3978,8 +3686,8 @@
           <a:cs typeface="+mn-cs"/>
         </a:defRPr>
       </a:lvl4pPr>
-      <a:lvl5pPr marL="1828800" algn="l" defTabSz="457200" rtl="0" eaLnBrk="1" latinLnBrk="0" hangingPunct="1">
-        <a:defRPr sz="1800" kern="1200">
+      <a:lvl5pPr marL="1371600" algn="l" defTabSz="685800" rtl="0" eaLnBrk="1" latinLnBrk="0" hangingPunct="1">
+        <a:defRPr sz="1350" kern="1200">
           <a:solidFill>
             <a:schemeClr val="tx1"/>
           </a:solidFill>
@@ -3988,8 +3696,8 @@
           <a:cs typeface="+mn-cs"/>
         </a:defRPr>
       </a:lvl5pPr>
-      <a:lvl6pPr marL="2286000" algn="l" defTabSz="457200" rtl="0" eaLnBrk="1" latinLnBrk="0" hangingPunct="1">
-        <a:defRPr sz="1800" kern="1200">
+      <a:lvl6pPr marL="1714500" algn="l" defTabSz="685800" rtl="0" eaLnBrk="1" latinLnBrk="0" hangingPunct="1">
+        <a:defRPr sz="1350" kern="1200">
           <a:solidFill>
             <a:schemeClr val="tx1"/>
           </a:solidFill>
@@ -3998,8 +3706,8 @@
           <a:cs typeface="+mn-cs"/>
         </a:defRPr>
       </a:lvl6pPr>
-      <a:lvl7pPr marL="2743200" algn="l" defTabSz="457200" rtl="0" eaLnBrk="1" latinLnBrk="0" hangingPunct="1">
-        <a:defRPr sz="1800" kern="1200">
+      <a:lvl7pPr marL="2057400" algn="l" defTabSz="685800" rtl="0" eaLnBrk="1" latinLnBrk="0" hangingPunct="1">
+        <a:defRPr sz="1350" kern="1200">
           <a:solidFill>
             <a:schemeClr val="tx1"/>
           </a:solidFill>
@@ -4008,8 +3716,8 @@
           <a:cs typeface="+mn-cs"/>
         </a:defRPr>
       </a:lvl7pPr>
-      <a:lvl8pPr marL="3200400" algn="l" defTabSz="457200" rtl="0" eaLnBrk="1" latinLnBrk="0" hangingPunct="1">
-        <a:defRPr sz="1800" kern="1200">
+      <a:lvl8pPr marL="2400300" algn="l" defTabSz="685800" rtl="0" eaLnBrk="1" latinLnBrk="0" hangingPunct="1">
+        <a:defRPr sz="1350" kern="1200">
           <a:solidFill>
             <a:schemeClr val="tx1"/>
           </a:solidFill>
@@ -4018,8 +3726,8 @@
           <a:cs typeface="+mn-cs"/>
         </a:defRPr>
       </a:lvl8pPr>
-      <a:lvl9pPr marL="3657600" algn="l" defTabSz="457200" rtl="0" eaLnBrk="1" latinLnBrk="0" hangingPunct="1">
-        <a:defRPr sz="1800" kern="1200">
+      <a:lvl9pPr marL="2743200" algn="l" defTabSz="685800" rtl="0" eaLnBrk="1" latinLnBrk="0" hangingPunct="1">
+        <a:defRPr sz="1350" kern="1200">
           <a:solidFill>
             <a:schemeClr val="tx1"/>
           </a:solidFill>
@@ -4050,12 +3758,215 @@
           <a:chExt cx="0" cy="0"/>
         </a:xfrm>
       </p:grpSpPr>
+      <p:sp>
+        <p:nvSpPr>
+          <p:cNvPr id="4" name="TextBox 3">
+            <a:extLst>
+              <a:ext uri="{FF2B5EF4-FFF2-40B4-BE49-F238E27FC236}">
+                <a16:creationId xmlns:a16="http://schemas.microsoft.com/office/drawing/2014/main" id="{6A274764-DFCA-3BED-7EED-966F3822D3CC}"/>
+              </a:ext>
+            </a:extLst>
+          </p:cNvPr>
+          <p:cNvSpPr txBox="1"/>
+          <p:nvPr/>
+        </p:nvSpPr>
+        <p:spPr>
+          <a:xfrm>
+            <a:off x="1263650" y="381503"/>
+            <a:ext cx="4330700" cy="892552"/>
+          </a:xfrm>
+          <a:prstGeom prst="rect">
+            <a:avLst/>
+          </a:prstGeom>
+          <a:noFill/>
+        </p:spPr>
+        <p:txBody>
+          <a:bodyPr wrap="square" rtlCol="0">
+            <a:spAutoFit/>
+          </a:bodyPr>
+          <a:lstStyle/>
+          <a:p>
+            <a:pPr algn="ctr"/>
+            <a:r>
+              <a:rPr lang="en-US" sz="5200" noProof="0" dirty="0">
+                <a:gradFill flip="none" rotWithShape="1">
+                  <a:gsLst>
+                    <a:gs pos="74158">
+                      <a:srgbClr val="FE9738"/>
+                    </a:gs>
+                    <a:gs pos="27000">
+                      <a:srgbClr val="FE9738"/>
+                    </a:gs>
+                    <a:gs pos="0">
+                      <a:srgbClr val="985A22"/>
+                    </a:gs>
+                    <a:gs pos="100000">
+                      <a:srgbClr val="A46224"/>
+                    </a:gs>
+                  </a:gsLst>
+                  <a:lin ang="0" scaled="1"/>
+                  <a:tileRect/>
+                </a:gradFill>
+                <a:latin typeface="Lemon" pitchFamily="2" charset="0"/>
+                <a:ea typeface="Lemon" pitchFamily="2" charset="0"/>
+              </a:rPr>
+              <a:t>Guess</a:t>
+            </a:r>
+            <a:r>
+              <a:rPr lang="en-US" sz="5200" noProof="0" dirty="0">
+                <a:gradFill flip="none" rotWithShape="1">
+                  <a:gsLst>
+                    <a:gs pos="56000">
+                      <a:srgbClr val="FE9738"/>
+                    </a:gs>
+                    <a:gs pos="0">
+                      <a:srgbClr val="985A22"/>
+                    </a:gs>
+                    <a:gs pos="100000">
+                      <a:srgbClr val="A46224"/>
+                    </a:gs>
+                  </a:gsLst>
+                  <a:lin ang="0" scaled="1"/>
+                  <a:tileRect/>
+                </a:gradFill>
+                <a:latin typeface="Lemon" pitchFamily="2" charset="0"/>
+                <a:ea typeface="Lemon" pitchFamily="2" charset="0"/>
+              </a:rPr>
+              <a:t> </a:t>
+            </a:r>
+            <a:r>
+              <a:rPr lang="en-US" sz="5200" noProof="0" dirty="0">
+                <a:gradFill flip="none" rotWithShape="1">
+                  <a:gsLst>
+                    <a:gs pos="76225">
+                      <a:srgbClr val="FE9738"/>
+                    </a:gs>
+                    <a:gs pos="25000">
+                      <a:srgbClr val="FE9738"/>
+                    </a:gs>
+                    <a:gs pos="0">
+                      <a:srgbClr val="985A22"/>
+                    </a:gs>
+                    <a:gs pos="100000">
+                      <a:srgbClr val="A46224"/>
+                    </a:gs>
+                  </a:gsLst>
+                  <a:lin ang="0" scaled="1"/>
+                  <a:tileRect/>
+                </a:gradFill>
+                <a:latin typeface="Lemon" pitchFamily="2" charset="0"/>
+                <a:ea typeface="Lemon" pitchFamily="2" charset="0"/>
+              </a:rPr>
+              <a:t>Who</a:t>
+            </a:r>
+          </a:p>
+        </p:txBody>
+      </p:sp>
+      <p:pic>
+        <p:nvPicPr>
+          <p:cNvPr id="12" name="Picture 11">
+            <a:extLst>
+              <a:ext uri="{FF2B5EF4-FFF2-40B4-BE49-F238E27FC236}">
+                <a16:creationId xmlns:a16="http://schemas.microsoft.com/office/drawing/2014/main" id="{BB7C3FA4-8F96-656C-3871-3EA38995B509}"/>
+              </a:ext>
+            </a:extLst>
+          </p:cNvPr>
+          <p:cNvPicPr>
+            <a:picLocks noChangeAspect="1"/>
+          </p:cNvPicPr>
+          <p:nvPr/>
+        </p:nvPicPr>
+        <p:blipFill>
+          <a:blip r:embed="rId3">
+            <a:alphaModFix amt="35000"/>
+          </a:blip>
+          <a:stretch>
+            <a:fillRect/>
+          </a:stretch>
+        </p:blipFill>
+        <p:spPr>
+          <a:xfrm>
+            <a:off x="2011214" y="3983441"/>
+            <a:ext cx="642128" cy="642128"/>
+          </a:xfrm>
+          <a:prstGeom prst="rect">
+            <a:avLst/>
+          </a:prstGeom>
+        </p:spPr>
+      </p:pic>
+      <p:pic>
+        <p:nvPicPr>
+          <p:cNvPr id="16" name="Picture 15">
+            <a:extLst>
+              <a:ext uri="{FF2B5EF4-FFF2-40B4-BE49-F238E27FC236}">
+                <a16:creationId xmlns:a16="http://schemas.microsoft.com/office/drawing/2014/main" id="{7FC1C96F-AFFE-450E-3076-7C52FE9DAAA1}"/>
+              </a:ext>
+            </a:extLst>
+          </p:cNvPr>
+          <p:cNvPicPr>
+            <a:picLocks noChangeAspect="1"/>
+          </p:cNvPicPr>
+          <p:nvPr/>
+        </p:nvPicPr>
+        <p:blipFill>
+          <a:blip r:embed="rId3"/>
+          <a:stretch>
+            <a:fillRect/>
+          </a:stretch>
+        </p:blipFill>
+        <p:spPr>
+          <a:xfrm>
+            <a:off x="6004290" y="460227"/>
+            <a:ext cx="642128" cy="642128"/>
+          </a:xfrm>
+          <a:prstGeom prst="rect">
+            <a:avLst/>
+          </a:prstGeom>
+        </p:spPr>
+      </p:pic>
+      <p:sp>
+        <p:nvSpPr>
+          <p:cNvPr id="17" name="TextBox 16">
+            <a:extLst>
+              <a:ext uri="{FF2B5EF4-FFF2-40B4-BE49-F238E27FC236}">
+                <a16:creationId xmlns:a16="http://schemas.microsoft.com/office/drawing/2014/main" id="{5426EDA3-4361-57AE-2032-EC46EA190BAC}"/>
+              </a:ext>
+            </a:extLst>
+          </p:cNvPr>
+          <p:cNvSpPr txBox="1"/>
+          <p:nvPr/>
+        </p:nvSpPr>
+        <p:spPr>
+          <a:xfrm>
+            <a:off x="359394" y="1325087"/>
+            <a:ext cx="2706894" cy="246221"/>
+          </a:xfrm>
+          <a:prstGeom prst="rect">
+            <a:avLst/>
+          </a:prstGeom>
+          <a:noFill/>
+        </p:spPr>
+        <p:txBody>
+          <a:bodyPr wrap="square" rtlCol="0">
+            <a:spAutoFit/>
+          </a:bodyPr>
+          <a:lstStyle/>
+          <a:p>
+            <a:r>
+              <a:rPr lang="en-US" sz="1000" b="1" noProof="0" dirty="0">
+                <a:latin typeface="Lato" panose="020F0502020204030204" pitchFamily="34" charset="0"/>
+              </a:rPr>
+              <a:t>Guess the character with the clues you have</a:t>
+            </a:r>
+          </a:p>
+        </p:txBody>
+      </p:sp>
       <p:grpSp>
         <p:nvGrpSpPr>
-          <p:cNvPr id="23" name="repeat:cards">
+          <p:cNvPr id="21" name="repeat:clues">
             <a:extLst>
               <a:ext uri="{FF2B5EF4-FFF2-40B4-BE49-F238E27FC236}">
-                <a16:creationId xmlns:a16="http://schemas.microsoft.com/office/drawing/2014/main" id="{7C490F70-D30E-E741-C914-2A75E2B28380}"/>
+                <a16:creationId xmlns:a16="http://schemas.microsoft.com/office/drawing/2014/main" id="{BA41554C-5750-FB6A-10A1-9DA1A0BDE8B3}"/>
               </a:ext>
             </a:extLst>
           </p:cNvPr>
@@ -4064,438 +3975,354 @@
         </p:nvGrpSpPr>
         <p:grpSpPr>
           <a:xfrm>
-            <a:off x="457200" y="457200"/>
-            <a:ext cx="6858000" cy="9144000"/>
-            <a:chOff x="457200" y="457200"/>
-            <a:chExt cx="6858000" cy="9144000"/>
+            <a:off x="533088" y="1686633"/>
+            <a:ext cx="920800" cy="246221"/>
+            <a:chOff x="533088" y="1527036"/>
+            <a:chExt cx="920800" cy="246221"/>
           </a:xfrm>
         </p:grpSpPr>
+        <p:pic>
+          <p:nvPicPr>
+            <p:cNvPr id="19" name="lookup:icon1">
+              <a:extLst>
+                <a:ext uri="{FF2B5EF4-FFF2-40B4-BE49-F238E27FC236}">
+                  <a16:creationId xmlns:a16="http://schemas.microsoft.com/office/drawing/2014/main" id="{58ACBC8B-6106-5591-70F0-D1F96696E6FD}"/>
+                </a:ext>
+              </a:extLst>
+            </p:cNvPr>
+            <p:cNvPicPr>
+              <a:picLocks noChangeAspect="1"/>
+            </p:cNvPicPr>
+            <p:nvPr/>
+          </p:nvPicPr>
+          <p:blipFill>
+            <a:blip r:embed="rId4"/>
+            <a:stretch>
+              <a:fillRect/>
+            </a:stretch>
+          </p:blipFill>
+          <p:spPr>
+            <a:xfrm>
+              <a:off x="533088" y="1527036"/>
+              <a:ext cx="216000" cy="216000"/>
+            </a:xfrm>
+            <a:prstGeom prst="rect">
+              <a:avLst/>
+            </a:prstGeom>
+          </p:spPr>
+        </p:pic>
         <p:sp>
           <p:nvSpPr>
-            <p:cNvPr id="2" name="rbind:sentences"/>
-            <p:cNvSpPr/>
+            <p:cNvPr id="20" name="bind:label">
+              <a:extLst>
+                <a:ext uri="{FF2B5EF4-FFF2-40B4-BE49-F238E27FC236}">
+                  <a16:creationId xmlns:a16="http://schemas.microsoft.com/office/drawing/2014/main" id="{5590EDBF-DB6D-7247-8ECD-626B0EF864F2}"/>
+                </a:ext>
+              </a:extLst>
+            </p:cNvPr>
+            <p:cNvSpPr txBox="1"/>
             <p:nvPr/>
           </p:nvSpPr>
           <p:spPr>
             <a:xfrm>
-              <a:off x="457200" y="457200"/>
-              <a:ext cx="3291840" cy="1609344"/>
-            </a:xfrm>
-            <a:prstGeom prst="rect">
-              <a:avLst/>
-            </a:prstGeom>
-          </p:spPr>
-          <p:style>
-            <a:lnRef idx="2">
-              <a:schemeClr val="dk1"/>
-            </a:lnRef>
-            <a:fillRef idx="1">
-              <a:schemeClr val="lt1"/>
-            </a:fillRef>
-            <a:effectRef idx="0">
-              <a:schemeClr val="dk1"/>
-            </a:effectRef>
-            <a:fontRef idx="minor">
-              <a:schemeClr val="dk1"/>
-            </a:fontRef>
-          </p:style>
+              <a:off x="680458" y="1527036"/>
+              <a:ext cx="773430" cy="246221"/>
+            </a:xfrm>
+            <a:prstGeom prst="rect">
+              <a:avLst/>
+            </a:prstGeom>
+            <a:noFill/>
+          </p:spPr>
           <p:txBody>
-            <a:bodyPr rtlCol="0" anchor="ctr"/>
+            <a:bodyPr wrap="square" rtlCol="0">
+              <a:spAutoFit/>
+            </a:bodyPr>
             <a:lstStyle/>
             <a:p>
-              <a:pPr algn="ctr">
-                <a:defRPr sz="2800" b="1"/>
-              </a:pPr>
               <a:r>
-                <a:rPr dirty="0"/>
-                <a:t>They – swim – in the sea</a:t>
+                <a:rPr lang="en-US" sz="1000" b="1" noProof="0" dirty="0">
+                  <a:latin typeface="Lato" panose="020F0502020204030203" pitchFamily="34" charset="0"/>
+                </a:rPr>
+                <a:t>Will do…</a:t>
               </a:r>
             </a:p>
           </p:txBody>
         </p:sp>
+      </p:grpSp>
+      <p:grpSp>
+        <p:nvGrpSpPr>
+          <p:cNvPr id="22" name="repeat:clues">
+            <a:extLst>
+              <a:ext uri="{FF2B5EF4-FFF2-40B4-BE49-F238E27FC236}">
+                <a16:creationId xmlns:a16="http://schemas.microsoft.com/office/drawing/2014/main" id="{DF878DFF-8A57-56F4-8FF4-CB2C8677995F}"/>
+              </a:ext>
+            </a:extLst>
+          </p:cNvPr>
+          <p:cNvGrpSpPr/>
+          <p:nvPr/>
+        </p:nvGrpSpPr>
+        <p:grpSpPr>
+          <a:xfrm>
+            <a:off x="1439824" y="1686632"/>
+            <a:ext cx="1033614" cy="246221"/>
+            <a:chOff x="453034" y="1527035"/>
+            <a:chExt cx="1033614" cy="246221"/>
+          </a:xfrm>
+        </p:grpSpPr>
+        <p:pic>
+          <p:nvPicPr>
+            <p:cNvPr id="23" name="lookup:icon2">
+              <a:extLst>
+                <a:ext uri="{FF2B5EF4-FFF2-40B4-BE49-F238E27FC236}">
+                  <a16:creationId xmlns:a16="http://schemas.microsoft.com/office/drawing/2014/main" id="{CE22F6B8-48A1-C6DF-A49E-1242A55DA255}"/>
+                </a:ext>
+              </a:extLst>
+            </p:cNvPr>
+            <p:cNvPicPr>
+              <a:picLocks noChangeAspect="1"/>
+            </p:cNvPicPr>
+            <p:nvPr/>
+          </p:nvPicPr>
+          <p:blipFill>
+            <a:blip r:embed="rId5">
+              <a:extLst>
+                <a:ext uri="{28A0092B-C50C-407E-A947-70E740481C1C}">
+                  <a14:useLocalDpi xmlns:a14="http://schemas.microsoft.com/office/drawing/2010/main" val="0"/>
+                </a:ext>
+              </a:extLst>
+            </a:blip>
+            <a:srcRect/>
+            <a:stretch/>
+          </p:blipFill>
+          <p:spPr>
+            <a:xfrm>
+              <a:off x="453034" y="1527036"/>
+              <a:ext cx="216000" cy="216000"/>
+            </a:xfrm>
+            <a:prstGeom prst="rect">
+              <a:avLst/>
+            </a:prstGeom>
+          </p:spPr>
+        </p:pic>
         <p:sp>
           <p:nvSpPr>
-            <p:cNvPr id="3" name="rbind:sentences"/>
-            <p:cNvSpPr/>
+            <p:cNvPr id="24" name="bind:label">
+              <a:extLst>
+                <a:ext uri="{FF2B5EF4-FFF2-40B4-BE49-F238E27FC236}">
+                  <a16:creationId xmlns:a16="http://schemas.microsoft.com/office/drawing/2014/main" id="{EA7AEB30-8D22-B347-55F0-9F76A4676B87}"/>
+                </a:ext>
+              </a:extLst>
+            </p:cNvPr>
+            <p:cNvSpPr txBox="1"/>
             <p:nvPr/>
           </p:nvSpPr>
           <p:spPr>
             <a:xfrm>
-              <a:off x="4023360" y="457200"/>
-              <a:ext cx="3291840" cy="1609344"/>
-            </a:xfrm>
-            <a:prstGeom prst="rect">
-              <a:avLst/>
-            </a:prstGeom>
-          </p:spPr>
-          <p:style>
-            <a:lnRef idx="2">
-              <a:schemeClr val="dk1"/>
-            </a:lnRef>
-            <a:fillRef idx="1">
-              <a:schemeClr val="lt1"/>
-            </a:fillRef>
-            <a:effectRef idx="0">
-              <a:schemeClr val="dk1"/>
-            </a:effectRef>
-            <a:fontRef idx="minor">
-              <a:schemeClr val="dk1"/>
-            </a:fontRef>
-          </p:style>
+              <a:off x="643356" y="1527035"/>
+              <a:ext cx="843292" cy="246221"/>
+            </a:xfrm>
+            <a:prstGeom prst="rect">
+              <a:avLst/>
+            </a:prstGeom>
+            <a:noFill/>
+          </p:spPr>
           <p:txBody>
-            <a:bodyPr rtlCol="0" anchor="ctr"/>
+            <a:bodyPr wrap="square" rtlCol="0">
+              <a:spAutoFit/>
+            </a:bodyPr>
             <a:lstStyle/>
             <a:p>
-              <a:pPr algn="ctr">
-                <a:defRPr sz="2800" b="1"/>
-              </a:pPr>
               <a:r>
-                <a:rPr dirty="0"/>
-                <a:t>She – cook – in the kitchen</a:t>
+                <a:rPr lang="en-US" sz="1000" b="1" noProof="0" dirty="0">
+                  <a:latin typeface="Lato" panose="020F0502020204030203" pitchFamily="34" charset="0"/>
+                </a:rPr>
+                <a:t>Will meet…</a:t>
               </a:r>
             </a:p>
           </p:txBody>
         </p:sp>
+      </p:grpSp>
+      <p:grpSp>
+        <p:nvGrpSpPr>
+          <p:cNvPr id="26" name="repeat:clues">
+            <a:extLst>
+              <a:ext uri="{FF2B5EF4-FFF2-40B4-BE49-F238E27FC236}">
+                <a16:creationId xmlns:a16="http://schemas.microsoft.com/office/drawing/2014/main" id="{DF01A42F-B1F9-DDD1-8412-BD53C8100614}"/>
+              </a:ext>
+            </a:extLst>
+          </p:cNvPr>
+          <p:cNvGrpSpPr/>
+          <p:nvPr/>
+        </p:nvGrpSpPr>
+        <p:grpSpPr>
+          <a:xfrm>
+            <a:off x="2586640" y="1686633"/>
+            <a:ext cx="1139540" cy="246221"/>
+            <a:chOff x="441610" y="1527036"/>
+            <a:chExt cx="1139540" cy="246221"/>
+          </a:xfrm>
+        </p:grpSpPr>
+        <p:pic>
+          <p:nvPicPr>
+            <p:cNvPr id="27" name="lookup:icon3">
+              <a:extLst>
+                <a:ext uri="{FF2B5EF4-FFF2-40B4-BE49-F238E27FC236}">
+                  <a16:creationId xmlns:a16="http://schemas.microsoft.com/office/drawing/2014/main" id="{DCCF5BC0-1C84-E48D-5095-D22ADEE9AC65}"/>
+                </a:ext>
+              </a:extLst>
+            </p:cNvPr>
+            <p:cNvPicPr>
+              <a:picLocks noChangeAspect="1"/>
+            </p:cNvPicPr>
+            <p:nvPr/>
+          </p:nvPicPr>
+          <p:blipFill>
+            <a:blip r:embed="rId6">
+              <a:extLst>
+                <a:ext uri="{28A0092B-C50C-407E-A947-70E740481C1C}">
+                  <a14:useLocalDpi xmlns:a14="http://schemas.microsoft.com/office/drawing/2010/main" val="0"/>
+                </a:ext>
+              </a:extLst>
+            </a:blip>
+            <a:srcRect/>
+            <a:stretch/>
+          </p:blipFill>
+          <p:spPr>
+            <a:xfrm>
+              <a:off x="441610" y="1527036"/>
+              <a:ext cx="216000" cy="216000"/>
+            </a:xfrm>
+            <a:prstGeom prst="rect">
+              <a:avLst/>
+            </a:prstGeom>
+          </p:spPr>
+        </p:pic>
         <p:sp>
           <p:nvSpPr>
-            <p:cNvPr id="4" name="rbind:sentences"/>
-            <p:cNvSpPr/>
+            <p:cNvPr id="28" name="bind:label">
+              <a:extLst>
+                <a:ext uri="{FF2B5EF4-FFF2-40B4-BE49-F238E27FC236}">
+                  <a16:creationId xmlns:a16="http://schemas.microsoft.com/office/drawing/2014/main" id="{1C88167C-98CF-9F74-A9BD-5C4F9706E5CF}"/>
+                </a:ext>
+              </a:extLst>
+            </p:cNvPr>
+            <p:cNvSpPr txBox="1"/>
             <p:nvPr/>
           </p:nvSpPr>
           <p:spPr>
             <a:xfrm>
-              <a:off x="457200" y="2340864"/>
-              <a:ext cx="3291840" cy="1609344"/>
-            </a:xfrm>
-            <a:prstGeom prst="rect">
-              <a:avLst/>
-            </a:prstGeom>
-          </p:spPr>
-          <p:style>
-            <a:lnRef idx="2">
-              <a:schemeClr val="dk1"/>
-            </a:lnRef>
-            <a:fillRef idx="1">
-              <a:schemeClr val="lt1"/>
-            </a:fillRef>
-            <a:effectRef idx="0">
-              <a:schemeClr val="dk1"/>
-            </a:effectRef>
-            <a:fontRef idx="minor">
-              <a:schemeClr val="dk1"/>
-            </a:fontRef>
-          </p:style>
+              <a:off x="697262" y="1527036"/>
+              <a:ext cx="883888" cy="246221"/>
+            </a:xfrm>
+            <a:prstGeom prst="rect">
+              <a:avLst/>
+            </a:prstGeom>
+            <a:noFill/>
+          </p:spPr>
           <p:txBody>
-            <a:bodyPr rtlCol="0" anchor="ctr"/>
+            <a:bodyPr wrap="square" rtlCol="0">
+              <a:spAutoFit/>
+            </a:bodyPr>
             <a:lstStyle/>
             <a:p>
-              <a:pPr algn="ctr">
-                <a:defRPr sz="2800" b="1"/>
-              </a:pPr>
               <a:r>
-                <a:rPr dirty="0"/>
-                <a:t>We – watch – a movie</a:t>
+                <a:rPr lang="en-US" sz="1000" b="1" noProof="0" dirty="0">
+                  <a:latin typeface="Lato" panose="020F0502020204030203" pitchFamily="34" charset="0"/>
+                </a:rPr>
+                <a:t>Will study…</a:t>
               </a:r>
             </a:p>
           </p:txBody>
         </p:sp>
+      </p:grpSp>
+      <p:grpSp>
+        <p:nvGrpSpPr>
+          <p:cNvPr id="29" name="repeat:clues">
+            <a:extLst>
+              <a:ext uri="{FF2B5EF4-FFF2-40B4-BE49-F238E27FC236}">
+                <a16:creationId xmlns:a16="http://schemas.microsoft.com/office/drawing/2014/main" id="{F8B0B082-3B76-8BB6-1EC5-58BCDE378ACA}"/>
+              </a:ext>
+            </a:extLst>
+          </p:cNvPr>
+          <p:cNvGrpSpPr/>
+          <p:nvPr/>
+        </p:nvGrpSpPr>
+        <p:grpSpPr>
+          <a:xfrm>
+            <a:off x="3767728" y="1686632"/>
+            <a:ext cx="1238612" cy="246222"/>
+            <a:chOff x="464458" y="1527035"/>
+            <a:chExt cx="1276712" cy="246222"/>
+          </a:xfrm>
+        </p:grpSpPr>
+        <p:pic>
+          <p:nvPicPr>
+            <p:cNvPr id="30" name="lookup:icon4">
+              <a:extLst>
+                <a:ext uri="{FF2B5EF4-FFF2-40B4-BE49-F238E27FC236}">
+                  <a16:creationId xmlns:a16="http://schemas.microsoft.com/office/drawing/2014/main" id="{C90E3E91-F214-7C9A-722A-7DDD089D2903}"/>
+                </a:ext>
+              </a:extLst>
+            </p:cNvPr>
+            <p:cNvPicPr>
+              <a:picLocks noChangeAspect="1"/>
+            </p:cNvPicPr>
+            <p:nvPr/>
+          </p:nvPicPr>
+          <p:blipFill>
+            <a:blip r:embed="rId7">
+              <a:extLst>
+                <a:ext uri="{28A0092B-C50C-407E-A947-70E740481C1C}">
+                  <a14:useLocalDpi xmlns:a14="http://schemas.microsoft.com/office/drawing/2010/main" val="0"/>
+                </a:ext>
+              </a:extLst>
+            </a:blip>
+            <a:srcRect/>
+            <a:stretch/>
+          </p:blipFill>
+          <p:spPr>
+            <a:xfrm>
+              <a:off x="464458" y="1527035"/>
+              <a:ext cx="216000" cy="216000"/>
+            </a:xfrm>
+            <a:prstGeom prst="rect">
+              <a:avLst/>
+            </a:prstGeom>
+          </p:spPr>
+        </p:pic>
         <p:sp>
           <p:nvSpPr>
-            <p:cNvPr id="5" name="rbind:sentences"/>
-            <p:cNvSpPr/>
+            <p:cNvPr id="31" name="bind:label">
+              <a:extLst>
+                <a:ext uri="{FF2B5EF4-FFF2-40B4-BE49-F238E27FC236}">
+                  <a16:creationId xmlns:a16="http://schemas.microsoft.com/office/drawing/2014/main" id="{1404281B-96AE-BBCD-307F-1C7A1E461AE2}"/>
+                </a:ext>
+              </a:extLst>
+            </p:cNvPr>
+            <p:cNvSpPr txBox="1"/>
             <p:nvPr/>
           </p:nvSpPr>
           <p:spPr>
             <a:xfrm>
-              <a:off x="4023360" y="2340864"/>
-              <a:ext cx="3291840" cy="1609344"/>
-            </a:xfrm>
-            <a:prstGeom prst="rect">
-              <a:avLst/>
-            </a:prstGeom>
-          </p:spPr>
-          <p:style>
-            <a:lnRef idx="2">
-              <a:schemeClr val="dk1"/>
-            </a:lnRef>
-            <a:fillRef idx="1">
-              <a:schemeClr val="lt1"/>
-            </a:fillRef>
-            <a:effectRef idx="0">
-              <a:schemeClr val="dk1"/>
-            </a:effectRef>
-            <a:fontRef idx="minor">
-              <a:schemeClr val="dk1"/>
-            </a:fontRef>
-          </p:style>
+              <a:off x="680458" y="1527036"/>
+              <a:ext cx="1060712" cy="246221"/>
+            </a:xfrm>
+            <a:prstGeom prst="rect">
+              <a:avLst/>
+            </a:prstGeom>
+            <a:noFill/>
+          </p:spPr>
           <p:txBody>
-            <a:bodyPr rtlCol="0" anchor="ctr"/>
+            <a:bodyPr wrap="square" rtlCol="0">
+              <a:spAutoFit/>
+            </a:bodyPr>
             <a:lstStyle/>
             <a:p>
-              <a:pPr algn="ctr">
-                <a:defRPr sz="2800" b="1"/>
-              </a:pPr>
               <a:r>
-                <a:rPr dirty="0"/>
-                <a:t>He – run – in the park</a:t>
-              </a:r>
-            </a:p>
-          </p:txBody>
-        </p:sp>
-        <p:sp>
-          <p:nvSpPr>
-            <p:cNvPr id="6" name="rbind:sentences"/>
-            <p:cNvSpPr/>
-            <p:nvPr/>
-          </p:nvSpPr>
-          <p:spPr>
-            <a:xfrm>
-              <a:off x="457200" y="4224528"/>
-              <a:ext cx="3291840" cy="1609344"/>
-            </a:xfrm>
-            <a:prstGeom prst="rect">
-              <a:avLst/>
-            </a:prstGeom>
-          </p:spPr>
-          <p:style>
-            <a:lnRef idx="2">
-              <a:schemeClr val="dk1"/>
-            </a:lnRef>
-            <a:fillRef idx="1">
-              <a:schemeClr val="lt1"/>
-            </a:fillRef>
-            <a:effectRef idx="0">
-              <a:schemeClr val="dk1"/>
-            </a:effectRef>
-            <a:fontRef idx="minor">
-              <a:schemeClr val="dk1"/>
-            </a:fontRef>
-          </p:style>
-          <p:txBody>
-            <a:bodyPr rtlCol="0" anchor="ctr"/>
-            <a:lstStyle/>
-            <a:p>
-              <a:pPr algn="ctr">
-                <a:defRPr sz="2800" b="1"/>
-              </a:pPr>
-              <a:r>
-                <a:rPr dirty="0"/>
-                <a:t>The children – play – in the garden</a:t>
-              </a:r>
-            </a:p>
-          </p:txBody>
-        </p:sp>
-        <p:sp>
-          <p:nvSpPr>
-            <p:cNvPr id="7" name="rbind:sentences"/>
-            <p:cNvSpPr/>
-            <p:nvPr/>
-          </p:nvSpPr>
-          <p:spPr>
-            <a:xfrm>
-              <a:off x="4023360" y="4224528"/>
-              <a:ext cx="3291840" cy="1609344"/>
-            </a:xfrm>
-            <a:prstGeom prst="rect">
-              <a:avLst/>
-            </a:prstGeom>
-          </p:spPr>
-          <p:style>
-            <a:lnRef idx="2">
-              <a:schemeClr val="dk1"/>
-            </a:lnRef>
-            <a:fillRef idx="1">
-              <a:schemeClr val="lt1"/>
-            </a:fillRef>
-            <a:effectRef idx="0">
-              <a:schemeClr val="dk1"/>
-            </a:effectRef>
-            <a:fontRef idx="minor">
-              <a:schemeClr val="dk1"/>
-            </a:fontRef>
-          </p:style>
-          <p:txBody>
-            <a:bodyPr rtlCol="0" anchor="ctr"/>
-            <a:lstStyle/>
-            <a:p>
-              <a:pPr algn="ctr">
-                <a:defRPr sz="2800" b="1"/>
-              </a:pPr>
-              <a:r>
-                <a:rPr dirty="0"/>
-                <a:t>I – read – a book</a:t>
-              </a:r>
-            </a:p>
-          </p:txBody>
-        </p:sp>
-        <p:sp>
-          <p:nvSpPr>
-            <p:cNvPr id="8" name="rbind:sentences"/>
-            <p:cNvSpPr/>
-            <p:nvPr/>
-          </p:nvSpPr>
-          <p:spPr>
-            <a:xfrm>
-              <a:off x="457200" y="6108192"/>
-              <a:ext cx="3291840" cy="1609344"/>
-            </a:xfrm>
-            <a:prstGeom prst="rect">
-              <a:avLst/>
-            </a:prstGeom>
-          </p:spPr>
-          <p:style>
-            <a:lnRef idx="2">
-              <a:schemeClr val="dk1"/>
-            </a:lnRef>
-            <a:fillRef idx="1">
-              <a:schemeClr val="lt1"/>
-            </a:fillRef>
-            <a:effectRef idx="0">
-              <a:schemeClr val="dk1"/>
-            </a:effectRef>
-            <a:fontRef idx="minor">
-              <a:schemeClr val="dk1"/>
-            </a:fontRef>
-          </p:style>
-          <p:txBody>
-            <a:bodyPr rtlCol="0" anchor="ctr"/>
-            <a:lstStyle/>
-            <a:p>
-              <a:pPr algn="ctr">
-                <a:defRPr sz="2800" b="1"/>
-              </a:pPr>
-              <a:r>
-                <a:rPr dirty="0"/>
-                <a:t>She – talk – on the phone</a:t>
-              </a:r>
-            </a:p>
-          </p:txBody>
-        </p:sp>
-        <p:sp>
-          <p:nvSpPr>
-            <p:cNvPr id="9" name="rbind:sentences"/>
-            <p:cNvSpPr/>
-            <p:nvPr/>
-          </p:nvSpPr>
-          <p:spPr>
-            <a:xfrm>
-              <a:off x="4023360" y="6108192"/>
-              <a:ext cx="3291840" cy="1609344"/>
-            </a:xfrm>
-            <a:prstGeom prst="rect">
-              <a:avLst/>
-            </a:prstGeom>
-          </p:spPr>
-          <p:style>
-            <a:lnRef idx="2">
-              <a:schemeClr val="dk1"/>
-            </a:lnRef>
-            <a:fillRef idx="1">
-              <a:schemeClr val="lt1"/>
-            </a:fillRef>
-            <a:effectRef idx="0">
-              <a:schemeClr val="dk1"/>
-            </a:effectRef>
-            <a:fontRef idx="minor">
-              <a:schemeClr val="dk1"/>
-            </a:fontRef>
-          </p:style>
-          <p:txBody>
-            <a:bodyPr rtlCol="0" anchor="ctr"/>
-            <a:lstStyle/>
-            <a:p>
-              <a:pPr algn="ctr">
-                <a:defRPr sz="2800" b="1"/>
-              </a:pPr>
-              <a:r>
-                <a:rPr dirty="0"/>
-                <a:t>They – eat – at the restaurant</a:t>
-              </a:r>
-            </a:p>
-          </p:txBody>
-        </p:sp>
-        <p:sp>
-          <p:nvSpPr>
-            <p:cNvPr id="10" name="rbind:sentences"/>
-            <p:cNvSpPr/>
-            <p:nvPr/>
-          </p:nvSpPr>
-          <p:spPr>
-            <a:xfrm>
-              <a:off x="457200" y="7991856"/>
-              <a:ext cx="3291840" cy="1609344"/>
-            </a:xfrm>
-            <a:prstGeom prst="rect">
-              <a:avLst/>
-            </a:prstGeom>
-          </p:spPr>
-          <p:style>
-            <a:lnRef idx="2">
-              <a:schemeClr val="dk1"/>
-            </a:lnRef>
-            <a:fillRef idx="1">
-              <a:schemeClr val="lt1"/>
-            </a:fillRef>
-            <a:effectRef idx="0">
-              <a:schemeClr val="dk1"/>
-            </a:effectRef>
-            <a:fontRef idx="minor">
-              <a:schemeClr val="dk1"/>
-            </a:fontRef>
-          </p:style>
-          <p:txBody>
-            <a:bodyPr rtlCol="0" anchor="ctr"/>
-            <a:lstStyle/>
-            <a:p>
-              <a:pPr algn="ctr">
-                <a:defRPr sz="2800" b="1"/>
-              </a:pPr>
-              <a:r>
-                <a:rPr dirty="0"/>
-                <a:t>He – study – in the library</a:t>
-              </a:r>
-            </a:p>
-          </p:txBody>
-        </p:sp>
-        <p:sp>
-          <p:nvSpPr>
-            <p:cNvPr id="11" name="rbind:sentences"/>
-            <p:cNvSpPr/>
-            <p:nvPr/>
-          </p:nvSpPr>
-          <p:spPr>
-            <a:xfrm>
-              <a:off x="4023360" y="7991856"/>
-              <a:ext cx="3291840" cy="1609344"/>
-            </a:xfrm>
-            <a:prstGeom prst="rect">
-              <a:avLst/>
-            </a:prstGeom>
-          </p:spPr>
-          <p:style>
-            <a:lnRef idx="2">
-              <a:schemeClr val="dk1"/>
-            </a:lnRef>
-            <a:fillRef idx="1">
-              <a:schemeClr val="lt1"/>
-            </a:fillRef>
-            <a:effectRef idx="0">
-              <a:schemeClr val="dk1"/>
-            </a:effectRef>
-            <a:fontRef idx="minor">
-              <a:schemeClr val="dk1"/>
-            </a:fontRef>
-          </p:style>
-          <p:txBody>
-            <a:bodyPr rtlCol="0" anchor="ctr"/>
-            <a:lstStyle/>
-            <a:p>
-              <a:pPr algn="ctr">
-                <a:defRPr sz="2800" b="1"/>
-              </a:pPr>
-              <a:r>
-                <a:rPr dirty="0"/>
-                <a:t>We – listen – to music</a:t>
+                <a:rPr lang="en-US" sz="1000" b="1" noProof="0" dirty="0">
+                  <a:latin typeface="Lato" panose="020F0502020204030203" pitchFamily="34" charset="0"/>
+                </a:rPr>
+                <a:t>Will travel to…</a:t>
               </a:r>
             </a:p>
           </p:txBody>
@@ -4503,10 +4330,10 @@
       </p:grpSp>
       <p:sp>
         <p:nvSpPr>
-          <p:cNvPr id="12" name="Rectangle 11">
+          <p:cNvPr id="32" name="Rectangle: Rounded Corners 31">
             <a:extLst>
               <a:ext uri="{FF2B5EF4-FFF2-40B4-BE49-F238E27FC236}">
-                <a16:creationId xmlns:a16="http://schemas.microsoft.com/office/drawing/2014/main" id="{ECF5FF8C-7E75-E181-FC44-D880A76BFAAF}"/>
+                <a16:creationId xmlns:a16="http://schemas.microsoft.com/office/drawing/2014/main" id="{485BB4DC-2DEE-3215-EB16-993A93AC7097}"/>
               </a:ext>
             </a:extLst>
           </p:cNvPr>
@@ -4515,27 +4342,33 @@
         </p:nvSpPr>
         <p:spPr>
           <a:xfrm>
-            <a:off x="457200" y="457200"/>
-            <a:ext cx="3291840" cy="217357"/>
+            <a:off x="5034600" y="1237488"/>
+            <a:ext cx="1611818" cy="861822"/>
           </a:xfrm>
-          <a:prstGeom prst="rect">
+          <a:prstGeom prst="roundRect">
             <a:avLst/>
           </a:prstGeom>
           <a:solidFill>
-            <a:srgbClr val="00B050"/>
+            <a:srgbClr val="FC9638">
+              <a:alpha val="47843"/>
+            </a:srgbClr>
           </a:solidFill>
           <a:ln>
-            <a:noFill/>
+            <a:solidFill>
+              <a:srgbClr val="985A22"/>
+            </a:solidFill>
           </a:ln>
         </p:spPr>
         <p:style>
-          <a:lnRef idx="1">
-            <a:schemeClr val="accent1"/>
+          <a:lnRef idx="2">
+            <a:schemeClr val="accent1">
+              <a:shade val="15000"/>
+            </a:schemeClr>
           </a:lnRef>
-          <a:fillRef idx="3">
+          <a:fillRef idx="1">
             <a:schemeClr val="accent1"/>
           </a:fillRef>
-          <a:effectRef idx="2">
+          <a:effectRef idx="0">
             <a:schemeClr val="accent1"/>
           </a:effectRef>
           <a:fontRef idx="minor">
@@ -4547,465 +4380,4201 @@
           <a:lstStyle/>
           <a:p>
             <a:pPr algn="ctr"/>
-            <a:endParaRPr lang="es-MX"/>
+            <a:endParaRPr lang="en-US" noProof="0" dirty="0"/>
           </a:p>
         </p:txBody>
       </p:sp>
       <p:sp>
         <p:nvSpPr>
-          <p:cNvPr id="13" name="Rectangle 12">
+          <p:cNvPr id="33" name="TextBox 32">
             <a:extLst>
               <a:ext uri="{FF2B5EF4-FFF2-40B4-BE49-F238E27FC236}">
-                <a16:creationId xmlns:a16="http://schemas.microsoft.com/office/drawing/2014/main" id="{81C6A5B2-5841-D363-360E-1D58B495093A}"/>
+                <a16:creationId xmlns:a16="http://schemas.microsoft.com/office/drawing/2014/main" id="{51A3449A-92B4-3769-4641-F0E9C2BFB192}"/>
               </a:ext>
             </a:extLst>
           </p:cNvPr>
-          <p:cNvSpPr/>
+          <p:cNvSpPr txBox="1"/>
           <p:nvPr/>
         </p:nvSpPr>
         <p:spPr>
           <a:xfrm>
-            <a:off x="457200" y="2340864"/>
-            <a:ext cx="3291840" cy="217357"/>
+            <a:off x="5006340" y="1248143"/>
+            <a:ext cx="1675600" cy="200055"/>
           </a:xfrm>
           <a:prstGeom prst="rect">
             <a:avLst/>
           </a:prstGeom>
-          <a:solidFill>
-            <a:schemeClr val="tx2"/>
-          </a:solidFill>
-          <a:ln>
-            <a:noFill/>
-          </a:ln>
+          <a:noFill/>
         </p:spPr>
-        <p:style>
-          <a:lnRef idx="1">
-            <a:schemeClr val="accent1"/>
-          </a:lnRef>
-          <a:fillRef idx="3">
-            <a:schemeClr val="accent1"/>
-          </a:fillRef>
-          <a:effectRef idx="2">
-            <a:schemeClr val="accent1"/>
-          </a:effectRef>
-          <a:fontRef idx="minor">
-            <a:schemeClr val="lt1"/>
-          </a:fontRef>
-        </p:style>
         <p:txBody>
-          <a:bodyPr rtlCol="0" anchor="ctr"/>
+          <a:bodyPr wrap="square" rtlCol="0">
+            <a:spAutoFit/>
+          </a:bodyPr>
           <a:lstStyle/>
           <a:p>
-            <a:pPr algn="ctr"/>
-            <a:endParaRPr lang="es-MX"/>
+            <a:r>
+              <a:rPr lang="en-US" sz="700" b="1" noProof="0" dirty="0">
+                <a:latin typeface="Lato" panose="020F0502020204030203" pitchFamily="34" charset="0"/>
+              </a:rPr>
+              <a:t>Make questions to get information</a:t>
+            </a:r>
           </a:p>
         </p:txBody>
       </p:sp>
       <p:sp>
         <p:nvSpPr>
-          <p:cNvPr id="14" name="Rectangle 13">
+          <p:cNvPr id="34" name="bind:example_question">
             <a:extLst>
               <a:ext uri="{FF2B5EF4-FFF2-40B4-BE49-F238E27FC236}">
-                <a16:creationId xmlns:a16="http://schemas.microsoft.com/office/drawing/2014/main" id="{A4DBB08B-1E22-E2EE-B6B8-1E7CB137A5C1}"/>
+                <a16:creationId xmlns:a16="http://schemas.microsoft.com/office/drawing/2014/main" id="{F44DD555-EBD6-12C3-9896-5CD485D1FA5F}"/>
               </a:ext>
             </a:extLst>
           </p:cNvPr>
-          <p:cNvSpPr/>
+          <p:cNvSpPr txBox="1"/>
           <p:nvPr/>
         </p:nvSpPr>
         <p:spPr>
           <a:xfrm>
-            <a:off x="457200" y="4224528"/>
-            <a:ext cx="3291840" cy="217357"/>
+            <a:off x="5020470" y="1427007"/>
+            <a:ext cx="1675600" cy="200055"/>
           </a:xfrm>
           <a:prstGeom prst="rect">
             <a:avLst/>
           </a:prstGeom>
-          <a:solidFill>
-            <a:srgbClr val="FFC000"/>
-          </a:solidFill>
-          <a:ln>
-            <a:noFill/>
-          </a:ln>
+          <a:noFill/>
         </p:spPr>
-        <p:style>
-          <a:lnRef idx="1">
-            <a:schemeClr val="accent1"/>
-          </a:lnRef>
-          <a:fillRef idx="3">
-            <a:schemeClr val="accent1"/>
-          </a:fillRef>
-          <a:effectRef idx="2">
-            <a:schemeClr val="accent1"/>
-          </a:effectRef>
-          <a:fontRef idx="minor">
-            <a:schemeClr val="lt1"/>
-          </a:fontRef>
-        </p:style>
         <p:txBody>
-          <a:bodyPr rtlCol="0" anchor="ctr"/>
+          <a:bodyPr wrap="square" rtlCol="0">
+            <a:spAutoFit/>
+          </a:bodyPr>
           <a:lstStyle/>
           <a:p>
-            <a:pPr algn="ctr"/>
-            <a:endParaRPr lang="es-MX"/>
+            <a:r>
+              <a:rPr lang="en-US" sz="700" b="1" noProof="0" dirty="0">
+                <a:solidFill>
+                  <a:srgbClr val="C00000"/>
+                </a:solidFill>
+                <a:latin typeface="Lato" panose="020F0502020204030203" pitchFamily="34" charset="0"/>
+              </a:rPr>
+              <a:t>Will he (buy a pencil tomorrow)?</a:t>
+            </a:r>
           </a:p>
         </p:txBody>
       </p:sp>
       <p:sp>
         <p:nvSpPr>
-          <p:cNvPr id="15" name="Rectangle 14">
+          <p:cNvPr id="35" name="bind:positive_answer">
             <a:extLst>
               <a:ext uri="{FF2B5EF4-FFF2-40B4-BE49-F238E27FC236}">
-                <a16:creationId xmlns:a16="http://schemas.microsoft.com/office/drawing/2014/main" id="{00EC514B-CD88-C161-E3D2-E0989C6AED31}"/>
+                <a16:creationId xmlns:a16="http://schemas.microsoft.com/office/drawing/2014/main" id="{9F4E82A4-CDAF-477A-4246-F72AA8D4A842}"/>
               </a:ext>
             </a:extLst>
           </p:cNvPr>
-          <p:cNvSpPr/>
+          <p:cNvSpPr txBox="1"/>
           <p:nvPr/>
         </p:nvSpPr>
         <p:spPr>
           <a:xfrm>
-            <a:off x="457200" y="6097998"/>
-            <a:ext cx="3291840" cy="217357"/>
+            <a:off x="5054786" y="1763158"/>
+            <a:ext cx="803484" cy="200055"/>
           </a:xfrm>
           <a:prstGeom prst="rect">
             <a:avLst/>
           </a:prstGeom>
-          <a:solidFill>
-            <a:srgbClr val="C00000"/>
-          </a:solidFill>
-          <a:ln>
-            <a:noFill/>
-          </a:ln>
+          <a:noFill/>
         </p:spPr>
-        <p:style>
-          <a:lnRef idx="1">
-            <a:schemeClr val="accent1"/>
-          </a:lnRef>
-          <a:fillRef idx="3">
-            <a:schemeClr val="accent1"/>
-          </a:fillRef>
-          <a:effectRef idx="2">
-            <a:schemeClr val="accent1"/>
-          </a:effectRef>
-          <a:fontRef idx="minor">
-            <a:schemeClr val="lt1"/>
-          </a:fontRef>
-        </p:style>
         <p:txBody>
-          <a:bodyPr rtlCol="0" anchor="ctr"/>
+          <a:bodyPr wrap="square" rtlCol="0">
+            <a:spAutoFit/>
+          </a:bodyPr>
           <a:lstStyle/>
           <a:p>
-            <a:pPr algn="ctr"/>
-            <a:endParaRPr lang="es-MX"/>
+            <a:r>
+              <a:rPr lang="en-US" sz="700" b="1" noProof="0" dirty="0">
+                <a:latin typeface="Lato" panose="020F0502020204030203" pitchFamily="34" charset="0"/>
+              </a:rPr>
+              <a:t>+ Yes he will.</a:t>
+            </a:r>
           </a:p>
         </p:txBody>
       </p:sp>
       <p:sp>
         <p:nvSpPr>
-          <p:cNvPr id="16" name="Rectangle 15">
+          <p:cNvPr id="36" name="bind:negative_answer">
             <a:extLst>
               <a:ext uri="{FF2B5EF4-FFF2-40B4-BE49-F238E27FC236}">
-                <a16:creationId xmlns:a16="http://schemas.microsoft.com/office/drawing/2014/main" id="{EDD9BB94-997B-AD51-D5AD-BAC41265A65A}"/>
+                <a16:creationId xmlns:a16="http://schemas.microsoft.com/office/drawing/2014/main" id="{39906ABB-46A4-5A98-F280-B99D740EF2D2}"/>
               </a:ext>
             </a:extLst>
           </p:cNvPr>
-          <p:cNvSpPr/>
+          <p:cNvSpPr txBox="1"/>
           <p:nvPr/>
         </p:nvSpPr>
         <p:spPr>
           <a:xfrm>
-            <a:off x="457200" y="7991856"/>
-            <a:ext cx="3291840" cy="217357"/>
+            <a:off x="5800990" y="1763158"/>
+            <a:ext cx="803484" cy="200055"/>
           </a:xfrm>
           <a:prstGeom prst="rect">
             <a:avLst/>
           </a:prstGeom>
-          <a:solidFill>
-            <a:schemeClr val="accent4">
-              <a:lumMod val="50000"/>
-            </a:schemeClr>
-          </a:solidFill>
-          <a:ln>
-            <a:noFill/>
-          </a:ln>
+          <a:noFill/>
         </p:spPr>
-        <p:style>
-          <a:lnRef idx="1">
-            <a:schemeClr val="accent1"/>
-          </a:lnRef>
-          <a:fillRef idx="3">
-            <a:schemeClr val="accent1"/>
-          </a:fillRef>
-          <a:effectRef idx="2">
-            <a:schemeClr val="accent1"/>
-          </a:effectRef>
-          <a:fontRef idx="minor">
-            <a:schemeClr val="lt1"/>
-          </a:fontRef>
-        </p:style>
         <p:txBody>
-          <a:bodyPr rtlCol="0" anchor="ctr"/>
+          <a:bodyPr wrap="square" rtlCol="0">
+            <a:spAutoFit/>
+          </a:bodyPr>
           <a:lstStyle/>
           <a:p>
-            <a:pPr algn="ctr"/>
-            <a:endParaRPr lang="es-MX"/>
+            <a:r>
+              <a:rPr lang="en-US" sz="700" b="1" noProof="0" dirty="0">
+                <a:latin typeface="Lato" panose="020F0502020204030203" pitchFamily="34" charset="0"/>
+              </a:rPr>
+              <a:t>+ No he won’t.</a:t>
+            </a:r>
           </a:p>
         </p:txBody>
       </p:sp>
-      <p:sp>
-        <p:nvSpPr>
-          <p:cNvPr id="17" name="Rectangle 16">
+      <p:grpSp>
+        <p:nvGrpSpPr>
+          <p:cNvPr id="45" name="repeat:characters">
             <a:extLst>
               <a:ext uri="{FF2B5EF4-FFF2-40B4-BE49-F238E27FC236}">
-                <a16:creationId xmlns:a16="http://schemas.microsoft.com/office/drawing/2014/main" id="{406E5E14-F39C-9E7D-BD86-A21408C8A2C9}"/>
+                <a16:creationId xmlns:a16="http://schemas.microsoft.com/office/drawing/2014/main" id="{DB273119-C161-9716-3DB8-503DCE6474E2}"/>
               </a:ext>
             </a:extLst>
           </p:cNvPr>
-          <p:cNvSpPr/>
+          <p:cNvGrpSpPr/>
           <p:nvPr/>
-        </p:nvSpPr>
+        </p:nvGrpSpPr>
+        <p:grpSpPr>
+          <a:xfrm>
+            <a:off x="161930" y="2315943"/>
+            <a:ext cx="2054622" cy="1653650"/>
+            <a:chOff x="161930" y="1944956"/>
+            <a:chExt cx="2054622" cy="1653650"/>
+          </a:xfrm>
+        </p:grpSpPr>
+        <p:sp>
+          <p:nvSpPr>
+            <p:cNvPr id="2" name="Rectangle: Rounded Corners 1">
+              <a:extLst>
+                <a:ext uri="{FF2B5EF4-FFF2-40B4-BE49-F238E27FC236}">
+                  <a16:creationId xmlns:a16="http://schemas.microsoft.com/office/drawing/2014/main" id="{5F2EA083-5A27-05B2-507F-9B8588796D58}"/>
+                </a:ext>
+              </a:extLst>
+            </p:cNvPr>
+            <p:cNvSpPr/>
+            <p:nvPr/>
+          </p:nvSpPr>
+          <p:spPr>
+            <a:xfrm>
+              <a:off x="161930" y="1944956"/>
+              <a:ext cx="2054622" cy="1653650"/>
+            </a:xfrm>
+            <a:prstGeom prst="roundRect">
+              <a:avLst/>
+            </a:prstGeom>
+            <a:noFill/>
+            <a:ln>
+              <a:solidFill>
+                <a:schemeClr val="tx1"/>
+              </a:solidFill>
+            </a:ln>
+          </p:spPr>
+          <p:style>
+            <a:lnRef idx="2">
+              <a:schemeClr val="accent1">
+                <a:shade val="15000"/>
+              </a:schemeClr>
+            </a:lnRef>
+            <a:fillRef idx="1">
+              <a:schemeClr val="accent1"/>
+            </a:fillRef>
+            <a:effectRef idx="0">
+              <a:schemeClr val="accent1"/>
+            </a:effectRef>
+            <a:fontRef idx="minor">
+              <a:schemeClr val="lt1"/>
+            </a:fontRef>
+          </p:style>
+          <p:txBody>
+            <a:bodyPr rtlCol="0" anchor="ctr"/>
+            <a:lstStyle/>
+            <a:p>
+              <a:pPr algn="ctr"/>
+              <a:endParaRPr lang="en-US" noProof="0" dirty="0"/>
+            </a:p>
+          </p:txBody>
+        </p:sp>
+        <p:pic>
+          <p:nvPicPr>
+            <p:cNvPr id="11" name="Picture 10">
+              <a:extLst>
+                <a:ext uri="{FF2B5EF4-FFF2-40B4-BE49-F238E27FC236}">
+                  <a16:creationId xmlns:a16="http://schemas.microsoft.com/office/drawing/2014/main" id="{B551A4B4-8912-6F7A-7B3C-5794367ED04F}"/>
+                </a:ext>
+              </a:extLst>
+            </p:cNvPr>
+            <p:cNvPicPr>
+              <a:picLocks noChangeAspect="1"/>
+            </p:cNvPicPr>
+            <p:nvPr/>
+          </p:nvPicPr>
+          <p:blipFill>
+            <a:blip r:embed="rId8"/>
+            <a:stretch>
+              <a:fillRect/>
+            </a:stretch>
+          </p:blipFill>
+          <p:spPr>
+            <a:xfrm>
+              <a:off x="291465" y="2073961"/>
+              <a:ext cx="630560" cy="697820"/>
+            </a:xfrm>
+            <a:prstGeom prst="rect">
+              <a:avLst/>
+            </a:prstGeom>
+          </p:spPr>
+        </p:pic>
+        <p:sp>
+          <p:nvSpPr>
+            <p:cNvPr id="13" name="TextBox 12">
+              <a:extLst>
+                <a:ext uri="{FF2B5EF4-FFF2-40B4-BE49-F238E27FC236}">
+                  <a16:creationId xmlns:a16="http://schemas.microsoft.com/office/drawing/2014/main" id="{258C29F1-4CD9-1BE3-EC49-82BE72AF2ABD}"/>
+                </a:ext>
+              </a:extLst>
+            </p:cNvPr>
+            <p:cNvSpPr txBox="1"/>
+            <p:nvPr/>
+          </p:nvSpPr>
+          <p:spPr>
+            <a:xfrm>
+              <a:off x="164245" y="2763786"/>
+              <a:ext cx="914400" cy="430887"/>
+            </a:xfrm>
+            <a:prstGeom prst="rect">
+              <a:avLst/>
+            </a:prstGeom>
+            <a:noFill/>
+          </p:spPr>
+          <p:txBody>
+            <a:bodyPr wrap="square" rtlCol="0">
+              <a:spAutoFit/>
+            </a:bodyPr>
+            <a:lstStyle/>
+            <a:p>
+              <a:pPr algn="ctr"/>
+              <a:r>
+                <a:rPr lang="en-US" sz="2200" b="1" noProof="0" dirty="0">
+                  <a:latin typeface="Lato" panose="020F0502020204030203" pitchFamily="34" charset="0"/>
+                </a:rPr>
+                <a:t>Mark</a:t>
+              </a:r>
+            </a:p>
+          </p:txBody>
+        </p:sp>
+        <p:pic>
+          <p:nvPicPr>
+            <p:cNvPr id="15" name="lookup:icon1">
+              <a:extLst>
+                <a:ext uri="{FF2B5EF4-FFF2-40B4-BE49-F238E27FC236}">
+                  <a16:creationId xmlns:a16="http://schemas.microsoft.com/office/drawing/2014/main" id="{1D316950-56FE-AFAE-F0DE-772829164868}"/>
+                </a:ext>
+              </a:extLst>
+            </p:cNvPr>
+            <p:cNvPicPr>
+              <a:picLocks noChangeAspect="1"/>
+            </p:cNvPicPr>
+            <p:nvPr/>
+          </p:nvPicPr>
+          <p:blipFill>
+            <a:blip r:embed="rId4"/>
+            <a:stretch>
+              <a:fillRect/>
+            </a:stretch>
+          </p:blipFill>
+          <p:spPr>
+            <a:xfrm>
+              <a:off x="1001387" y="2057882"/>
+              <a:ext cx="216000" cy="216000"/>
+            </a:xfrm>
+            <a:prstGeom prst="rect">
+              <a:avLst/>
+            </a:prstGeom>
+          </p:spPr>
+        </p:pic>
+        <p:pic>
+          <p:nvPicPr>
+            <p:cNvPr id="25" name="lookup:icon2">
+              <a:extLst>
+                <a:ext uri="{FF2B5EF4-FFF2-40B4-BE49-F238E27FC236}">
+                  <a16:creationId xmlns:a16="http://schemas.microsoft.com/office/drawing/2014/main" id="{1E3EDAD6-2DFB-8872-7EDD-6BD54EFF596C}"/>
+                </a:ext>
+              </a:extLst>
+            </p:cNvPr>
+            <p:cNvPicPr>
+              <a:picLocks noChangeAspect="1"/>
+            </p:cNvPicPr>
+            <p:nvPr/>
+          </p:nvPicPr>
+          <p:blipFill>
+            <a:blip r:embed="rId5">
+              <a:extLst>
+                <a:ext uri="{28A0092B-C50C-407E-A947-70E740481C1C}">
+                  <a14:useLocalDpi xmlns:a14="http://schemas.microsoft.com/office/drawing/2010/main" val="0"/>
+                </a:ext>
+              </a:extLst>
+            </a:blip>
+            <a:srcRect/>
+            <a:stretch/>
+          </p:blipFill>
+          <p:spPr>
+            <a:xfrm>
+              <a:off x="1001387" y="2455432"/>
+              <a:ext cx="216000" cy="216000"/>
+            </a:xfrm>
+            <a:prstGeom prst="rect">
+              <a:avLst/>
+            </a:prstGeom>
+          </p:spPr>
+        </p:pic>
+        <p:pic>
+          <p:nvPicPr>
+            <p:cNvPr id="38" name="lookup:icon3">
+              <a:extLst>
+                <a:ext uri="{FF2B5EF4-FFF2-40B4-BE49-F238E27FC236}">
+                  <a16:creationId xmlns:a16="http://schemas.microsoft.com/office/drawing/2014/main" id="{6387CA0E-ACCC-5C99-DC5B-ED750183DCED}"/>
+                </a:ext>
+              </a:extLst>
+            </p:cNvPr>
+            <p:cNvPicPr>
+              <a:picLocks noChangeAspect="1"/>
+            </p:cNvPicPr>
+            <p:nvPr/>
+          </p:nvPicPr>
+          <p:blipFill>
+            <a:blip r:embed="rId6">
+              <a:extLst>
+                <a:ext uri="{28A0092B-C50C-407E-A947-70E740481C1C}">
+                  <a14:useLocalDpi xmlns:a14="http://schemas.microsoft.com/office/drawing/2010/main" val="0"/>
+                </a:ext>
+              </a:extLst>
+            </a:blip>
+            <a:srcRect/>
+            <a:stretch/>
+          </p:blipFill>
+          <p:spPr>
+            <a:xfrm>
+              <a:off x="1001387" y="2852982"/>
+              <a:ext cx="216000" cy="216000"/>
+            </a:xfrm>
+            <a:prstGeom prst="rect">
+              <a:avLst/>
+            </a:prstGeom>
+          </p:spPr>
+        </p:pic>
+        <p:pic>
+          <p:nvPicPr>
+            <p:cNvPr id="40" name="lookup:icon4">
+              <a:extLst>
+                <a:ext uri="{FF2B5EF4-FFF2-40B4-BE49-F238E27FC236}">
+                  <a16:creationId xmlns:a16="http://schemas.microsoft.com/office/drawing/2014/main" id="{C0EF144E-7FA3-3998-4154-A1D24FA4344D}"/>
+                </a:ext>
+              </a:extLst>
+            </p:cNvPr>
+            <p:cNvPicPr>
+              <a:picLocks noChangeAspect="1"/>
+            </p:cNvPicPr>
+            <p:nvPr/>
+          </p:nvPicPr>
+          <p:blipFill>
+            <a:blip r:embed="rId7">
+              <a:extLst>
+                <a:ext uri="{28A0092B-C50C-407E-A947-70E740481C1C}">
+                  <a14:useLocalDpi xmlns:a14="http://schemas.microsoft.com/office/drawing/2010/main" val="0"/>
+                </a:ext>
+              </a:extLst>
+            </a:blip>
+            <a:srcRect/>
+            <a:stretch/>
+          </p:blipFill>
+          <p:spPr>
+            <a:xfrm>
+              <a:off x="1014114" y="3250532"/>
+              <a:ext cx="209554" cy="216000"/>
+            </a:xfrm>
+            <a:prstGeom prst="rect">
+              <a:avLst/>
+            </a:prstGeom>
+          </p:spPr>
+        </p:pic>
+        <p:sp>
+          <p:nvSpPr>
+            <p:cNvPr id="41" name="rbind:answers">
+              <a:extLst>
+                <a:ext uri="{FF2B5EF4-FFF2-40B4-BE49-F238E27FC236}">
+                  <a16:creationId xmlns:a16="http://schemas.microsoft.com/office/drawing/2014/main" id="{31F7C684-C9AC-A80E-ED7B-84083456EAC1}"/>
+                </a:ext>
+              </a:extLst>
+            </p:cNvPr>
+            <p:cNvSpPr txBox="1"/>
+            <p:nvPr/>
+          </p:nvSpPr>
+          <p:spPr>
+            <a:xfrm>
+              <a:off x="1154055" y="1996883"/>
+              <a:ext cx="990975" cy="400110"/>
+            </a:xfrm>
+            <a:prstGeom prst="rect">
+              <a:avLst/>
+            </a:prstGeom>
+            <a:noFill/>
+          </p:spPr>
+          <p:txBody>
+            <a:bodyPr wrap="square" rtlCol="0">
+              <a:spAutoFit/>
+            </a:bodyPr>
+            <a:lstStyle/>
+            <a:p>
+              <a:r>
+                <a:rPr lang="en-US" sz="1000" b="1" noProof="0" dirty="0"/>
+                <a:t>buy a pencil tomorrow</a:t>
+              </a:r>
+            </a:p>
+          </p:txBody>
+        </p:sp>
+        <p:sp>
+          <p:nvSpPr>
+            <p:cNvPr id="42" name="rbind:answers">
+              <a:extLst>
+                <a:ext uri="{FF2B5EF4-FFF2-40B4-BE49-F238E27FC236}">
+                  <a16:creationId xmlns:a16="http://schemas.microsoft.com/office/drawing/2014/main" id="{93F6D398-D6FE-63D2-D8B6-3DEE1610B702}"/>
+                </a:ext>
+              </a:extLst>
+            </p:cNvPr>
+            <p:cNvSpPr txBox="1"/>
+            <p:nvPr/>
+          </p:nvSpPr>
+          <p:spPr>
+            <a:xfrm>
+              <a:off x="1152111" y="2386808"/>
+              <a:ext cx="990975" cy="400110"/>
+            </a:xfrm>
+            <a:prstGeom prst="rect">
+              <a:avLst/>
+            </a:prstGeom>
+            <a:noFill/>
+          </p:spPr>
+          <p:txBody>
+            <a:bodyPr wrap="square" rtlCol="0">
+              <a:spAutoFit/>
+            </a:bodyPr>
+            <a:lstStyle/>
+            <a:p>
+              <a:r>
+                <a:rPr lang="en-US" sz="1000" b="1" noProof="0" dirty="0"/>
+                <a:t>his friend next week</a:t>
+              </a:r>
+            </a:p>
+          </p:txBody>
+        </p:sp>
+        <p:sp>
+          <p:nvSpPr>
+            <p:cNvPr id="43" name="rbind:answers">
+              <a:extLst>
+                <a:ext uri="{FF2B5EF4-FFF2-40B4-BE49-F238E27FC236}">
+                  <a16:creationId xmlns:a16="http://schemas.microsoft.com/office/drawing/2014/main" id="{488414FC-70B4-E220-0080-109E88BEB63A}"/>
+                </a:ext>
+              </a:extLst>
+            </p:cNvPr>
+            <p:cNvSpPr txBox="1"/>
+            <p:nvPr/>
+          </p:nvSpPr>
+          <p:spPr>
+            <a:xfrm>
+              <a:off x="1152111" y="2829301"/>
+              <a:ext cx="990975" cy="246221"/>
+            </a:xfrm>
+            <a:prstGeom prst="rect">
+              <a:avLst/>
+            </a:prstGeom>
+            <a:noFill/>
+          </p:spPr>
+          <p:txBody>
+            <a:bodyPr wrap="square" rtlCol="0">
+              <a:spAutoFit/>
+            </a:bodyPr>
+            <a:lstStyle/>
+            <a:p>
+              <a:r>
+                <a:rPr lang="en-US" sz="1000" b="1" noProof="0" dirty="0"/>
+                <a:t>English later</a:t>
+              </a:r>
+            </a:p>
+          </p:txBody>
+        </p:sp>
+        <p:sp>
+          <p:nvSpPr>
+            <p:cNvPr id="44" name="rbind:answers">
+              <a:extLst>
+                <a:ext uri="{FF2B5EF4-FFF2-40B4-BE49-F238E27FC236}">
+                  <a16:creationId xmlns:a16="http://schemas.microsoft.com/office/drawing/2014/main" id="{4ECB4E3F-C8B5-F685-69FF-7B9840480732}"/>
+                </a:ext>
+              </a:extLst>
+            </p:cNvPr>
+            <p:cNvSpPr txBox="1"/>
+            <p:nvPr/>
+          </p:nvSpPr>
+          <p:spPr>
+            <a:xfrm>
+              <a:off x="1152111" y="3176482"/>
+              <a:ext cx="990975" cy="400110"/>
+            </a:xfrm>
+            <a:prstGeom prst="rect">
+              <a:avLst/>
+            </a:prstGeom>
+            <a:noFill/>
+          </p:spPr>
+          <p:txBody>
+            <a:bodyPr wrap="square" rtlCol="0">
+              <a:spAutoFit/>
+            </a:bodyPr>
+            <a:lstStyle/>
+            <a:p>
+              <a:r>
+                <a:rPr lang="en-US" sz="1000" b="1" noProof="0" dirty="0"/>
+                <a:t>France next summer</a:t>
+              </a:r>
+            </a:p>
+          </p:txBody>
+        </p:sp>
+      </p:grpSp>
+      <p:grpSp>
+        <p:nvGrpSpPr>
+          <p:cNvPr id="46" name="repeat:characters">
+            <a:extLst>
+              <a:ext uri="{FF2B5EF4-FFF2-40B4-BE49-F238E27FC236}">
+                <a16:creationId xmlns:a16="http://schemas.microsoft.com/office/drawing/2014/main" id="{8426F11D-6A22-AD4E-F7FA-A7E6F6508F87}"/>
+              </a:ext>
+            </a:extLst>
+          </p:cNvPr>
+          <p:cNvGrpSpPr/>
+          <p:nvPr/>
+        </p:nvGrpSpPr>
+        <p:grpSpPr>
+          <a:xfrm>
+            <a:off x="2377221" y="2315943"/>
+            <a:ext cx="2054622" cy="1653650"/>
+            <a:chOff x="161930" y="1944956"/>
+            <a:chExt cx="2054622" cy="1653650"/>
+          </a:xfrm>
+        </p:grpSpPr>
+        <p:sp>
+          <p:nvSpPr>
+            <p:cNvPr id="47" name="Rectangle: Rounded Corners 46">
+              <a:extLst>
+                <a:ext uri="{FF2B5EF4-FFF2-40B4-BE49-F238E27FC236}">
+                  <a16:creationId xmlns:a16="http://schemas.microsoft.com/office/drawing/2014/main" id="{6E6D1CAE-F96A-A9F1-2090-EBBCF6F1CB79}"/>
+                </a:ext>
+              </a:extLst>
+            </p:cNvPr>
+            <p:cNvSpPr/>
+            <p:nvPr/>
+          </p:nvSpPr>
+          <p:spPr>
+            <a:xfrm>
+              <a:off x="161930" y="1944956"/>
+              <a:ext cx="2054622" cy="1653650"/>
+            </a:xfrm>
+            <a:prstGeom prst="roundRect">
+              <a:avLst/>
+            </a:prstGeom>
+            <a:noFill/>
+            <a:ln>
+              <a:solidFill>
+                <a:schemeClr val="tx1"/>
+              </a:solidFill>
+            </a:ln>
+          </p:spPr>
+          <p:style>
+            <a:lnRef idx="2">
+              <a:schemeClr val="accent1">
+                <a:shade val="15000"/>
+              </a:schemeClr>
+            </a:lnRef>
+            <a:fillRef idx="1">
+              <a:schemeClr val="accent1"/>
+            </a:fillRef>
+            <a:effectRef idx="0">
+              <a:schemeClr val="accent1"/>
+            </a:effectRef>
+            <a:fontRef idx="minor">
+              <a:schemeClr val="lt1"/>
+            </a:fontRef>
+          </p:style>
+          <p:txBody>
+            <a:bodyPr rtlCol="0" anchor="ctr"/>
+            <a:lstStyle/>
+            <a:p>
+              <a:pPr algn="ctr"/>
+              <a:endParaRPr lang="en-US" noProof="0" dirty="0"/>
+            </a:p>
+          </p:txBody>
+        </p:sp>
+        <p:pic>
+          <p:nvPicPr>
+            <p:cNvPr id="48" name="Picture 47">
+              <a:extLst>
+                <a:ext uri="{FF2B5EF4-FFF2-40B4-BE49-F238E27FC236}">
+                  <a16:creationId xmlns:a16="http://schemas.microsoft.com/office/drawing/2014/main" id="{3804325E-25F5-C0EA-41E5-CD438211B8CB}"/>
+                </a:ext>
+              </a:extLst>
+            </p:cNvPr>
+            <p:cNvPicPr>
+              <a:picLocks noChangeAspect="1"/>
+            </p:cNvPicPr>
+            <p:nvPr/>
+          </p:nvPicPr>
+          <p:blipFill>
+            <a:blip r:embed="rId9">
+              <a:extLst>
+                <a:ext uri="{28A0092B-C50C-407E-A947-70E740481C1C}">
+                  <a14:useLocalDpi xmlns:a14="http://schemas.microsoft.com/office/drawing/2010/main" val="0"/>
+                </a:ext>
+              </a:extLst>
+            </a:blip>
+            <a:srcRect/>
+            <a:stretch/>
+          </p:blipFill>
+          <p:spPr>
+            <a:xfrm>
+              <a:off x="291465" y="2073961"/>
+              <a:ext cx="630560" cy="697819"/>
+            </a:xfrm>
+            <a:prstGeom prst="rect">
+              <a:avLst/>
+            </a:prstGeom>
+          </p:spPr>
+        </p:pic>
+        <p:sp>
+          <p:nvSpPr>
+            <p:cNvPr id="49" name="TextBox 48">
+              <a:extLst>
+                <a:ext uri="{FF2B5EF4-FFF2-40B4-BE49-F238E27FC236}">
+                  <a16:creationId xmlns:a16="http://schemas.microsoft.com/office/drawing/2014/main" id="{74DFA254-238F-DDF0-438A-3E8479891CD5}"/>
+                </a:ext>
+              </a:extLst>
+            </p:cNvPr>
+            <p:cNvSpPr txBox="1"/>
+            <p:nvPr/>
+          </p:nvSpPr>
+          <p:spPr>
+            <a:xfrm>
+              <a:off x="164245" y="2763786"/>
+              <a:ext cx="914400" cy="430887"/>
+            </a:xfrm>
+            <a:prstGeom prst="rect">
+              <a:avLst/>
+            </a:prstGeom>
+            <a:noFill/>
+          </p:spPr>
+          <p:txBody>
+            <a:bodyPr wrap="square" rtlCol="0">
+              <a:spAutoFit/>
+            </a:bodyPr>
+            <a:lstStyle/>
+            <a:p>
+              <a:pPr algn="ctr"/>
+              <a:r>
+                <a:rPr lang="en-US" sz="2200" b="1" noProof="0" dirty="0">
+                  <a:latin typeface="Lato" panose="020F0502020204030203" pitchFamily="34" charset="0"/>
+                </a:rPr>
+                <a:t>Mark</a:t>
+              </a:r>
+            </a:p>
+          </p:txBody>
+        </p:sp>
+        <p:pic>
+          <p:nvPicPr>
+            <p:cNvPr id="50" name="lookup:icon1">
+              <a:extLst>
+                <a:ext uri="{FF2B5EF4-FFF2-40B4-BE49-F238E27FC236}">
+                  <a16:creationId xmlns:a16="http://schemas.microsoft.com/office/drawing/2014/main" id="{428B4195-3DB5-B003-FDCA-2AE06F62D7A6}"/>
+                </a:ext>
+              </a:extLst>
+            </p:cNvPr>
+            <p:cNvPicPr>
+              <a:picLocks noChangeAspect="1"/>
+            </p:cNvPicPr>
+            <p:nvPr/>
+          </p:nvPicPr>
+          <p:blipFill>
+            <a:blip r:embed="rId4"/>
+            <a:stretch>
+              <a:fillRect/>
+            </a:stretch>
+          </p:blipFill>
+          <p:spPr>
+            <a:xfrm>
+              <a:off x="1001387" y="2057882"/>
+              <a:ext cx="216000" cy="216000"/>
+            </a:xfrm>
+            <a:prstGeom prst="rect">
+              <a:avLst/>
+            </a:prstGeom>
+          </p:spPr>
+        </p:pic>
+        <p:pic>
+          <p:nvPicPr>
+            <p:cNvPr id="51" name="lookup:icon2">
+              <a:extLst>
+                <a:ext uri="{FF2B5EF4-FFF2-40B4-BE49-F238E27FC236}">
+                  <a16:creationId xmlns:a16="http://schemas.microsoft.com/office/drawing/2014/main" id="{70BE19C0-3205-EBB5-143E-D64D01C744EE}"/>
+                </a:ext>
+              </a:extLst>
+            </p:cNvPr>
+            <p:cNvPicPr>
+              <a:picLocks noChangeAspect="1"/>
+            </p:cNvPicPr>
+            <p:nvPr/>
+          </p:nvPicPr>
+          <p:blipFill>
+            <a:blip r:embed="rId5">
+              <a:extLst>
+                <a:ext uri="{28A0092B-C50C-407E-A947-70E740481C1C}">
+                  <a14:useLocalDpi xmlns:a14="http://schemas.microsoft.com/office/drawing/2010/main" val="0"/>
+                </a:ext>
+              </a:extLst>
+            </a:blip>
+            <a:srcRect/>
+            <a:stretch/>
+          </p:blipFill>
+          <p:spPr>
+            <a:xfrm>
+              <a:off x="1001387" y="2455432"/>
+              <a:ext cx="216000" cy="216000"/>
+            </a:xfrm>
+            <a:prstGeom prst="rect">
+              <a:avLst/>
+            </a:prstGeom>
+          </p:spPr>
+        </p:pic>
+        <p:pic>
+          <p:nvPicPr>
+            <p:cNvPr id="52" name="lookup:icon3">
+              <a:extLst>
+                <a:ext uri="{FF2B5EF4-FFF2-40B4-BE49-F238E27FC236}">
+                  <a16:creationId xmlns:a16="http://schemas.microsoft.com/office/drawing/2014/main" id="{8F0E9EDC-2275-77F9-CFCE-D0ADD24863C9}"/>
+                </a:ext>
+              </a:extLst>
+            </p:cNvPr>
+            <p:cNvPicPr>
+              <a:picLocks noChangeAspect="1"/>
+            </p:cNvPicPr>
+            <p:nvPr/>
+          </p:nvPicPr>
+          <p:blipFill>
+            <a:blip r:embed="rId6">
+              <a:extLst>
+                <a:ext uri="{28A0092B-C50C-407E-A947-70E740481C1C}">
+                  <a14:useLocalDpi xmlns:a14="http://schemas.microsoft.com/office/drawing/2010/main" val="0"/>
+                </a:ext>
+              </a:extLst>
+            </a:blip>
+            <a:srcRect/>
+            <a:stretch/>
+          </p:blipFill>
+          <p:spPr>
+            <a:xfrm>
+              <a:off x="1001387" y="2852982"/>
+              <a:ext cx="216000" cy="216000"/>
+            </a:xfrm>
+            <a:prstGeom prst="rect">
+              <a:avLst/>
+            </a:prstGeom>
+          </p:spPr>
+        </p:pic>
+        <p:pic>
+          <p:nvPicPr>
+            <p:cNvPr id="53" name="lookup:icon4">
+              <a:extLst>
+                <a:ext uri="{FF2B5EF4-FFF2-40B4-BE49-F238E27FC236}">
+                  <a16:creationId xmlns:a16="http://schemas.microsoft.com/office/drawing/2014/main" id="{166569CA-E273-D8E2-A2F3-B9A76E78BCE5}"/>
+                </a:ext>
+              </a:extLst>
+            </p:cNvPr>
+            <p:cNvPicPr>
+              <a:picLocks noChangeAspect="1"/>
+            </p:cNvPicPr>
+            <p:nvPr/>
+          </p:nvPicPr>
+          <p:blipFill>
+            <a:blip r:embed="rId7">
+              <a:extLst>
+                <a:ext uri="{28A0092B-C50C-407E-A947-70E740481C1C}">
+                  <a14:useLocalDpi xmlns:a14="http://schemas.microsoft.com/office/drawing/2010/main" val="0"/>
+                </a:ext>
+              </a:extLst>
+            </a:blip>
+            <a:srcRect/>
+            <a:stretch/>
+          </p:blipFill>
+          <p:spPr>
+            <a:xfrm>
+              <a:off x="1014114" y="3250532"/>
+              <a:ext cx="209554" cy="216000"/>
+            </a:xfrm>
+            <a:prstGeom prst="rect">
+              <a:avLst/>
+            </a:prstGeom>
+          </p:spPr>
+        </p:pic>
+        <p:sp>
+          <p:nvSpPr>
+            <p:cNvPr id="54" name="rbind:answers">
+              <a:extLst>
+                <a:ext uri="{FF2B5EF4-FFF2-40B4-BE49-F238E27FC236}">
+                  <a16:creationId xmlns:a16="http://schemas.microsoft.com/office/drawing/2014/main" id="{89F8CB45-D5B0-0CC1-9C6E-8F19F571931D}"/>
+                </a:ext>
+              </a:extLst>
+            </p:cNvPr>
+            <p:cNvSpPr txBox="1"/>
+            <p:nvPr/>
+          </p:nvSpPr>
+          <p:spPr>
+            <a:xfrm>
+              <a:off x="1154055" y="1996883"/>
+              <a:ext cx="990975" cy="400110"/>
+            </a:xfrm>
+            <a:prstGeom prst="rect">
+              <a:avLst/>
+            </a:prstGeom>
+            <a:noFill/>
+          </p:spPr>
+          <p:txBody>
+            <a:bodyPr wrap="square" rtlCol="0">
+              <a:spAutoFit/>
+            </a:bodyPr>
+            <a:lstStyle/>
+            <a:p>
+              <a:r>
+                <a:rPr lang="en-US" sz="1000" b="1" noProof="0" dirty="0"/>
+                <a:t>buy a pencil tomorrow</a:t>
+              </a:r>
+            </a:p>
+          </p:txBody>
+        </p:sp>
+        <p:sp>
+          <p:nvSpPr>
+            <p:cNvPr id="55" name="rbind:answers">
+              <a:extLst>
+                <a:ext uri="{FF2B5EF4-FFF2-40B4-BE49-F238E27FC236}">
+                  <a16:creationId xmlns:a16="http://schemas.microsoft.com/office/drawing/2014/main" id="{E23C0257-54EF-D517-A7FE-616331073782}"/>
+                </a:ext>
+              </a:extLst>
+            </p:cNvPr>
+            <p:cNvSpPr txBox="1"/>
+            <p:nvPr/>
+          </p:nvSpPr>
+          <p:spPr>
+            <a:xfrm>
+              <a:off x="1152111" y="2386808"/>
+              <a:ext cx="990975" cy="400110"/>
+            </a:xfrm>
+            <a:prstGeom prst="rect">
+              <a:avLst/>
+            </a:prstGeom>
+            <a:noFill/>
+          </p:spPr>
+          <p:txBody>
+            <a:bodyPr wrap="square" rtlCol="0">
+              <a:spAutoFit/>
+            </a:bodyPr>
+            <a:lstStyle/>
+            <a:p>
+              <a:r>
+                <a:rPr lang="en-US" sz="1000" b="1" noProof="0" dirty="0"/>
+                <a:t>his friend next week</a:t>
+              </a:r>
+            </a:p>
+          </p:txBody>
+        </p:sp>
+        <p:sp>
+          <p:nvSpPr>
+            <p:cNvPr id="56" name="rbind:answers">
+              <a:extLst>
+                <a:ext uri="{FF2B5EF4-FFF2-40B4-BE49-F238E27FC236}">
+                  <a16:creationId xmlns:a16="http://schemas.microsoft.com/office/drawing/2014/main" id="{52F3541C-0996-74C2-9504-2554B6C7F70B}"/>
+                </a:ext>
+              </a:extLst>
+            </p:cNvPr>
+            <p:cNvSpPr txBox="1"/>
+            <p:nvPr/>
+          </p:nvSpPr>
+          <p:spPr>
+            <a:xfrm>
+              <a:off x="1152111" y="2829301"/>
+              <a:ext cx="990975" cy="246221"/>
+            </a:xfrm>
+            <a:prstGeom prst="rect">
+              <a:avLst/>
+            </a:prstGeom>
+            <a:noFill/>
+          </p:spPr>
+          <p:txBody>
+            <a:bodyPr wrap="square" rtlCol="0">
+              <a:spAutoFit/>
+            </a:bodyPr>
+            <a:lstStyle/>
+            <a:p>
+              <a:r>
+                <a:rPr lang="en-US" sz="1000" b="1" noProof="0" dirty="0"/>
+                <a:t>English later</a:t>
+              </a:r>
+            </a:p>
+          </p:txBody>
+        </p:sp>
+        <p:sp>
+          <p:nvSpPr>
+            <p:cNvPr id="57" name="rbind:answers">
+              <a:extLst>
+                <a:ext uri="{FF2B5EF4-FFF2-40B4-BE49-F238E27FC236}">
+                  <a16:creationId xmlns:a16="http://schemas.microsoft.com/office/drawing/2014/main" id="{24CC2153-A51F-C1C0-42D9-011C4F33BDF7}"/>
+                </a:ext>
+              </a:extLst>
+            </p:cNvPr>
+            <p:cNvSpPr txBox="1"/>
+            <p:nvPr/>
+          </p:nvSpPr>
+          <p:spPr>
+            <a:xfrm>
+              <a:off x="1152111" y="3176482"/>
+              <a:ext cx="990975" cy="400110"/>
+            </a:xfrm>
+            <a:prstGeom prst="rect">
+              <a:avLst/>
+            </a:prstGeom>
+            <a:noFill/>
+          </p:spPr>
+          <p:txBody>
+            <a:bodyPr wrap="square" rtlCol="0">
+              <a:spAutoFit/>
+            </a:bodyPr>
+            <a:lstStyle/>
+            <a:p>
+              <a:r>
+                <a:rPr lang="en-US" sz="1000" b="1" noProof="0" dirty="0"/>
+                <a:t>France next summer</a:t>
+              </a:r>
+            </a:p>
+          </p:txBody>
+        </p:sp>
+      </p:grpSp>
+      <p:grpSp>
+        <p:nvGrpSpPr>
+          <p:cNvPr id="58" name="repeat:characters">
+            <a:extLst>
+              <a:ext uri="{FF2B5EF4-FFF2-40B4-BE49-F238E27FC236}">
+                <a16:creationId xmlns:a16="http://schemas.microsoft.com/office/drawing/2014/main" id="{E6F2DFA2-A5E3-CDE1-8E33-AE0B6DC69648}"/>
+              </a:ext>
+            </a:extLst>
+          </p:cNvPr>
+          <p:cNvGrpSpPr/>
+          <p:nvPr/>
+        </p:nvGrpSpPr>
+        <p:grpSpPr>
+          <a:xfrm>
+            <a:off x="4592512" y="2315943"/>
+            <a:ext cx="2054622" cy="1653650"/>
+            <a:chOff x="161930" y="1944956"/>
+            <a:chExt cx="2054622" cy="1653650"/>
+          </a:xfrm>
+        </p:grpSpPr>
+        <p:sp>
+          <p:nvSpPr>
+            <p:cNvPr id="59" name="Rectangle: Rounded Corners 58">
+              <a:extLst>
+                <a:ext uri="{FF2B5EF4-FFF2-40B4-BE49-F238E27FC236}">
+                  <a16:creationId xmlns:a16="http://schemas.microsoft.com/office/drawing/2014/main" id="{A1DB32EE-A25F-97DC-FBA0-A2BC4CAB7FDF}"/>
+                </a:ext>
+              </a:extLst>
+            </p:cNvPr>
+            <p:cNvSpPr/>
+            <p:nvPr/>
+          </p:nvSpPr>
+          <p:spPr>
+            <a:xfrm>
+              <a:off x="161930" y="1944956"/>
+              <a:ext cx="2054622" cy="1653650"/>
+            </a:xfrm>
+            <a:prstGeom prst="roundRect">
+              <a:avLst/>
+            </a:prstGeom>
+            <a:noFill/>
+            <a:ln>
+              <a:solidFill>
+                <a:schemeClr val="tx1"/>
+              </a:solidFill>
+            </a:ln>
+          </p:spPr>
+          <p:style>
+            <a:lnRef idx="2">
+              <a:schemeClr val="accent1">
+                <a:shade val="15000"/>
+              </a:schemeClr>
+            </a:lnRef>
+            <a:fillRef idx="1">
+              <a:schemeClr val="accent1"/>
+            </a:fillRef>
+            <a:effectRef idx="0">
+              <a:schemeClr val="accent1"/>
+            </a:effectRef>
+            <a:fontRef idx="minor">
+              <a:schemeClr val="lt1"/>
+            </a:fontRef>
+          </p:style>
+          <p:txBody>
+            <a:bodyPr rtlCol="0" anchor="ctr"/>
+            <a:lstStyle/>
+            <a:p>
+              <a:pPr algn="ctr"/>
+              <a:endParaRPr lang="en-US" noProof="0" dirty="0"/>
+            </a:p>
+          </p:txBody>
+        </p:sp>
+        <p:pic>
+          <p:nvPicPr>
+            <p:cNvPr id="60" name="Picture 59">
+              <a:extLst>
+                <a:ext uri="{FF2B5EF4-FFF2-40B4-BE49-F238E27FC236}">
+                  <a16:creationId xmlns:a16="http://schemas.microsoft.com/office/drawing/2014/main" id="{BEED193D-647F-970A-7D24-714B413403F1}"/>
+                </a:ext>
+              </a:extLst>
+            </p:cNvPr>
+            <p:cNvPicPr>
+              <a:picLocks noChangeAspect="1"/>
+            </p:cNvPicPr>
+            <p:nvPr/>
+          </p:nvPicPr>
+          <p:blipFill>
+            <a:blip r:embed="rId10">
+              <a:extLst>
+                <a:ext uri="{28A0092B-C50C-407E-A947-70E740481C1C}">
+                  <a14:useLocalDpi xmlns:a14="http://schemas.microsoft.com/office/drawing/2010/main" val="0"/>
+                </a:ext>
+              </a:extLst>
+            </a:blip>
+            <a:srcRect/>
+            <a:stretch/>
+          </p:blipFill>
+          <p:spPr>
+            <a:xfrm>
+              <a:off x="291465" y="2073961"/>
+              <a:ext cx="630560" cy="697819"/>
+            </a:xfrm>
+            <a:prstGeom prst="rect">
+              <a:avLst/>
+            </a:prstGeom>
+          </p:spPr>
+        </p:pic>
+        <p:sp>
+          <p:nvSpPr>
+            <p:cNvPr id="61" name="TextBox 60">
+              <a:extLst>
+                <a:ext uri="{FF2B5EF4-FFF2-40B4-BE49-F238E27FC236}">
+                  <a16:creationId xmlns:a16="http://schemas.microsoft.com/office/drawing/2014/main" id="{37CA3961-3B76-FE40-75E3-025DD1282D39}"/>
+                </a:ext>
+              </a:extLst>
+            </p:cNvPr>
+            <p:cNvSpPr txBox="1"/>
+            <p:nvPr/>
+          </p:nvSpPr>
+          <p:spPr>
+            <a:xfrm>
+              <a:off x="164245" y="2763786"/>
+              <a:ext cx="914400" cy="430887"/>
+            </a:xfrm>
+            <a:prstGeom prst="rect">
+              <a:avLst/>
+            </a:prstGeom>
+            <a:noFill/>
+          </p:spPr>
+          <p:txBody>
+            <a:bodyPr wrap="square" rtlCol="0">
+              <a:spAutoFit/>
+            </a:bodyPr>
+            <a:lstStyle/>
+            <a:p>
+              <a:pPr algn="ctr"/>
+              <a:r>
+                <a:rPr lang="en-US" sz="2200" b="1" noProof="0" dirty="0">
+                  <a:latin typeface="Lato" panose="020F0502020204030203" pitchFamily="34" charset="0"/>
+                </a:rPr>
+                <a:t>Mark</a:t>
+              </a:r>
+            </a:p>
+          </p:txBody>
+        </p:sp>
+        <p:pic>
+          <p:nvPicPr>
+            <p:cNvPr id="62" name="lookup:icon1">
+              <a:extLst>
+                <a:ext uri="{FF2B5EF4-FFF2-40B4-BE49-F238E27FC236}">
+                  <a16:creationId xmlns:a16="http://schemas.microsoft.com/office/drawing/2014/main" id="{0E210B9E-6449-DFC5-671F-877670A18332}"/>
+                </a:ext>
+              </a:extLst>
+            </p:cNvPr>
+            <p:cNvPicPr>
+              <a:picLocks noChangeAspect="1"/>
+            </p:cNvPicPr>
+            <p:nvPr/>
+          </p:nvPicPr>
+          <p:blipFill>
+            <a:blip r:embed="rId4"/>
+            <a:stretch>
+              <a:fillRect/>
+            </a:stretch>
+          </p:blipFill>
+          <p:spPr>
+            <a:xfrm>
+              <a:off x="1001387" y="2057882"/>
+              <a:ext cx="216000" cy="216000"/>
+            </a:xfrm>
+            <a:prstGeom prst="rect">
+              <a:avLst/>
+            </a:prstGeom>
+          </p:spPr>
+        </p:pic>
+        <p:pic>
+          <p:nvPicPr>
+            <p:cNvPr id="63" name="lookup:icon2">
+              <a:extLst>
+                <a:ext uri="{FF2B5EF4-FFF2-40B4-BE49-F238E27FC236}">
+                  <a16:creationId xmlns:a16="http://schemas.microsoft.com/office/drawing/2014/main" id="{05D6E19B-A6F7-9F83-2272-46AAFFA07DB5}"/>
+                </a:ext>
+              </a:extLst>
+            </p:cNvPr>
+            <p:cNvPicPr>
+              <a:picLocks noChangeAspect="1"/>
+            </p:cNvPicPr>
+            <p:nvPr/>
+          </p:nvPicPr>
+          <p:blipFill>
+            <a:blip r:embed="rId5">
+              <a:extLst>
+                <a:ext uri="{28A0092B-C50C-407E-A947-70E740481C1C}">
+                  <a14:useLocalDpi xmlns:a14="http://schemas.microsoft.com/office/drawing/2010/main" val="0"/>
+                </a:ext>
+              </a:extLst>
+            </a:blip>
+            <a:srcRect/>
+            <a:stretch/>
+          </p:blipFill>
+          <p:spPr>
+            <a:xfrm>
+              <a:off x="1001387" y="2455432"/>
+              <a:ext cx="216000" cy="216000"/>
+            </a:xfrm>
+            <a:prstGeom prst="rect">
+              <a:avLst/>
+            </a:prstGeom>
+          </p:spPr>
+        </p:pic>
+        <p:pic>
+          <p:nvPicPr>
+            <p:cNvPr id="64" name="lookup:icon3">
+              <a:extLst>
+                <a:ext uri="{FF2B5EF4-FFF2-40B4-BE49-F238E27FC236}">
+                  <a16:creationId xmlns:a16="http://schemas.microsoft.com/office/drawing/2014/main" id="{5D8E5F84-1BFB-3A2E-636B-E208FBC27915}"/>
+                </a:ext>
+              </a:extLst>
+            </p:cNvPr>
+            <p:cNvPicPr>
+              <a:picLocks noChangeAspect="1"/>
+            </p:cNvPicPr>
+            <p:nvPr/>
+          </p:nvPicPr>
+          <p:blipFill>
+            <a:blip r:embed="rId6">
+              <a:extLst>
+                <a:ext uri="{28A0092B-C50C-407E-A947-70E740481C1C}">
+                  <a14:useLocalDpi xmlns:a14="http://schemas.microsoft.com/office/drawing/2010/main" val="0"/>
+                </a:ext>
+              </a:extLst>
+            </a:blip>
+            <a:srcRect/>
+            <a:stretch/>
+          </p:blipFill>
+          <p:spPr>
+            <a:xfrm>
+              <a:off x="1001387" y="2852982"/>
+              <a:ext cx="216000" cy="216000"/>
+            </a:xfrm>
+            <a:prstGeom prst="rect">
+              <a:avLst/>
+            </a:prstGeom>
+          </p:spPr>
+        </p:pic>
+        <p:pic>
+          <p:nvPicPr>
+            <p:cNvPr id="65" name="lookup:icon4">
+              <a:extLst>
+                <a:ext uri="{FF2B5EF4-FFF2-40B4-BE49-F238E27FC236}">
+                  <a16:creationId xmlns:a16="http://schemas.microsoft.com/office/drawing/2014/main" id="{D4EF2D7F-19DC-22DA-B3C3-E3F5872ACC78}"/>
+                </a:ext>
+              </a:extLst>
+            </p:cNvPr>
+            <p:cNvPicPr>
+              <a:picLocks noChangeAspect="1"/>
+            </p:cNvPicPr>
+            <p:nvPr/>
+          </p:nvPicPr>
+          <p:blipFill>
+            <a:blip r:embed="rId7">
+              <a:extLst>
+                <a:ext uri="{28A0092B-C50C-407E-A947-70E740481C1C}">
+                  <a14:useLocalDpi xmlns:a14="http://schemas.microsoft.com/office/drawing/2010/main" val="0"/>
+                </a:ext>
+              </a:extLst>
+            </a:blip>
+            <a:srcRect/>
+            <a:stretch/>
+          </p:blipFill>
+          <p:spPr>
+            <a:xfrm>
+              <a:off x="1014114" y="3250532"/>
+              <a:ext cx="209554" cy="216000"/>
+            </a:xfrm>
+            <a:prstGeom prst="rect">
+              <a:avLst/>
+            </a:prstGeom>
+          </p:spPr>
+        </p:pic>
+        <p:sp>
+          <p:nvSpPr>
+            <p:cNvPr id="66" name="rbind:answers">
+              <a:extLst>
+                <a:ext uri="{FF2B5EF4-FFF2-40B4-BE49-F238E27FC236}">
+                  <a16:creationId xmlns:a16="http://schemas.microsoft.com/office/drawing/2014/main" id="{01D0B9A0-049F-8867-7011-C56A6C975C2F}"/>
+                </a:ext>
+              </a:extLst>
+            </p:cNvPr>
+            <p:cNvSpPr txBox="1"/>
+            <p:nvPr/>
+          </p:nvSpPr>
+          <p:spPr>
+            <a:xfrm>
+              <a:off x="1154055" y="1996883"/>
+              <a:ext cx="990975" cy="400110"/>
+            </a:xfrm>
+            <a:prstGeom prst="rect">
+              <a:avLst/>
+            </a:prstGeom>
+            <a:noFill/>
+          </p:spPr>
+          <p:txBody>
+            <a:bodyPr wrap="square" rtlCol="0">
+              <a:spAutoFit/>
+            </a:bodyPr>
+            <a:lstStyle/>
+            <a:p>
+              <a:r>
+                <a:rPr lang="en-US" sz="1000" b="1" noProof="0" dirty="0"/>
+                <a:t>buy a pencil tomorrow</a:t>
+              </a:r>
+            </a:p>
+          </p:txBody>
+        </p:sp>
+        <p:sp>
+          <p:nvSpPr>
+            <p:cNvPr id="67" name="rbind:answers">
+              <a:extLst>
+                <a:ext uri="{FF2B5EF4-FFF2-40B4-BE49-F238E27FC236}">
+                  <a16:creationId xmlns:a16="http://schemas.microsoft.com/office/drawing/2014/main" id="{1C366294-8521-17E3-B517-0C8081380AF1}"/>
+                </a:ext>
+              </a:extLst>
+            </p:cNvPr>
+            <p:cNvSpPr txBox="1"/>
+            <p:nvPr/>
+          </p:nvSpPr>
+          <p:spPr>
+            <a:xfrm>
+              <a:off x="1152111" y="2386808"/>
+              <a:ext cx="990975" cy="400110"/>
+            </a:xfrm>
+            <a:prstGeom prst="rect">
+              <a:avLst/>
+            </a:prstGeom>
+            <a:noFill/>
+          </p:spPr>
+          <p:txBody>
+            <a:bodyPr wrap="square" rtlCol="0">
+              <a:spAutoFit/>
+            </a:bodyPr>
+            <a:lstStyle/>
+            <a:p>
+              <a:r>
+                <a:rPr lang="en-US" sz="1000" b="1" noProof="0" dirty="0"/>
+                <a:t>his friend next week</a:t>
+              </a:r>
+            </a:p>
+          </p:txBody>
+        </p:sp>
+        <p:sp>
+          <p:nvSpPr>
+            <p:cNvPr id="68" name="rbind:answers">
+              <a:extLst>
+                <a:ext uri="{FF2B5EF4-FFF2-40B4-BE49-F238E27FC236}">
+                  <a16:creationId xmlns:a16="http://schemas.microsoft.com/office/drawing/2014/main" id="{D99C7733-BD0A-AC42-3012-A6F34744D1C5}"/>
+                </a:ext>
+              </a:extLst>
+            </p:cNvPr>
+            <p:cNvSpPr txBox="1"/>
+            <p:nvPr/>
+          </p:nvSpPr>
+          <p:spPr>
+            <a:xfrm>
+              <a:off x="1152111" y="2829301"/>
+              <a:ext cx="990975" cy="246221"/>
+            </a:xfrm>
+            <a:prstGeom prst="rect">
+              <a:avLst/>
+            </a:prstGeom>
+            <a:noFill/>
+          </p:spPr>
+          <p:txBody>
+            <a:bodyPr wrap="square" rtlCol="0">
+              <a:spAutoFit/>
+            </a:bodyPr>
+            <a:lstStyle/>
+            <a:p>
+              <a:r>
+                <a:rPr lang="en-US" sz="1000" b="1" noProof="0" dirty="0"/>
+                <a:t>English later</a:t>
+              </a:r>
+            </a:p>
+          </p:txBody>
+        </p:sp>
+        <p:sp>
+          <p:nvSpPr>
+            <p:cNvPr id="69" name="rbind:answers">
+              <a:extLst>
+                <a:ext uri="{FF2B5EF4-FFF2-40B4-BE49-F238E27FC236}">
+                  <a16:creationId xmlns:a16="http://schemas.microsoft.com/office/drawing/2014/main" id="{5C6C769D-72AF-FF35-75D2-FCBD0C6B03D5}"/>
+                </a:ext>
+              </a:extLst>
+            </p:cNvPr>
+            <p:cNvSpPr txBox="1"/>
+            <p:nvPr/>
+          </p:nvSpPr>
+          <p:spPr>
+            <a:xfrm>
+              <a:off x="1152111" y="3176482"/>
+              <a:ext cx="990975" cy="400110"/>
+            </a:xfrm>
+            <a:prstGeom prst="rect">
+              <a:avLst/>
+            </a:prstGeom>
+            <a:noFill/>
+          </p:spPr>
+          <p:txBody>
+            <a:bodyPr wrap="square" rtlCol="0">
+              <a:spAutoFit/>
+            </a:bodyPr>
+            <a:lstStyle/>
+            <a:p>
+              <a:r>
+                <a:rPr lang="en-US" sz="1000" b="1" noProof="0" dirty="0"/>
+                <a:t>France next summer</a:t>
+              </a:r>
+            </a:p>
+          </p:txBody>
+        </p:sp>
+      </p:grpSp>
+      <p:grpSp>
+        <p:nvGrpSpPr>
+          <p:cNvPr id="214" name="repeat:characters">
+            <a:extLst>
+              <a:ext uri="{FF2B5EF4-FFF2-40B4-BE49-F238E27FC236}">
+                <a16:creationId xmlns:a16="http://schemas.microsoft.com/office/drawing/2014/main" id="{7119D4C0-FBC4-2527-9F16-42E19A04358E}"/>
+              </a:ext>
+            </a:extLst>
+          </p:cNvPr>
+          <p:cNvGrpSpPr/>
+          <p:nvPr/>
+        </p:nvGrpSpPr>
+        <p:grpSpPr>
+          <a:xfrm>
+            <a:off x="161930" y="4535565"/>
+            <a:ext cx="2054622" cy="1653650"/>
+            <a:chOff x="161930" y="1944956"/>
+            <a:chExt cx="2054622" cy="1653650"/>
+          </a:xfrm>
+        </p:grpSpPr>
+        <p:sp>
+          <p:nvSpPr>
+            <p:cNvPr id="215" name="Rectangle: Rounded Corners 214">
+              <a:extLst>
+                <a:ext uri="{FF2B5EF4-FFF2-40B4-BE49-F238E27FC236}">
+                  <a16:creationId xmlns:a16="http://schemas.microsoft.com/office/drawing/2014/main" id="{FD01BC2C-A543-B76E-238B-3DE36016F295}"/>
+                </a:ext>
+              </a:extLst>
+            </p:cNvPr>
+            <p:cNvSpPr/>
+            <p:nvPr/>
+          </p:nvSpPr>
+          <p:spPr>
+            <a:xfrm>
+              <a:off x="161930" y="1944956"/>
+              <a:ext cx="2054622" cy="1653650"/>
+            </a:xfrm>
+            <a:prstGeom prst="roundRect">
+              <a:avLst/>
+            </a:prstGeom>
+            <a:noFill/>
+            <a:ln>
+              <a:solidFill>
+                <a:schemeClr val="tx1"/>
+              </a:solidFill>
+            </a:ln>
+          </p:spPr>
+          <p:style>
+            <a:lnRef idx="2">
+              <a:schemeClr val="accent1">
+                <a:shade val="15000"/>
+              </a:schemeClr>
+            </a:lnRef>
+            <a:fillRef idx="1">
+              <a:schemeClr val="accent1"/>
+            </a:fillRef>
+            <a:effectRef idx="0">
+              <a:schemeClr val="accent1"/>
+            </a:effectRef>
+            <a:fontRef idx="minor">
+              <a:schemeClr val="lt1"/>
+            </a:fontRef>
+          </p:style>
+          <p:txBody>
+            <a:bodyPr rtlCol="0" anchor="ctr"/>
+            <a:lstStyle/>
+            <a:p>
+              <a:pPr algn="ctr"/>
+              <a:endParaRPr lang="en-US" noProof="0" dirty="0"/>
+            </a:p>
+          </p:txBody>
+        </p:sp>
+        <p:pic>
+          <p:nvPicPr>
+            <p:cNvPr id="216" name="Picture 215">
+              <a:extLst>
+                <a:ext uri="{FF2B5EF4-FFF2-40B4-BE49-F238E27FC236}">
+                  <a16:creationId xmlns:a16="http://schemas.microsoft.com/office/drawing/2014/main" id="{72BD2B61-9D62-2B4A-F934-DF72E568EA23}"/>
+                </a:ext>
+              </a:extLst>
+            </p:cNvPr>
+            <p:cNvPicPr>
+              <a:picLocks noChangeAspect="1"/>
+            </p:cNvPicPr>
+            <p:nvPr/>
+          </p:nvPicPr>
+          <p:blipFill>
+            <a:blip r:embed="rId11">
+              <a:extLst>
+                <a:ext uri="{28A0092B-C50C-407E-A947-70E740481C1C}">
+                  <a14:useLocalDpi xmlns:a14="http://schemas.microsoft.com/office/drawing/2010/main" val="0"/>
+                </a:ext>
+              </a:extLst>
+            </a:blip>
+            <a:srcRect/>
+            <a:stretch/>
+          </p:blipFill>
+          <p:spPr>
+            <a:xfrm>
+              <a:off x="291465" y="2073961"/>
+              <a:ext cx="630560" cy="697819"/>
+            </a:xfrm>
+            <a:prstGeom prst="rect">
+              <a:avLst/>
+            </a:prstGeom>
+          </p:spPr>
+        </p:pic>
+        <p:sp>
+          <p:nvSpPr>
+            <p:cNvPr id="217" name="TextBox 216">
+              <a:extLst>
+                <a:ext uri="{FF2B5EF4-FFF2-40B4-BE49-F238E27FC236}">
+                  <a16:creationId xmlns:a16="http://schemas.microsoft.com/office/drawing/2014/main" id="{2F881AAD-4DA5-ED69-8DA2-5DE9385E122A}"/>
+                </a:ext>
+              </a:extLst>
+            </p:cNvPr>
+            <p:cNvSpPr txBox="1"/>
+            <p:nvPr/>
+          </p:nvSpPr>
+          <p:spPr>
+            <a:xfrm>
+              <a:off x="164245" y="2763786"/>
+              <a:ext cx="914400" cy="430887"/>
+            </a:xfrm>
+            <a:prstGeom prst="rect">
+              <a:avLst/>
+            </a:prstGeom>
+            <a:noFill/>
+          </p:spPr>
+          <p:txBody>
+            <a:bodyPr wrap="square" rtlCol="0">
+              <a:spAutoFit/>
+            </a:bodyPr>
+            <a:lstStyle/>
+            <a:p>
+              <a:pPr algn="ctr"/>
+              <a:r>
+                <a:rPr lang="en-US" sz="2200" b="1" noProof="0" dirty="0">
+                  <a:latin typeface="Lato" panose="020F0502020204030203" pitchFamily="34" charset="0"/>
+                </a:rPr>
+                <a:t>Mark</a:t>
+              </a:r>
+            </a:p>
+          </p:txBody>
+        </p:sp>
+        <p:pic>
+          <p:nvPicPr>
+            <p:cNvPr id="218" name="lookup:icon1">
+              <a:extLst>
+                <a:ext uri="{FF2B5EF4-FFF2-40B4-BE49-F238E27FC236}">
+                  <a16:creationId xmlns:a16="http://schemas.microsoft.com/office/drawing/2014/main" id="{B2525F8D-8EE8-7EF6-DC61-08708DB46062}"/>
+                </a:ext>
+              </a:extLst>
+            </p:cNvPr>
+            <p:cNvPicPr>
+              <a:picLocks noChangeAspect="1"/>
+            </p:cNvPicPr>
+            <p:nvPr/>
+          </p:nvPicPr>
+          <p:blipFill>
+            <a:blip r:embed="rId4"/>
+            <a:stretch>
+              <a:fillRect/>
+            </a:stretch>
+          </p:blipFill>
+          <p:spPr>
+            <a:xfrm>
+              <a:off x="1001387" y="2057882"/>
+              <a:ext cx="216000" cy="216000"/>
+            </a:xfrm>
+            <a:prstGeom prst="rect">
+              <a:avLst/>
+            </a:prstGeom>
+          </p:spPr>
+        </p:pic>
+        <p:pic>
+          <p:nvPicPr>
+            <p:cNvPr id="219" name="lookup:icon2">
+              <a:extLst>
+                <a:ext uri="{FF2B5EF4-FFF2-40B4-BE49-F238E27FC236}">
+                  <a16:creationId xmlns:a16="http://schemas.microsoft.com/office/drawing/2014/main" id="{008FFB2B-1EA0-6DAE-CAD6-D9BEEBAFCAAB}"/>
+                </a:ext>
+              </a:extLst>
+            </p:cNvPr>
+            <p:cNvPicPr>
+              <a:picLocks noChangeAspect="1"/>
+            </p:cNvPicPr>
+            <p:nvPr/>
+          </p:nvPicPr>
+          <p:blipFill>
+            <a:blip r:embed="rId5">
+              <a:extLst>
+                <a:ext uri="{28A0092B-C50C-407E-A947-70E740481C1C}">
+                  <a14:useLocalDpi xmlns:a14="http://schemas.microsoft.com/office/drawing/2010/main" val="0"/>
+                </a:ext>
+              </a:extLst>
+            </a:blip>
+            <a:srcRect/>
+            <a:stretch/>
+          </p:blipFill>
+          <p:spPr>
+            <a:xfrm>
+              <a:off x="1001387" y="2455432"/>
+              <a:ext cx="216000" cy="216000"/>
+            </a:xfrm>
+            <a:prstGeom prst="rect">
+              <a:avLst/>
+            </a:prstGeom>
+          </p:spPr>
+        </p:pic>
+        <p:pic>
+          <p:nvPicPr>
+            <p:cNvPr id="220" name="lookup:icon3">
+              <a:extLst>
+                <a:ext uri="{FF2B5EF4-FFF2-40B4-BE49-F238E27FC236}">
+                  <a16:creationId xmlns:a16="http://schemas.microsoft.com/office/drawing/2014/main" id="{09EAC018-7236-7E27-648E-F2EEE09527A4}"/>
+                </a:ext>
+              </a:extLst>
+            </p:cNvPr>
+            <p:cNvPicPr>
+              <a:picLocks noChangeAspect="1"/>
+            </p:cNvPicPr>
+            <p:nvPr/>
+          </p:nvPicPr>
+          <p:blipFill>
+            <a:blip r:embed="rId6">
+              <a:extLst>
+                <a:ext uri="{28A0092B-C50C-407E-A947-70E740481C1C}">
+                  <a14:useLocalDpi xmlns:a14="http://schemas.microsoft.com/office/drawing/2010/main" val="0"/>
+                </a:ext>
+              </a:extLst>
+            </a:blip>
+            <a:srcRect/>
+            <a:stretch/>
+          </p:blipFill>
+          <p:spPr>
+            <a:xfrm>
+              <a:off x="1001387" y="2852982"/>
+              <a:ext cx="216000" cy="216000"/>
+            </a:xfrm>
+            <a:prstGeom prst="rect">
+              <a:avLst/>
+            </a:prstGeom>
+          </p:spPr>
+        </p:pic>
+        <p:pic>
+          <p:nvPicPr>
+            <p:cNvPr id="221" name="lookup:icon4">
+              <a:extLst>
+                <a:ext uri="{FF2B5EF4-FFF2-40B4-BE49-F238E27FC236}">
+                  <a16:creationId xmlns:a16="http://schemas.microsoft.com/office/drawing/2014/main" id="{6030D41B-DB6E-FACB-08BE-379659753824}"/>
+                </a:ext>
+              </a:extLst>
+            </p:cNvPr>
+            <p:cNvPicPr>
+              <a:picLocks noChangeAspect="1"/>
+            </p:cNvPicPr>
+            <p:nvPr/>
+          </p:nvPicPr>
+          <p:blipFill>
+            <a:blip r:embed="rId7">
+              <a:extLst>
+                <a:ext uri="{28A0092B-C50C-407E-A947-70E740481C1C}">
+                  <a14:useLocalDpi xmlns:a14="http://schemas.microsoft.com/office/drawing/2010/main" val="0"/>
+                </a:ext>
+              </a:extLst>
+            </a:blip>
+            <a:srcRect/>
+            <a:stretch/>
+          </p:blipFill>
+          <p:spPr>
+            <a:xfrm>
+              <a:off x="1014114" y="3250532"/>
+              <a:ext cx="209554" cy="216000"/>
+            </a:xfrm>
+            <a:prstGeom prst="rect">
+              <a:avLst/>
+            </a:prstGeom>
+          </p:spPr>
+        </p:pic>
+        <p:sp>
+          <p:nvSpPr>
+            <p:cNvPr id="222" name="rbind:answers">
+              <a:extLst>
+                <a:ext uri="{FF2B5EF4-FFF2-40B4-BE49-F238E27FC236}">
+                  <a16:creationId xmlns:a16="http://schemas.microsoft.com/office/drawing/2014/main" id="{94DF0F09-D1C4-7BDF-7852-EA8D75389148}"/>
+                </a:ext>
+              </a:extLst>
+            </p:cNvPr>
+            <p:cNvSpPr txBox="1"/>
+            <p:nvPr/>
+          </p:nvSpPr>
+          <p:spPr>
+            <a:xfrm>
+              <a:off x="1154055" y="1996883"/>
+              <a:ext cx="990975" cy="400110"/>
+            </a:xfrm>
+            <a:prstGeom prst="rect">
+              <a:avLst/>
+            </a:prstGeom>
+            <a:noFill/>
+          </p:spPr>
+          <p:txBody>
+            <a:bodyPr wrap="square" rtlCol="0">
+              <a:spAutoFit/>
+            </a:bodyPr>
+            <a:lstStyle/>
+            <a:p>
+              <a:r>
+                <a:rPr lang="en-US" sz="1000" b="1" noProof="0" dirty="0"/>
+                <a:t>buy a pencil tomorrow</a:t>
+              </a:r>
+            </a:p>
+          </p:txBody>
+        </p:sp>
+        <p:sp>
+          <p:nvSpPr>
+            <p:cNvPr id="223" name="rbind:answers">
+              <a:extLst>
+                <a:ext uri="{FF2B5EF4-FFF2-40B4-BE49-F238E27FC236}">
+                  <a16:creationId xmlns:a16="http://schemas.microsoft.com/office/drawing/2014/main" id="{7258C539-44C0-0D69-B080-0B959F809926}"/>
+                </a:ext>
+              </a:extLst>
+            </p:cNvPr>
+            <p:cNvSpPr txBox="1"/>
+            <p:nvPr/>
+          </p:nvSpPr>
+          <p:spPr>
+            <a:xfrm>
+              <a:off x="1152111" y="2386808"/>
+              <a:ext cx="990975" cy="400110"/>
+            </a:xfrm>
+            <a:prstGeom prst="rect">
+              <a:avLst/>
+            </a:prstGeom>
+            <a:noFill/>
+          </p:spPr>
+          <p:txBody>
+            <a:bodyPr wrap="square" rtlCol="0">
+              <a:spAutoFit/>
+            </a:bodyPr>
+            <a:lstStyle/>
+            <a:p>
+              <a:r>
+                <a:rPr lang="en-US" sz="1000" b="1" noProof="0" dirty="0"/>
+                <a:t>his friend next week</a:t>
+              </a:r>
+            </a:p>
+          </p:txBody>
+        </p:sp>
+        <p:sp>
+          <p:nvSpPr>
+            <p:cNvPr id="224" name="rbind:answers">
+              <a:extLst>
+                <a:ext uri="{FF2B5EF4-FFF2-40B4-BE49-F238E27FC236}">
+                  <a16:creationId xmlns:a16="http://schemas.microsoft.com/office/drawing/2014/main" id="{4ED53708-938E-D172-5103-C702A8698487}"/>
+                </a:ext>
+              </a:extLst>
+            </p:cNvPr>
+            <p:cNvSpPr txBox="1"/>
+            <p:nvPr/>
+          </p:nvSpPr>
+          <p:spPr>
+            <a:xfrm>
+              <a:off x="1152111" y="2829301"/>
+              <a:ext cx="990975" cy="246221"/>
+            </a:xfrm>
+            <a:prstGeom prst="rect">
+              <a:avLst/>
+            </a:prstGeom>
+            <a:noFill/>
+          </p:spPr>
+          <p:txBody>
+            <a:bodyPr wrap="square" rtlCol="0">
+              <a:spAutoFit/>
+            </a:bodyPr>
+            <a:lstStyle/>
+            <a:p>
+              <a:r>
+                <a:rPr lang="en-US" sz="1000" b="1" noProof="0" dirty="0"/>
+                <a:t>English later</a:t>
+              </a:r>
+            </a:p>
+          </p:txBody>
+        </p:sp>
+        <p:sp>
+          <p:nvSpPr>
+            <p:cNvPr id="225" name="rbind:answers">
+              <a:extLst>
+                <a:ext uri="{FF2B5EF4-FFF2-40B4-BE49-F238E27FC236}">
+                  <a16:creationId xmlns:a16="http://schemas.microsoft.com/office/drawing/2014/main" id="{E71B86B8-607D-BCA7-0F50-48093FF39005}"/>
+                </a:ext>
+              </a:extLst>
+            </p:cNvPr>
+            <p:cNvSpPr txBox="1"/>
+            <p:nvPr/>
+          </p:nvSpPr>
+          <p:spPr>
+            <a:xfrm>
+              <a:off x="1152111" y="3176482"/>
+              <a:ext cx="990975" cy="400110"/>
+            </a:xfrm>
+            <a:prstGeom prst="rect">
+              <a:avLst/>
+            </a:prstGeom>
+            <a:noFill/>
+          </p:spPr>
+          <p:txBody>
+            <a:bodyPr wrap="square" rtlCol="0">
+              <a:spAutoFit/>
+            </a:bodyPr>
+            <a:lstStyle/>
+            <a:p>
+              <a:r>
+                <a:rPr lang="en-US" sz="1000" b="1" noProof="0" dirty="0"/>
+                <a:t>France next summer</a:t>
+              </a:r>
+            </a:p>
+          </p:txBody>
+        </p:sp>
+      </p:grpSp>
+      <p:grpSp>
+        <p:nvGrpSpPr>
+          <p:cNvPr id="226" name="repeat:characters">
+            <a:extLst>
+              <a:ext uri="{FF2B5EF4-FFF2-40B4-BE49-F238E27FC236}">
+                <a16:creationId xmlns:a16="http://schemas.microsoft.com/office/drawing/2014/main" id="{B5F06678-41C6-FE76-EE24-8714205A3CA6}"/>
+              </a:ext>
+            </a:extLst>
+          </p:cNvPr>
+          <p:cNvGrpSpPr/>
+          <p:nvPr/>
+        </p:nvGrpSpPr>
+        <p:grpSpPr>
+          <a:xfrm>
+            <a:off x="161930" y="6755187"/>
+            <a:ext cx="2054622" cy="1653650"/>
+            <a:chOff x="161930" y="1944956"/>
+            <a:chExt cx="2054622" cy="1653650"/>
+          </a:xfrm>
+        </p:grpSpPr>
+        <p:sp>
+          <p:nvSpPr>
+            <p:cNvPr id="227" name="Rectangle: Rounded Corners 226">
+              <a:extLst>
+                <a:ext uri="{FF2B5EF4-FFF2-40B4-BE49-F238E27FC236}">
+                  <a16:creationId xmlns:a16="http://schemas.microsoft.com/office/drawing/2014/main" id="{5533E1B5-1F18-1F50-6025-7821DFC04A19}"/>
+                </a:ext>
+              </a:extLst>
+            </p:cNvPr>
+            <p:cNvSpPr/>
+            <p:nvPr/>
+          </p:nvSpPr>
+          <p:spPr>
+            <a:xfrm>
+              <a:off x="161930" y="1944956"/>
+              <a:ext cx="2054622" cy="1653650"/>
+            </a:xfrm>
+            <a:prstGeom prst="roundRect">
+              <a:avLst/>
+            </a:prstGeom>
+            <a:noFill/>
+            <a:ln>
+              <a:solidFill>
+                <a:schemeClr val="tx1"/>
+              </a:solidFill>
+            </a:ln>
+          </p:spPr>
+          <p:style>
+            <a:lnRef idx="2">
+              <a:schemeClr val="accent1">
+                <a:shade val="15000"/>
+              </a:schemeClr>
+            </a:lnRef>
+            <a:fillRef idx="1">
+              <a:schemeClr val="accent1"/>
+            </a:fillRef>
+            <a:effectRef idx="0">
+              <a:schemeClr val="accent1"/>
+            </a:effectRef>
+            <a:fontRef idx="minor">
+              <a:schemeClr val="lt1"/>
+            </a:fontRef>
+          </p:style>
+          <p:txBody>
+            <a:bodyPr rtlCol="0" anchor="ctr"/>
+            <a:lstStyle/>
+            <a:p>
+              <a:pPr algn="ctr"/>
+              <a:endParaRPr lang="en-US" noProof="0" dirty="0"/>
+            </a:p>
+          </p:txBody>
+        </p:sp>
+        <p:pic>
+          <p:nvPicPr>
+            <p:cNvPr id="228" name="Picture 227">
+              <a:extLst>
+                <a:ext uri="{FF2B5EF4-FFF2-40B4-BE49-F238E27FC236}">
+                  <a16:creationId xmlns:a16="http://schemas.microsoft.com/office/drawing/2014/main" id="{7B6B2FFD-99A4-8874-96B3-998D64946596}"/>
+                </a:ext>
+              </a:extLst>
+            </p:cNvPr>
+            <p:cNvPicPr>
+              <a:picLocks noChangeAspect="1"/>
+            </p:cNvPicPr>
+            <p:nvPr/>
+          </p:nvPicPr>
+          <p:blipFill>
+            <a:blip r:embed="rId12">
+              <a:extLst>
+                <a:ext uri="{28A0092B-C50C-407E-A947-70E740481C1C}">
+                  <a14:useLocalDpi xmlns:a14="http://schemas.microsoft.com/office/drawing/2010/main" val="0"/>
+                </a:ext>
+              </a:extLst>
+            </a:blip>
+            <a:srcRect/>
+            <a:stretch/>
+          </p:blipFill>
+          <p:spPr>
+            <a:xfrm>
+              <a:off x="291465" y="2073961"/>
+              <a:ext cx="630560" cy="697819"/>
+            </a:xfrm>
+            <a:prstGeom prst="rect">
+              <a:avLst/>
+            </a:prstGeom>
+          </p:spPr>
+        </p:pic>
+        <p:sp>
+          <p:nvSpPr>
+            <p:cNvPr id="229" name="TextBox 228">
+              <a:extLst>
+                <a:ext uri="{FF2B5EF4-FFF2-40B4-BE49-F238E27FC236}">
+                  <a16:creationId xmlns:a16="http://schemas.microsoft.com/office/drawing/2014/main" id="{09F49336-3D50-BEC1-935D-D99AEEDE472E}"/>
+                </a:ext>
+              </a:extLst>
+            </p:cNvPr>
+            <p:cNvSpPr txBox="1"/>
+            <p:nvPr/>
+          </p:nvSpPr>
+          <p:spPr>
+            <a:xfrm>
+              <a:off x="164245" y="2763786"/>
+              <a:ext cx="914400" cy="430887"/>
+            </a:xfrm>
+            <a:prstGeom prst="rect">
+              <a:avLst/>
+            </a:prstGeom>
+            <a:noFill/>
+          </p:spPr>
+          <p:txBody>
+            <a:bodyPr wrap="square" rtlCol="0">
+              <a:spAutoFit/>
+            </a:bodyPr>
+            <a:lstStyle/>
+            <a:p>
+              <a:pPr algn="ctr"/>
+              <a:r>
+                <a:rPr lang="en-US" sz="2200" b="1" noProof="0" dirty="0">
+                  <a:latin typeface="Lato" panose="020F0502020204030203" pitchFamily="34" charset="0"/>
+                </a:rPr>
+                <a:t>Mark</a:t>
+              </a:r>
+            </a:p>
+          </p:txBody>
+        </p:sp>
+        <p:pic>
+          <p:nvPicPr>
+            <p:cNvPr id="230" name="lookup:icon1">
+              <a:extLst>
+                <a:ext uri="{FF2B5EF4-FFF2-40B4-BE49-F238E27FC236}">
+                  <a16:creationId xmlns:a16="http://schemas.microsoft.com/office/drawing/2014/main" id="{389AC85A-8E3C-7479-3DAC-92F2AC2F85F5}"/>
+                </a:ext>
+              </a:extLst>
+            </p:cNvPr>
+            <p:cNvPicPr>
+              <a:picLocks noChangeAspect="1"/>
+            </p:cNvPicPr>
+            <p:nvPr/>
+          </p:nvPicPr>
+          <p:blipFill>
+            <a:blip r:embed="rId4"/>
+            <a:stretch>
+              <a:fillRect/>
+            </a:stretch>
+          </p:blipFill>
+          <p:spPr>
+            <a:xfrm>
+              <a:off x="1001387" y="2057882"/>
+              <a:ext cx="216000" cy="216000"/>
+            </a:xfrm>
+            <a:prstGeom prst="rect">
+              <a:avLst/>
+            </a:prstGeom>
+          </p:spPr>
+        </p:pic>
+        <p:pic>
+          <p:nvPicPr>
+            <p:cNvPr id="231" name="lookup:icon2">
+              <a:extLst>
+                <a:ext uri="{FF2B5EF4-FFF2-40B4-BE49-F238E27FC236}">
+                  <a16:creationId xmlns:a16="http://schemas.microsoft.com/office/drawing/2014/main" id="{B8B814B2-77F2-B371-5F99-3FC64FEE8EEB}"/>
+                </a:ext>
+              </a:extLst>
+            </p:cNvPr>
+            <p:cNvPicPr>
+              <a:picLocks noChangeAspect="1"/>
+            </p:cNvPicPr>
+            <p:nvPr/>
+          </p:nvPicPr>
+          <p:blipFill>
+            <a:blip r:embed="rId5">
+              <a:extLst>
+                <a:ext uri="{28A0092B-C50C-407E-A947-70E740481C1C}">
+                  <a14:useLocalDpi xmlns:a14="http://schemas.microsoft.com/office/drawing/2010/main" val="0"/>
+                </a:ext>
+              </a:extLst>
+            </a:blip>
+            <a:srcRect/>
+            <a:stretch/>
+          </p:blipFill>
+          <p:spPr>
+            <a:xfrm>
+              <a:off x="1001387" y="2455432"/>
+              <a:ext cx="216000" cy="216000"/>
+            </a:xfrm>
+            <a:prstGeom prst="rect">
+              <a:avLst/>
+            </a:prstGeom>
+          </p:spPr>
+        </p:pic>
+        <p:pic>
+          <p:nvPicPr>
+            <p:cNvPr id="232" name="lookup:icon3">
+              <a:extLst>
+                <a:ext uri="{FF2B5EF4-FFF2-40B4-BE49-F238E27FC236}">
+                  <a16:creationId xmlns:a16="http://schemas.microsoft.com/office/drawing/2014/main" id="{4FD19755-2E96-808A-0F6F-15F51AC097A2}"/>
+                </a:ext>
+              </a:extLst>
+            </p:cNvPr>
+            <p:cNvPicPr>
+              <a:picLocks noChangeAspect="1"/>
+            </p:cNvPicPr>
+            <p:nvPr/>
+          </p:nvPicPr>
+          <p:blipFill>
+            <a:blip r:embed="rId6">
+              <a:extLst>
+                <a:ext uri="{28A0092B-C50C-407E-A947-70E740481C1C}">
+                  <a14:useLocalDpi xmlns:a14="http://schemas.microsoft.com/office/drawing/2010/main" val="0"/>
+                </a:ext>
+              </a:extLst>
+            </a:blip>
+            <a:srcRect/>
+            <a:stretch/>
+          </p:blipFill>
+          <p:spPr>
+            <a:xfrm>
+              <a:off x="1001387" y="2852982"/>
+              <a:ext cx="216000" cy="216000"/>
+            </a:xfrm>
+            <a:prstGeom prst="rect">
+              <a:avLst/>
+            </a:prstGeom>
+          </p:spPr>
+        </p:pic>
+        <p:pic>
+          <p:nvPicPr>
+            <p:cNvPr id="233" name="lookup:icon4">
+              <a:extLst>
+                <a:ext uri="{FF2B5EF4-FFF2-40B4-BE49-F238E27FC236}">
+                  <a16:creationId xmlns:a16="http://schemas.microsoft.com/office/drawing/2014/main" id="{AF25D470-1B6C-B803-8712-8544B751BE7C}"/>
+                </a:ext>
+              </a:extLst>
+            </p:cNvPr>
+            <p:cNvPicPr>
+              <a:picLocks noChangeAspect="1"/>
+            </p:cNvPicPr>
+            <p:nvPr/>
+          </p:nvPicPr>
+          <p:blipFill>
+            <a:blip r:embed="rId7">
+              <a:extLst>
+                <a:ext uri="{28A0092B-C50C-407E-A947-70E740481C1C}">
+                  <a14:useLocalDpi xmlns:a14="http://schemas.microsoft.com/office/drawing/2010/main" val="0"/>
+                </a:ext>
+              </a:extLst>
+            </a:blip>
+            <a:srcRect/>
+            <a:stretch/>
+          </p:blipFill>
+          <p:spPr>
+            <a:xfrm>
+              <a:off x="1014114" y="3250532"/>
+              <a:ext cx="209554" cy="216000"/>
+            </a:xfrm>
+            <a:prstGeom prst="rect">
+              <a:avLst/>
+            </a:prstGeom>
+          </p:spPr>
+        </p:pic>
+        <p:sp>
+          <p:nvSpPr>
+            <p:cNvPr id="234" name="rbind:answers">
+              <a:extLst>
+                <a:ext uri="{FF2B5EF4-FFF2-40B4-BE49-F238E27FC236}">
+                  <a16:creationId xmlns:a16="http://schemas.microsoft.com/office/drawing/2014/main" id="{0FBB0A5F-BC70-59EB-96B6-4085A7EF89DB}"/>
+                </a:ext>
+              </a:extLst>
+            </p:cNvPr>
+            <p:cNvSpPr txBox="1"/>
+            <p:nvPr/>
+          </p:nvSpPr>
+          <p:spPr>
+            <a:xfrm>
+              <a:off x="1154055" y="1996883"/>
+              <a:ext cx="990975" cy="400110"/>
+            </a:xfrm>
+            <a:prstGeom prst="rect">
+              <a:avLst/>
+            </a:prstGeom>
+            <a:noFill/>
+          </p:spPr>
+          <p:txBody>
+            <a:bodyPr wrap="square" rtlCol="0">
+              <a:spAutoFit/>
+            </a:bodyPr>
+            <a:lstStyle/>
+            <a:p>
+              <a:r>
+                <a:rPr lang="en-US" sz="1000" b="1" noProof="0" dirty="0"/>
+                <a:t>buy a pencil tomorrow</a:t>
+              </a:r>
+            </a:p>
+          </p:txBody>
+        </p:sp>
+        <p:sp>
+          <p:nvSpPr>
+            <p:cNvPr id="235" name="rbind:answers">
+              <a:extLst>
+                <a:ext uri="{FF2B5EF4-FFF2-40B4-BE49-F238E27FC236}">
+                  <a16:creationId xmlns:a16="http://schemas.microsoft.com/office/drawing/2014/main" id="{FC1A246F-143C-39E5-D89C-0BD4B735AA9A}"/>
+                </a:ext>
+              </a:extLst>
+            </p:cNvPr>
+            <p:cNvSpPr txBox="1"/>
+            <p:nvPr/>
+          </p:nvSpPr>
+          <p:spPr>
+            <a:xfrm>
+              <a:off x="1152111" y="2386808"/>
+              <a:ext cx="990975" cy="400110"/>
+            </a:xfrm>
+            <a:prstGeom prst="rect">
+              <a:avLst/>
+            </a:prstGeom>
+            <a:noFill/>
+          </p:spPr>
+          <p:txBody>
+            <a:bodyPr wrap="square" rtlCol="0">
+              <a:spAutoFit/>
+            </a:bodyPr>
+            <a:lstStyle/>
+            <a:p>
+              <a:r>
+                <a:rPr lang="en-US" sz="1000" b="1" noProof="0" dirty="0"/>
+                <a:t>his friend next week</a:t>
+              </a:r>
+            </a:p>
+          </p:txBody>
+        </p:sp>
+        <p:sp>
+          <p:nvSpPr>
+            <p:cNvPr id="236" name="rbind:answers">
+              <a:extLst>
+                <a:ext uri="{FF2B5EF4-FFF2-40B4-BE49-F238E27FC236}">
+                  <a16:creationId xmlns:a16="http://schemas.microsoft.com/office/drawing/2014/main" id="{94355E0A-E93F-9F3C-2BB5-3BBD4BA3A02A}"/>
+                </a:ext>
+              </a:extLst>
+            </p:cNvPr>
+            <p:cNvSpPr txBox="1"/>
+            <p:nvPr/>
+          </p:nvSpPr>
+          <p:spPr>
+            <a:xfrm>
+              <a:off x="1152111" y="2829301"/>
+              <a:ext cx="990975" cy="246221"/>
+            </a:xfrm>
+            <a:prstGeom prst="rect">
+              <a:avLst/>
+            </a:prstGeom>
+            <a:noFill/>
+          </p:spPr>
+          <p:txBody>
+            <a:bodyPr wrap="square" rtlCol="0">
+              <a:spAutoFit/>
+            </a:bodyPr>
+            <a:lstStyle/>
+            <a:p>
+              <a:r>
+                <a:rPr lang="en-US" sz="1000" b="1" noProof="0" dirty="0"/>
+                <a:t>English later</a:t>
+              </a:r>
+            </a:p>
+          </p:txBody>
+        </p:sp>
+        <p:sp>
+          <p:nvSpPr>
+            <p:cNvPr id="237" name="rbind:answers">
+              <a:extLst>
+                <a:ext uri="{FF2B5EF4-FFF2-40B4-BE49-F238E27FC236}">
+                  <a16:creationId xmlns:a16="http://schemas.microsoft.com/office/drawing/2014/main" id="{BA651D34-5DDE-CA82-C171-6448D667353F}"/>
+                </a:ext>
+              </a:extLst>
+            </p:cNvPr>
+            <p:cNvSpPr txBox="1"/>
+            <p:nvPr/>
+          </p:nvSpPr>
+          <p:spPr>
+            <a:xfrm>
+              <a:off x="1152111" y="3176482"/>
+              <a:ext cx="990975" cy="400110"/>
+            </a:xfrm>
+            <a:prstGeom prst="rect">
+              <a:avLst/>
+            </a:prstGeom>
+            <a:noFill/>
+          </p:spPr>
+          <p:txBody>
+            <a:bodyPr wrap="square" rtlCol="0">
+              <a:spAutoFit/>
+            </a:bodyPr>
+            <a:lstStyle/>
+            <a:p>
+              <a:r>
+                <a:rPr lang="en-US" sz="1000" b="1" noProof="0" dirty="0"/>
+                <a:t>France next summer</a:t>
+              </a:r>
+            </a:p>
+          </p:txBody>
+        </p:sp>
+      </p:grpSp>
+      <p:grpSp>
+        <p:nvGrpSpPr>
+          <p:cNvPr id="250" name="repeat:characters">
+            <a:extLst>
+              <a:ext uri="{FF2B5EF4-FFF2-40B4-BE49-F238E27FC236}">
+                <a16:creationId xmlns:a16="http://schemas.microsoft.com/office/drawing/2014/main" id="{C767B562-3668-CE58-0D9A-AA29E8963DD6}"/>
+              </a:ext>
+            </a:extLst>
+          </p:cNvPr>
+          <p:cNvGrpSpPr/>
+          <p:nvPr/>
+        </p:nvGrpSpPr>
+        <p:grpSpPr>
+          <a:xfrm>
+            <a:off x="2377221" y="4535565"/>
+            <a:ext cx="2054622" cy="1653650"/>
+            <a:chOff x="161930" y="1944956"/>
+            <a:chExt cx="2054622" cy="1653650"/>
+          </a:xfrm>
+        </p:grpSpPr>
+        <p:sp>
+          <p:nvSpPr>
+            <p:cNvPr id="251" name="Rectangle: Rounded Corners 250">
+              <a:extLst>
+                <a:ext uri="{FF2B5EF4-FFF2-40B4-BE49-F238E27FC236}">
+                  <a16:creationId xmlns:a16="http://schemas.microsoft.com/office/drawing/2014/main" id="{96276ED4-3B53-B7F4-38C7-1CB9F6327165}"/>
+                </a:ext>
+              </a:extLst>
+            </p:cNvPr>
+            <p:cNvSpPr/>
+            <p:nvPr/>
+          </p:nvSpPr>
+          <p:spPr>
+            <a:xfrm>
+              <a:off x="161930" y="1944956"/>
+              <a:ext cx="2054622" cy="1653650"/>
+            </a:xfrm>
+            <a:prstGeom prst="roundRect">
+              <a:avLst/>
+            </a:prstGeom>
+            <a:noFill/>
+            <a:ln>
+              <a:solidFill>
+                <a:schemeClr val="tx1"/>
+              </a:solidFill>
+            </a:ln>
+          </p:spPr>
+          <p:style>
+            <a:lnRef idx="2">
+              <a:schemeClr val="accent1">
+                <a:shade val="15000"/>
+              </a:schemeClr>
+            </a:lnRef>
+            <a:fillRef idx="1">
+              <a:schemeClr val="accent1"/>
+            </a:fillRef>
+            <a:effectRef idx="0">
+              <a:schemeClr val="accent1"/>
+            </a:effectRef>
+            <a:fontRef idx="minor">
+              <a:schemeClr val="lt1"/>
+            </a:fontRef>
+          </p:style>
+          <p:txBody>
+            <a:bodyPr rtlCol="0" anchor="ctr"/>
+            <a:lstStyle/>
+            <a:p>
+              <a:pPr algn="ctr"/>
+              <a:endParaRPr lang="en-US" noProof="0" dirty="0"/>
+            </a:p>
+          </p:txBody>
+        </p:sp>
+        <p:pic>
+          <p:nvPicPr>
+            <p:cNvPr id="252" name="Picture 251">
+              <a:extLst>
+                <a:ext uri="{FF2B5EF4-FFF2-40B4-BE49-F238E27FC236}">
+                  <a16:creationId xmlns:a16="http://schemas.microsoft.com/office/drawing/2014/main" id="{2E0F80DB-A4C8-0792-07FC-FC36768C6A4D}"/>
+                </a:ext>
+              </a:extLst>
+            </p:cNvPr>
+            <p:cNvPicPr>
+              <a:picLocks noChangeAspect="1"/>
+            </p:cNvPicPr>
+            <p:nvPr/>
+          </p:nvPicPr>
+          <p:blipFill>
+            <a:blip r:embed="rId13">
+              <a:extLst>
+                <a:ext uri="{28A0092B-C50C-407E-A947-70E740481C1C}">
+                  <a14:useLocalDpi xmlns:a14="http://schemas.microsoft.com/office/drawing/2010/main" val="0"/>
+                </a:ext>
+              </a:extLst>
+            </a:blip>
+            <a:srcRect/>
+            <a:stretch/>
+          </p:blipFill>
+          <p:spPr>
+            <a:xfrm>
+              <a:off x="291465" y="2073961"/>
+              <a:ext cx="630560" cy="697819"/>
+            </a:xfrm>
+            <a:prstGeom prst="rect">
+              <a:avLst/>
+            </a:prstGeom>
+          </p:spPr>
+        </p:pic>
+        <p:sp>
+          <p:nvSpPr>
+            <p:cNvPr id="253" name="TextBox 252">
+              <a:extLst>
+                <a:ext uri="{FF2B5EF4-FFF2-40B4-BE49-F238E27FC236}">
+                  <a16:creationId xmlns:a16="http://schemas.microsoft.com/office/drawing/2014/main" id="{FF89F47B-C885-DAE4-4B7C-F20885852B36}"/>
+                </a:ext>
+              </a:extLst>
+            </p:cNvPr>
+            <p:cNvSpPr txBox="1"/>
+            <p:nvPr/>
+          </p:nvSpPr>
+          <p:spPr>
+            <a:xfrm>
+              <a:off x="164245" y="2763786"/>
+              <a:ext cx="914400" cy="430887"/>
+            </a:xfrm>
+            <a:prstGeom prst="rect">
+              <a:avLst/>
+            </a:prstGeom>
+            <a:noFill/>
+          </p:spPr>
+          <p:txBody>
+            <a:bodyPr wrap="square" rtlCol="0">
+              <a:spAutoFit/>
+            </a:bodyPr>
+            <a:lstStyle/>
+            <a:p>
+              <a:pPr algn="ctr"/>
+              <a:r>
+                <a:rPr lang="en-US" sz="2200" b="1" noProof="0" dirty="0">
+                  <a:latin typeface="Lato" panose="020F0502020204030203" pitchFamily="34" charset="0"/>
+                </a:rPr>
+                <a:t>Mark</a:t>
+              </a:r>
+            </a:p>
+          </p:txBody>
+        </p:sp>
+        <p:pic>
+          <p:nvPicPr>
+            <p:cNvPr id="254" name="lookup:icon1">
+              <a:extLst>
+                <a:ext uri="{FF2B5EF4-FFF2-40B4-BE49-F238E27FC236}">
+                  <a16:creationId xmlns:a16="http://schemas.microsoft.com/office/drawing/2014/main" id="{BCB983C2-4AEA-5226-4F91-24B15BC7ACFE}"/>
+                </a:ext>
+              </a:extLst>
+            </p:cNvPr>
+            <p:cNvPicPr>
+              <a:picLocks noChangeAspect="1"/>
+            </p:cNvPicPr>
+            <p:nvPr/>
+          </p:nvPicPr>
+          <p:blipFill>
+            <a:blip r:embed="rId4"/>
+            <a:stretch>
+              <a:fillRect/>
+            </a:stretch>
+          </p:blipFill>
+          <p:spPr>
+            <a:xfrm>
+              <a:off x="1001387" y="2057882"/>
+              <a:ext cx="216000" cy="216000"/>
+            </a:xfrm>
+            <a:prstGeom prst="rect">
+              <a:avLst/>
+            </a:prstGeom>
+          </p:spPr>
+        </p:pic>
+        <p:pic>
+          <p:nvPicPr>
+            <p:cNvPr id="255" name="lookup:icon2">
+              <a:extLst>
+                <a:ext uri="{FF2B5EF4-FFF2-40B4-BE49-F238E27FC236}">
+                  <a16:creationId xmlns:a16="http://schemas.microsoft.com/office/drawing/2014/main" id="{03AEC558-3226-E31A-8095-6234F92D028B}"/>
+                </a:ext>
+              </a:extLst>
+            </p:cNvPr>
+            <p:cNvPicPr>
+              <a:picLocks noChangeAspect="1"/>
+            </p:cNvPicPr>
+            <p:nvPr/>
+          </p:nvPicPr>
+          <p:blipFill>
+            <a:blip r:embed="rId5">
+              <a:extLst>
+                <a:ext uri="{28A0092B-C50C-407E-A947-70E740481C1C}">
+                  <a14:useLocalDpi xmlns:a14="http://schemas.microsoft.com/office/drawing/2010/main" val="0"/>
+                </a:ext>
+              </a:extLst>
+            </a:blip>
+            <a:srcRect/>
+            <a:stretch/>
+          </p:blipFill>
+          <p:spPr>
+            <a:xfrm>
+              <a:off x="1001387" y="2455432"/>
+              <a:ext cx="216000" cy="216000"/>
+            </a:xfrm>
+            <a:prstGeom prst="rect">
+              <a:avLst/>
+            </a:prstGeom>
+          </p:spPr>
+        </p:pic>
+        <p:pic>
+          <p:nvPicPr>
+            <p:cNvPr id="256" name="lookup:icon3">
+              <a:extLst>
+                <a:ext uri="{FF2B5EF4-FFF2-40B4-BE49-F238E27FC236}">
+                  <a16:creationId xmlns:a16="http://schemas.microsoft.com/office/drawing/2014/main" id="{0124CDBB-79A7-ECFB-E729-22E483A33C95}"/>
+                </a:ext>
+              </a:extLst>
+            </p:cNvPr>
+            <p:cNvPicPr>
+              <a:picLocks noChangeAspect="1"/>
+            </p:cNvPicPr>
+            <p:nvPr/>
+          </p:nvPicPr>
+          <p:blipFill>
+            <a:blip r:embed="rId6">
+              <a:extLst>
+                <a:ext uri="{28A0092B-C50C-407E-A947-70E740481C1C}">
+                  <a14:useLocalDpi xmlns:a14="http://schemas.microsoft.com/office/drawing/2010/main" val="0"/>
+                </a:ext>
+              </a:extLst>
+            </a:blip>
+            <a:srcRect/>
+            <a:stretch/>
+          </p:blipFill>
+          <p:spPr>
+            <a:xfrm>
+              <a:off x="1001387" y="2852982"/>
+              <a:ext cx="216000" cy="216000"/>
+            </a:xfrm>
+            <a:prstGeom prst="rect">
+              <a:avLst/>
+            </a:prstGeom>
+          </p:spPr>
+        </p:pic>
+        <p:pic>
+          <p:nvPicPr>
+            <p:cNvPr id="257" name="lookup:icon4">
+              <a:extLst>
+                <a:ext uri="{FF2B5EF4-FFF2-40B4-BE49-F238E27FC236}">
+                  <a16:creationId xmlns:a16="http://schemas.microsoft.com/office/drawing/2014/main" id="{3CFF04BA-7372-A245-280B-57883B52F3AD}"/>
+                </a:ext>
+              </a:extLst>
+            </p:cNvPr>
+            <p:cNvPicPr>
+              <a:picLocks noChangeAspect="1"/>
+            </p:cNvPicPr>
+            <p:nvPr/>
+          </p:nvPicPr>
+          <p:blipFill>
+            <a:blip r:embed="rId7">
+              <a:extLst>
+                <a:ext uri="{28A0092B-C50C-407E-A947-70E740481C1C}">
+                  <a14:useLocalDpi xmlns:a14="http://schemas.microsoft.com/office/drawing/2010/main" val="0"/>
+                </a:ext>
+              </a:extLst>
+            </a:blip>
+            <a:srcRect/>
+            <a:stretch/>
+          </p:blipFill>
+          <p:spPr>
+            <a:xfrm>
+              <a:off x="1014114" y="3250532"/>
+              <a:ext cx="209554" cy="216000"/>
+            </a:xfrm>
+            <a:prstGeom prst="rect">
+              <a:avLst/>
+            </a:prstGeom>
+          </p:spPr>
+        </p:pic>
+        <p:sp>
+          <p:nvSpPr>
+            <p:cNvPr id="258" name="rbind:answers">
+              <a:extLst>
+                <a:ext uri="{FF2B5EF4-FFF2-40B4-BE49-F238E27FC236}">
+                  <a16:creationId xmlns:a16="http://schemas.microsoft.com/office/drawing/2014/main" id="{DB7828C2-B778-F0E3-A35D-EA3C1F7061EB}"/>
+                </a:ext>
+              </a:extLst>
+            </p:cNvPr>
+            <p:cNvSpPr txBox="1"/>
+            <p:nvPr/>
+          </p:nvSpPr>
+          <p:spPr>
+            <a:xfrm>
+              <a:off x="1154055" y="1996883"/>
+              <a:ext cx="990975" cy="400110"/>
+            </a:xfrm>
+            <a:prstGeom prst="rect">
+              <a:avLst/>
+            </a:prstGeom>
+            <a:noFill/>
+          </p:spPr>
+          <p:txBody>
+            <a:bodyPr wrap="square" rtlCol="0">
+              <a:spAutoFit/>
+            </a:bodyPr>
+            <a:lstStyle/>
+            <a:p>
+              <a:r>
+                <a:rPr lang="en-US" sz="1000" b="1" noProof="0" dirty="0"/>
+                <a:t>buy a pencil tomorrow</a:t>
+              </a:r>
+            </a:p>
+          </p:txBody>
+        </p:sp>
+        <p:sp>
+          <p:nvSpPr>
+            <p:cNvPr id="259" name="rbind:answers">
+              <a:extLst>
+                <a:ext uri="{FF2B5EF4-FFF2-40B4-BE49-F238E27FC236}">
+                  <a16:creationId xmlns:a16="http://schemas.microsoft.com/office/drawing/2014/main" id="{30767CE3-3CD2-0AD3-A3EC-3C874C0F715B}"/>
+                </a:ext>
+              </a:extLst>
+            </p:cNvPr>
+            <p:cNvSpPr txBox="1"/>
+            <p:nvPr/>
+          </p:nvSpPr>
+          <p:spPr>
+            <a:xfrm>
+              <a:off x="1152111" y="2386808"/>
+              <a:ext cx="990975" cy="400110"/>
+            </a:xfrm>
+            <a:prstGeom prst="rect">
+              <a:avLst/>
+            </a:prstGeom>
+            <a:noFill/>
+          </p:spPr>
+          <p:txBody>
+            <a:bodyPr wrap="square" rtlCol="0">
+              <a:spAutoFit/>
+            </a:bodyPr>
+            <a:lstStyle/>
+            <a:p>
+              <a:r>
+                <a:rPr lang="en-US" sz="1000" b="1" noProof="0" dirty="0"/>
+                <a:t>his friend next week</a:t>
+              </a:r>
+            </a:p>
+          </p:txBody>
+        </p:sp>
+        <p:sp>
+          <p:nvSpPr>
+            <p:cNvPr id="260" name="rbind:answers">
+              <a:extLst>
+                <a:ext uri="{FF2B5EF4-FFF2-40B4-BE49-F238E27FC236}">
+                  <a16:creationId xmlns:a16="http://schemas.microsoft.com/office/drawing/2014/main" id="{AD6A46D4-C56B-28FB-1BE7-1DD59213060A}"/>
+                </a:ext>
+              </a:extLst>
+            </p:cNvPr>
+            <p:cNvSpPr txBox="1"/>
+            <p:nvPr/>
+          </p:nvSpPr>
+          <p:spPr>
+            <a:xfrm>
+              <a:off x="1152111" y="2829301"/>
+              <a:ext cx="990975" cy="246221"/>
+            </a:xfrm>
+            <a:prstGeom prst="rect">
+              <a:avLst/>
+            </a:prstGeom>
+            <a:noFill/>
+          </p:spPr>
+          <p:txBody>
+            <a:bodyPr wrap="square" rtlCol="0">
+              <a:spAutoFit/>
+            </a:bodyPr>
+            <a:lstStyle/>
+            <a:p>
+              <a:r>
+                <a:rPr lang="en-US" sz="1000" b="1" noProof="0" dirty="0"/>
+                <a:t>English later</a:t>
+              </a:r>
+            </a:p>
+          </p:txBody>
+        </p:sp>
+        <p:sp>
+          <p:nvSpPr>
+            <p:cNvPr id="261" name="rbind:answers">
+              <a:extLst>
+                <a:ext uri="{FF2B5EF4-FFF2-40B4-BE49-F238E27FC236}">
+                  <a16:creationId xmlns:a16="http://schemas.microsoft.com/office/drawing/2014/main" id="{156A9E43-7D3B-EC58-1F48-0B65DC45A9E6}"/>
+                </a:ext>
+              </a:extLst>
+            </p:cNvPr>
+            <p:cNvSpPr txBox="1"/>
+            <p:nvPr/>
+          </p:nvSpPr>
+          <p:spPr>
+            <a:xfrm>
+              <a:off x="1152111" y="3176482"/>
+              <a:ext cx="990975" cy="400110"/>
+            </a:xfrm>
+            <a:prstGeom prst="rect">
+              <a:avLst/>
+            </a:prstGeom>
+            <a:noFill/>
+          </p:spPr>
+          <p:txBody>
+            <a:bodyPr wrap="square" rtlCol="0">
+              <a:spAutoFit/>
+            </a:bodyPr>
+            <a:lstStyle/>
+            <a:p>
+              <a:r>
+                <a:rPr lang="en-US" sz="1000" b="1" noProof="0" dirty="0"/>
+                <a:t>France next summer</a:t>
+              </a:r>
+            </a:p>
+          </p:txBody>
+        </p:sp>
+      </p:grpSp>
+      <p:grpSp>
+        <p:nvGrpSpPr>
+          <p:cNvPr id="262" name="repeat:characters">
+            <a:extLst>
+              <a:ext uri="{FF2B5EF4-FFF2-40B4-BE49-F238E27FC236}">
+                <a16:creationId xmlns:a16="http://schemas.microsoft.com/office/drawing/2014/main" id="{2626E698-E830-1D7B-01CB-6DD750BCA151}"/>
+              </a:ext>
+            </a:extLst>
+          </p:cNvPr>
+          <p:cNvGrpSpPr/>
+          <p:nvPr/>
+        </p:nvGrpSpPr>
+        <p:grpSpPr>
+          <a:xfrm>
+            <a:off x="4591796" y="4535565"/>
+            <a:ext cx="2054622" cy="1653650"/>
+            <a:chOff x="161930" y="1944956"/>
+            <a:chExt cx="2054622" cy="1653650"/>
+          </a:xfrm>
+        </p:grpSpPr>
+        <p:sp>
+          <p:nvSpPr>
+            <p:cNvPr id="263" name="Rectangle: Rounded Corners 262">
+              <a:extLst>
+                <a:ext uri="{FF2B5EF4-FFF2-40B4-BE49-F238E27FC236}">
+                  <a16:creationId xmlns:a16="http://schemas.microsoft.com/office/drawing/2014/main" id="{32C1E986-C774-1962-AD1B-A9ADC93B908B}"/>
+                </a:ext>
+              </a:extLst>
+            </p:cNvPr>
+            <p:cNvSpPr/>
+            <p:nvPr/>
+          </p:nvSpPr>
+          <p:spPr>
+            <a:xfrm>
+              <a:off x="161930" y="1944956"/>
+              <a:ext cx="2054622" cy="1653650"/>
+            </a:xfrm>
+            <a:prstGeom prst="roundRect">
+              <a:avLst/>
+            </a:prstGeom>
+            <a:noFill/>
+            <a:ln>
+              <a:solidFill>
+                <a:schemeClr val="tx1"/>
+              </a:solidFill>
+            </a:ln>
+          </p:spPr>
+          <p:style>
+            <a:lnRef idx="2">
+              <a:schemeClr val="accent1">
+                <a:shade val="15000"/>
+              </a:schemeClr>
+            </a:lnRef>
+            <a:fillRef idx="1">
+              <a:schemeClr val="accent1"/>
+            </a:fillRef>
+            <a:effectRef idx="0">
+              <a:schemeClr val="accent1"/>
+            </a:effectRef>
+            <a:fontRef idx="minor">
+              <a:schemeClr val="lt1"/>
+            </a:fontRef>
+          </p:style>
+          <p:txBody>
+            <a:bodyPr rtlCol="0" anchor="ctr"/>
+            <a:lstStyle/>
+            <a:p>
+              <a:pPr algn="ctr"/>
+              <a:endParaRPr lang="en-US" noProof="0" dirty="0"/>
+            </a:p>
+          </p:txBody>
+        </p:sp>
+        <p:pic>
+          <p:nvPicPr>
+            <p:cNvPr id="264" name="Picture 263">
+              <a:extLst>
+                <a:ext uri="{FF2B5EF4-FFF2-40B4-BE49-F238E27FC236}">
+                  <a16:creationId xmlns:a16="http://schemas.microsoft.com/office/drawing/2014/main" id="{9BF3F1F2-8414-6496-8426-0A656DEA7A8B}"/>
+                </a:ext>
+              </a:extLst>
+            </p:cNvPr>
+            <p:cNvPicPr>
+              <a:picLocks noChangeAspect="1"/>
+            </p:cNvPicPr>
+            <p:nvPr/>
+          </p:nvPicPr>
+          <p:blipFill>
+            <a:blip r:embed="rId14">
+              <a:extLst>
+                <a:ext uri="{28A0092B-C50C-407E-A947-70E740481C1C}">
+                  <a14:useLocalDpi xmlns:a14="http://schemas.microsoft.com/office/drawing/2010/main" val="0"/>
+                </a:ext>
+              </a:extLst>
+            </a:blip>
+            <a:srcRect/>
+            <a:stretch/>
+          </p:blipFill>
+          <p:spPr>
+            <a:xfrm>
+              <a:off x="291465" y="2073961"/>
+              <a:ext cx="630560" cy="697819"/>
+            </a:xfrm>
+            <a:prstGeom prst="rect">
+              <a:avLst/>
+            </a:prstGeom>
+          </p:spPr>
+        </p:pic>
+        <p:sp>
+          <p:nvSpPr>
+            <p:cNvPr id="265" name="TextBox 264">
+              <a:extLst>
+                <a:ext uri="{FF2B5EF4-FFF2-40B4-BE49-F238E27FC236}">
+                  <a16:creationId xmlns:a16="http://schemas.microsoft.com/office/drawing/2014/main" id="{B3A52A3B-3B5A-B583-4153-2E5BB5D4A447}"/>
+                </a:ext>
+              </a:extLst>
+            </p:cNvPr>
+            <p:cNvSpPr txBox="1"/>
+            <p:nvPr/>
+          </p:nvSpPr>
+          <p:spPr>
+            <a:xfrm>
+              <a:off x="164245" y="2763786"/>
+              <a:ext cx="914400" cy="430887"/>
+            </a:xfrm>
+            <a:prstGeom prst="rect">
+              <a:avLst/>
+            </a:prstGeom>
+            <a:noFill/>
+          </p:spPr>
+          <p:txBody>
+            <a:bodyPr wrap="square" rtlCol="0">
+              <a:spAutoFit/>
+            </a:bodyPr>
+            <a:lstStyle/>
+            <a:p>
+              <a:pPr algn="ctr"/>
+              <a:r>
+                <a:rPr lang="en-US" sz="2200" b="1" noProof="0" dirty="0">
+                  <a:latin typeface="Lato" panose="020F0502020204030203" pitchFamily="34" charset="0"/>
+                </a:rPr>
+                <a:t>Mark</a:t>
+              </a:r>
+            </a:p>
+          </p:txBody>
+        </p:sp>
+        <p:pic>
+          <p:nvPicPr>
+            <p:cNvPr id="266" name="lookup:icon1">
+              <a:extLst>
+                <a:ext uri="{FF2B5EF4-FFF2-40B4-BE49-F238E27FC236}">
+                  <a16:creationId xmlns:a16="http://schemas.microsoft.com/office/drawing/2014/main" id="{464C969C-44D1-CE05-9233-BB0EFFE8FD8E}"/>
+                </a:ext>
+              </a:extLst>
+            </p:cNvPr>
+            <p:cNvPicPr>
+              <a:picLocks noChangeAspect="1"/>
+            </p:cNvPicPr>
+            <p:nvPr/>
+          </p:nvPicPr>
+          <p:blipFill>
+            <a:blip r:embed="rId4"/>
+            <a:stretch>
+              <a:fillRect/>
+            </a:stretch>
+          </p:blipFill>
+          <p:spPr>
+            <a:xfrm>
+              <a:off x="1001387" y="2057882"/>
+              <a:ext cx="216000" cy="216000"/>
+            </a:xfrm>
+            <a:prstGeom prst="rect">
+              <a:avLst/>
+            </a:prstGeom>
+          </p:spPr>
+        </p:pic>
+        <p:pic>
+          <p:nvPicPr>
+            <p:cNvPr id="267" name="lookup:icon2">
+              <a:extLst>
+                <a:ext uri="{FF2B5EF4-FFF2-40B4-BE49-F238E27FC236}">
+                  <a16:creationId xmlns:a16="http://schemas.microsoft.com/office/drawing/2014/main" id="{B9681CF5-7543-6F6B-EEAF-9854686E3EC3}"/>
+                </a:ext>
+              </a:extLst>
+            </p:cNvPr>
+            <p:cNvPicPr>
+              <a:picLocks noChangeAspect="1"/>
+            </p:cNvPicPr>
+            <p:nvPr/>
+          </p:nvPicPr>
+          <p:blipFill>
+            <a:blip r:embed="rId5">
+              <a:extLst>
+                <a:ext uri="{28A0092B-C50C-407E-A947-70E740481C1C}">
+                  <a14:useLocalDpi xmlns:a14="http://schemas.microsoft.com/office/drawing/2010/main" val="0"/>
+                </a:ext>
+              </a:extLst>
+            </a:blip>
+            <a:srcRect/>
+            <a:stretch/>
+          </p:blipFill>
+          <p:spPr>
+            <a:xfrm>
+              <a:off x="1001387" y="2455432"/>
+              <a:ext cx="216000" cy="216000"/>
+            </a:xfrm>
+            <a:prstGeom prst="rect">
+              <a:avLst/>
+            </a:prstGeom>
+          </p:spPr>
+        </p:pic>
+        <p:pic>
+          <p:nvPicPr>
+            <p:cNvPr id="268" name="lookup:icon3">
+              <a:extLst>
+                <a:ext uri="{FF2B5EF4-FFF2-40B4-BE49-F238E27FC236}">
+                  <a16:creationId xmlns:a16="http://schemas.microsoft.com/office/drawing/2014/main" id="{48A7E730-A7C6-338C-D329-33C8925F2994}"/>
+                </a:ext>
+              </a:extLst>
+            </p:cNvPr>
+            <p:cNvPicPr>
+              <a:picLocks noChangeAspect="1"/>
+            </p:cNvPicPr>
+            <p:nvPr/>
+          </p:nvPicPr>
+          <p:blipFill>
+            <a:blip r:embed="rId6">
+              <a:extLst>
+                <a:ext uri="{28A0092B-C50C-407E-A947-70E740481C1C}">
+                  <a14:useLocalDpi xmlns:a14="http://schemas.microsoft.com/office/drawing/2010/main" val="0"/>
+                </a:ext>
+              </a:extLst>
+            </a:blip>
+            <a:srcRect/>
+            <a:stretch/>
+          </p:blipFill>
+          <p:spPr>
+            <a:xfrm>
+              <a:off x="1001387" y="2852982"/>
+              <a:ext cx="216000" cy="216000"/>
+            </a:xfrm>
+            <a:prstGeom prst="rect">
+              <a:avLst/>
+            </a:prstGeom>
+          </p:spPr>
+        </p:pic>
+        <p:pic>
+          <p:nvPicPr>
+            <p:cNvPr id="269" name="lookup:icon4">
+              <a:extLst>
+                <a:ext uri="{FF2B5EF4-FFF2-40B4-BE49-F238E27FC236}">
+                  <a16:creationId xmlns:a16="http://schemas.microsoft.com/office/drawing/2014/main" id="{417AD8CB-D7F5-8CC4-7B5D-33C92945C401}"/>
+                </a:ext>
+              </a:extLst>
+            </p:cNvPr>
+            <p:cNvPicPr>
+              <a:picLocks noChangeAspect="1"/>
+            </p:cNvPicPr>
+            <p:nvPr/>
+          </p:nvPicPr>
+          <p:blipFill>
+            <a:blip r:embed="rId7">
+              <a:extLst>
+                <a:ext uri="{28A0092B-C50C-407E-A947-70E740481C1C}">
+                  <a14:useLocalDpi xmlns:a14="http://schemas.microsoft.com/office/drawing/2010/main" val="0"/>
+                </a:ext>
+              </a:extLst>
+            </a:blip>
+            <a:srcRect/>
+            <a:stretch/>
+          </p:blipFill>
+          <p:spPr>
+            <a:xfrm>
+              <a:off x="1014114" y="3250532"/>
+              <a:ext cx="209554" cy="216000"/>
+            </a:xfrm>
+            <a:prstGeom prst="rect">
+              <a:avLst/>
+            </a:prstGeom>
+          </p:spPr>
+        </p:pic>
+        <p:sp>
+          <p:nvSpPr>
+            <p:cNvPr id="270" name="rbind:answers">
+              <a:extLst>
+                <a:ext uri="{FF2B5EF4-FFF2-40B4-BE49-F238E27FC236}">
+                  <a16:creationId xmlns:a16="http://schemas.microsoft.com/office/drawing/2014/main" id="{441ADE65-2691-9D38-1C16-CA1722C538C2}"/>
+                </a:ext>
+              </a:extLst>
+            </p:cNvPr>
+            <p:cNvSpPr txBox="1"/>
+            <p:nvPr/>
+          </p:nvSpPr>
+          <p:spPr>
+            <a:xfrm>
+              <a:off x="1154055" y="1996883"/>
+              <a:ext cx="990975" cy="400110"/>
+            </a:xfrm>
+            <a:prstGeom prst="rect">
+              <a:avLst/>
+            </a:prstGeom>
+            <a:noFill/>
+          </p:spPr>
+          <p:txBody>
+            <a:bodyPr wrap="square" rtlCol="0">
+              <a:spAutoFit/>
+            </a:bodyPr>
+            <a:lstStyle/>
+            <a:p>
+              <a:r>
+                <a:rPr lang="en-US" sz="1000" b="1" noProof="0" dirty="0"/>
+                <a:t>buy a pencil tomorrow</a:t>
+              </a:r>
+            </a:p>
+          </p:txBody>
+        </p:sp>
+        <p:sp>
+          <p:nvSpPr>
+            <p:cNvPr id="271" name="rbind:answers">
+              <a:extLst>
+                <a:ext uri="{FF2B5EF4-FFF2-40B4-BE49-F238E27FC236}">
+                  <a16:creationId xmlns:a16="http://schemas.microsoft.com/office/drawing/2014/main" id="{049F6633-E53A-39E6-5C60-50FE854DC2DD}"/>
+                </a:ext>
+              </a:extLst>
+            </p:cNvPr>
+            <p:cNvSpPr txBox="1"/>
+            <p:nvPr/>
+          </p:nvSpPr>
+          <p:spPr>
+            <a:xfrm>
+              <a:off x="1152111" y="2386808"/>
+              <a:ext cx="990975" cy="400110"/>
+            </a:xfrm>
+            <a:prstGeom prst="rect">
+              <a:avLst/>
+            </a:prstGeom>
+            <a:noFill/>
+          </p:spPr>
+          <p:txBody>
+            <a:bodyPr wrap="square" rtlCol="0">
+              <a:spAutoFit/>
+            </a:bodyPr>
+            <a:lstStyle/>
+            <a:p>
+              <a:r>
+                <a:rPr lang="en-US" sz="1000" b="1" noProof="0" dirty="0"/>
+                <a:t>his friend next week</a:t>
+              </a:r>
+            </a:p>
+          </p:txBody>
+        </p:sp>
+        <p:sp>
+          <p:nvSpPr>
+            <p:cNvPr id="272" name="rbind:answers">
+              <a:extLst>
+                <a:ext uri="{FF2B5EF4-FFF2-40B4-BE49-F238E27FC236}">
+                  <a16:creationId xmlns:a16="http://schemas.microsoft.com/office/drawing/2014/main" id="{49878C8A-79C8-784A-A0C8-D565FD5960FE}"/>
+                </a:ext>
+              </a:extLst>
+            </p:cNvPr>
+            <p:cNvSpPr txBox="1"/>
+            <p:nvPr/>
+          </p:nvSpPr>
+          <p:spPr>
+            <a:xfrm>
+              <a:off x="1152111" y="2829301"/>
+              <a:ext cx="990975" cy="246221"/>
+            </a:xfrm>
+            <a:prstGeom prst="rect">
+              <a:avLst/>
+            </a:prstGeom>
+            <a:noFill/>
+          </p:spPr>
+          <p:txBody>
+            <a:bodyPr wrap="square" rtlCol="0">
+              <a:spAutoFit/>
+            </a:bodyPr>
+            <a:lstStyle/>
+            <a:p>
+              <a:r>
+                <a:rPr lang="en-US" sz="1000" b="1" noProof="0" dirty="0"/>
+                <a:t>English later</a:t>
+              </a:r>
+            </a:p>
+          </p:txBody>
+        </p:sp>
+        <p:sp>
+          <p:nvSpPr>
+            <p:cNvPr id="273" name="rbind:answers">
+              <a:extLst>
+                <a:ext uri="{FF2B5EF4-FFF2-40B4-BE49-F238E27FC236}">
+                  <a16:creationId xmlns:a16="http://schemas.microsoft.com/office/drawing/2014/main" id="{238DC3F1-A61E-5618-6D61-3D644712C9D7}"/>
+                </a:ext>
+              </a:extLst>
+            </p:cNvPr>
+            <p:cNvSpPr txBox="1"/>
+            <p:nvPr/>
+          </p:nvSpPr>
+          <p:spPr>
+            <a:xfrm>
+              <a:off x="1152111" y="3176482"/>
+              <a:ext cx="990975" cy="400110"/>
+            </a:xfrm>
+            <a:prstGeom prst="rect">
+              <a:avLst/>
+            </a:prstGeom>
+            <a:noFill/>
+          </p:spPr>
+          <p:txBody>
+            <a:bodyPr wrap="square" rtlCol="0">
+              <a:spAutoFit/>
+            </a:bodyPr>
+            <a:lstStyle/>
+            <a:p>
+              <a:r>
+                <a:rPr lang="en-US" sz="1000" b="1" noProof="0" dirty="0"/>
+                <a:t>France next summer</a:t>
+              </a:r>
+            </a:p>
+          </p:txBody>
+        </p:sp>
+      </p:grpSp>
+      <p:grpSp>
+        <p:nvGrpSpPr>
+          <p:cNvPr id="274" name="repeat:characters">
+            <a:extLst>
+              <a:ext uri="{FF2B5EF4-FFF2-40B4-BE49-F238E27FC236}">
+                <a16:creationId xmlns:a16="http://schemas.microsoft.com/office/drawing/2014/main" id="{F1E2043C-3005-F9E5-4B66-EF993116C4BC}"/>
+              </a:ext>
+            </a:extLst>
+          </p:cNvPr>
+          <p:cNvGrpSpPr/>
+          <p:nvPr/>
+        </p:nvGrpSpPr>
+        <p:grpSpPr>
+          <a:xfrm>
+            <a:off x="2401689" y="6755187"/>
+            <a:ext cx="2054622" cy="1653650"/>
+            <a:chOff x="161930" y="1944956"/>
+            <a:chExt cx="2054622" cy="1653650"/>
+          </a:xfrm>
+        </p:grpSpPr>
+        <p:sp>
+          <p:nvSpPr>
+            <p:cNvPr id="275" name="Rectangle: Rounded Corners 274">
+              <a:extLst>
+                <a:ext uri="{FF2B5EF4-FFF2-40B4-BE49-F238E27FC236}">
+                  <a16:creationId xmlns:a16="http://schemas.microsoft.com/office/drawing/2014/main" id="{730221DE-4DDC-DDF3-0ECA-513A6ECB7417}"/>
+                </a:ext>
+              </a:extLst>
+            </p:cNvPr>
+            <p:cNvSpPr/>
+            <p:nvPr/>
+          </p:nvSpPr>
+          <p:spPr>
+            <a:xfrm>
+              <a:off x="161930" y="1944956"/>
+              <a:ext cx="2054622" cy="1653650"/>
+            </a:xfrm>
+            <a:prstGeom prst="roundRect">
+              <a:avLst/>
+            </a:prstGeom>
+            <a:noFill/>
+            <a:ln>
+              <a:solidFill>
+                <a:schemeClr val="tx1"/>
+              </a:solidFill>
+            </a:ln>
+          </p:spPr>
+          <p:style>
+            <a:lnRef idx="2">
+              <a:schemeClr val="accent1">
+                <a:shade val="15000"/>
+              </a:schemeClr>
+            </a:lnRef>
+            <a:fillRef idx="1">
+              <a:schemeClr val="accent1"/>
+            </a:fillRef>
+            <a:effectRef idx="0">
+              <a:schemeClr val="accent1"/>
+            </a:effectRef>
+            <a:fontRef idx="minor">
+              <a:schemeClr val="lt1"/>
+            </a:fontRef>
+          </p:style>
+          <p:txBody>
+            <a:bodyPr rtlCol="0" anchor="ctr"/>
+            <a:lstStyle/>
+            <a:p>
+              <a:pPr algn="ctr"/>
+              <a:endParaRPr lang="en-US" noProof="0" dirty="0"/>
+            </a:p>
+          </p:txBody>
+        </p:sp>
+        <p:pic>
+          <p:nvPicPr>
+            <p:cNvPr id="276" name="Picture 275">
+              <a:extLst>
+                <a:ext uri="{FF2B5EF4-FFF2-40B4-BE49-F238E27FC236}">
+                  <a16:creationId xmlns:a16="http://schemas.microsoft.com/office/drawing/2014/main" id="{93E684FE-BDEE-8D38-B10A-A508586AAB58}"/>
+                </a:ext>
+              </a:extLst>
+            </p:cNvPr>
+            <p:cNvPicPr>
+              <a:picLocks noChangeAspect="1"/>
+            </p:cNvPicPr>
+            <p:nvPr/>
+          </p:nvPicPr>
+          <p:blipFill>
+            <a:blip r:embed="rId15">
+              <a:extLst>
+                <a:ext uri="{28A0092B-C50C-407E-A947-70E740481C1C}">
+                  <a14:useLocalDpi xmlns:a14="http://schemas.microsoft.com/office/drawing/2010/main" val="0"/>
+                </a:ext>
+              </a:extLst>
+            </a:blip>
+            <a:srcRect/>
+            <a:stretch/>
+          </p:blipFill>
+          <p:spPr>
+            <a:xfrm>
+              <a:off x="291465" y="2073961"/>
+              <a:ext cx="630560" cy="697819"/>
+            </a:xfrm>
+            <a:prstGeom prst="rect">
+              <a:avLst/>
+            </a:prstGeom>
+          </p:spPr>
+        </p:pic>
+        <p:sp>
+          <p:nvSpPr>
+            <p:cNvPr id="277" name="TextBox 276">
+              <a:extLst>
+                <a:ext uri="{FF2B5EF4-FFF2-40B4-BE49-F238E27FC236}">
+                  <a16:creationId xmlns:a16="http://schemas.microsoft.com/office/drawing/2014/main" id="{6B502D1B-4570-CA95-5A89-EB0054BB07E8}"/>
+                </a:ext>
+              </a:extLst>
+            </p:cNvPr>
+            <p:cNvSpPr txBox="1"/>
+            <p:nvPr/>
+          </p:nvSpPr>
+          <p:spPr>
+            <a:xfrm>
+              <a:off x="164245" y="2763786"/>
+              <a:ext cx="914400" cy="430887"/>
+            </a:xfrm>
+            <a:prstGeom prst="rect">
+              <a:avLst/>
+            </a:prstGeom>
+            <a:noFill/>
+          </p:spPr>
+          <p:txBody>
+            <a:bodyPr wrap="square" rtlCol="0">
+              <a:spAutoFit/>
+            </a:bodyPr>
+            <a:lstStyle/>
+            <a:p>
+              <a:pPr algn="ctr"/>
+              <a:r>
+                <a:rPr lang="en-US" sz="2200" b="1" noProof="0" dirty="0">
+                  <a:latin typeface="Lato" panose="020F0502020204030203" pitchFamily="34" charset="0"/>
+                </a:rPr>
+                <a:t>Mark</a:t>
+              </a:r>
+            </a:p>
+          </p:txBody>
+        </p:sp>
+        <p:pic>
+          <p:nvPicPr>
+            <p:cNvPr id="278" name="lookup:icon1">
+              <a:extLst>
+                <a:ext uri="{FF2B5EF4-FFF2-40B4-BE49-F238E27FC236}">
+                  <a16:creationId xmlns:a16="http://schemas.microsoft.com/office/drawing/2014/main" id="{DB7C8437-E58D-62DC-1220-5685B18434F5}"/>
+                </a:ext>
+              </a:extLst>
+            </p:cNvPr>
+            <p:cNvPicPr>
+              <a:picLocks noChangeAspect="1"/>
+            </p:cNvPicPr>
+            <p:nvPr/>
+          </p:nvPicPr>
+          <p:blipFill>
+            <a:blip r:embed="rId4"/>
+            <a:stretch>
+              <a:fillRect/>
+            </a:stretch>
+          </p:blipFill>
+          <p:spPr>
+            <a:xfrm>
+              <a:off x="1001387" y="2057882"/>
+              <a:ext cx="216000" cy="216000"/>
+            </a:xfrm>
+            <a:prstGeom prst="rect">
+              <a:avLst/>
+            </a:prstGeom>
+          </p:spPr>
+        </p:pic>
+        <p:pic>
+          <p:nvPicPr>
+            <p:cNvPr id="279" name="lookup:icon2">
+              <a:extLst>
+                <a:ext uri="{FF2B5EF4-FFF2-40B4-BE49-F238E27FC236}">
+                  <a16:creationId xmlns:a16="http://schemas.microsoft.com/office/drawing/2014/main" id="{DB68B9CE-D617-1141-CB0F-4B8804553112}"/>
+                </a:ext>
+              </a:extLst>
+            </p:cNvPr>
+            <p:cNvPicPr>
+              <a:picLocks noChangeAspect="1"/>
+            </p:cNvPicPr>
+            <p:nvPr/>
+          </p:nvPicPr>
+          <p:blipFill>
+            <a:blip r:embed="rId5">
+              <a:extLst>
+                <a:ext uri="{28A0092B-C50C-407E-A947-70E740481C1C}">
+                  <a14:useLocalDpi xmlns:a14="http://schemas.microsoft.com/office/drawing/2010/main" val="0"/>
+                </a:ext>
+              </a:extLst>
+            </a:blip>
+            <a:srcRect/>
+            <a:stretch/>
+          </p:blipFill>
+          <p:spPr>
+            <a:xfrm>
+              <a:off x="1001387" y="2455432"/>
+              <a:ext cx="216000" cy="216000"/>
+            </a:xfrm>
+            <a:prstGeom prst="rect">
+              <a:avLst/>
+            </a:prstGeom>
+          </p:spPr>
+        </p:pic>
+        <p:pic>
+          <p:nvPicPr>
+            <p:cNvPr id="280" name="lookup:icon3">
+              <a:extLst>
+                <a:ext uri="{FF2B5EF4-FFF2-40B4-BE49-F238E27FC236}">
+                  <a16:creationId xmlns:a16="http://schemas.microsoft.com/office/drawing/2014/main" id="{A6FD0EDA-CE82-018C-2074-14E13E45D997}"/>
+                </a:ext>
+              </a:extLst>
+            </p:cNvPr>
+            <p:cNvPicPr>
+              <a:picLocks noChangeAspect="1"/>
+            </p:cNvPicPr>
+            <p:nvPr/>
+          </p:nvPicPr>
+          <p:blipFill>
+            <a:blip r:embed="rId6">
+              <a:extLst>
+                <a:ext uri="{28A0092B-C50C-407E-A947-70E740481C1C}">
+                  <a14:useLocalDpi xmlns:a14="http://schemas.microsoft.com/office/drawing/2010/main" val="0"/>
+                </a:ext>
+              </a:extLst>
+            </a:blip>
+            <a:srcRect/>
+            <a:stretch/>
+          </p:blipFill>
+          <p:spPr>
+            <a:xfrm>
+              <a:off x="1001387" y="2852982"/>
+              <a:ext cx="216000" cy="216000"/>
+            </a:xfrm>
+            <a:prstGeom prst="rect">
+              <a:avLst/>
+            </a:prstGeom>
+          </p:spPr>
+        </p:pic>
+        <p:pic>
+          <p:nvPicPr>
+            <p:cNvPr id="281" name="lookup:icon4">
+              <a:extLst>
+                <a:ext uri="{FF2B5EF4-FFF2-40B4-BE49-F238E27FC236}">
+                  <a16:creationId xmlns:a16="http://schemas.microsoft.com/office/drawing/2014/main" id="{E72E5B1A-632B-D649-C3D7-DFDBE2BD810E}"/>
+                </a:ext>
+              </a:extLst>
+            </p:cNvPr>
+            <p:cNvPicPr>
+              <a:picLocks noChangeAspect="1"/>
+            </p:cNvPicPr>
+            <p:nvPr/>
+          </p:nvPicPr>
+          <p:blipFill>
+            <a:blip r:embed="rId7">
+              <a:extLst>
+                <a:ext uri="{28A0092B-C50C-407E-A947-70E740481C1C}">
+                  <a14:useLocalDpi xmlns:a14="http://schemas.microsoft.com/office/drawing/2010/main" val="0"/>
+                </a:ext>
+              </a:extLst>
+            </a:blip>
+            <a:srcRect/>
+            <a:stretch/>
+          </p:blipFill>
+          <p:spPr>
+            <a:xfrm>
+              <a:off x="1014114" y="3250532"/>
+              <a:ext cx="209554" cy="216000"/>
+            </a:xfrm>
+            <a:prstGeom prst="rect">
+              <a:avLst/>
+            </a:prstGeom>
+          </p:spPr>
+        </p:pic>
+        <p:sp>
+          <p:nvSpPr>
+            <p:cNvPr id="282" name="rbind:answers">
+              <a:extLst>
+                <a:ext uri="{FF2B5EF4-FFF2-40B4-BE49-F238E27FC236}">
+                  <a16:creationId xmlns:a16="http://schemas.microsoft.com/office/drawing/2014/main" id="{829EB2C5-A7F7-601A-7727-A30111EE91A1}"/>
+                </a:ext>
+              </a:extLst>
+            </p:cNvPr>
+            <p:cNvSpPr txBox="1"/>
+            <p:nvPr/>
+          </p:nvSpPr>
+          <p:spPr>
+            <a:xfrm>
+              <a:off x="1154055" y="1996883"/>
+              <a:ext cx="990975" cy="400110"/>
+            </a:xfrm>
+            <a:prstGeom prst="rect">
+              <a:avLst/>
+            </a:prstGeom>
+            <a:noFill/>
+          </p:spPr>
+          <p:txBody>
+            <a:bodyPr wrap="square" rtlCol="0">
+              <a:spAutoFit/>
+            </a:bodyPr>
+            <a:lstStyle/>
+            <a:p>
+              <a:r>
+                <a:rPr lang="en-US" sz="1000" b="1" noProof="0" dirty="0"/>
+                <a:t>buy a pencil tomorrow</a:t>
+              </a:r>
+            </a:p>
+          </p:txBody>
+        </p:sp>
+        <p:sp>
+          <p:nvSpPr>
+            <p:cNvPr id="283" name="rbind:answers">
+              <a:extLst>
+                <a:ext uri="{FF2B5EF4-FFF2-40B4-BE49-F238E27FC236}">
+                  <a16:creationId xmlns:a16="http://schemas.microsoft.com/office/drawing/2014/main" id="{36AA2951-E4CC-6EA2-E440-636C4BA96E95}"/>
+                </a:ext>
+              </a:extLst>
+            </p:cNvPr>
+            <p:cNvSpPr txBox="1"/>
+            <p:nvPr/>
+          </p:nvSpPr>
+          <p:spPr>
+            <a:xfrm>
+              <a:off x="1152111" y="2386808"/>
+              <a:ext cx="990975" cy="400110"/>
+            </a:xfrm>
+            <a:prstGeom prst="rect">
+              <a:avLst/>
+            </a:prstGeom>
+            <a:noFill/>
+          </p:spPr>
+          <p:txBody>
+            <a:bodyPr wrap="square" rtlCol="0">
+              <a:spAutoFit/>
+            </a:bodyPr>
+            <a:lstStyle/>
+            <a:p>
+              <a:r>
+                <a:rPr lang="en-US" sz="1000" b="1" noProof="0" dirty="0"/>
+                <a:t>his friend next week</a:t>
+              </a:r>
+            </a:p>
+          </p:txBody>
+        </p:sp>
+        <p:sp>
+          <p:nvSpPr>
+            <p:cNvPr id="284" name="rbind:answers">
+              <a:extLst>
+                <a:ext uri="{FF2B5EF4-FFF2-40B4-BE49-F238E27FC236}">
+                  <a16:creationId xmlns:a16="http://schemas.microsoft.com/office/drawing/2014/main" id="{69EB2520-B826-385A-D98C-96EB522D81C7}"/>
+                </a:ext>
+              </a:extLst>
+            </p:cNvPr>
+            <p:cNvSpPr txBox="1"/>
+            <p:nvPr/>
+          </p:nvSpPr>
+          <p:spPr>
+            <a:xfrm>
+              <a:off x="1152111" y="2829301"/>
+              <a:ext cx="990975" cy="246221"/>
+            </a:xfrm>
+            <a:prstGeom prst="rect">
+              <a:avLst/>
+            </a:prstGeom>
+            <a:noFill/>
+          </p:spPr>
+          <p:txBody>
+            <a:bodyPr wrap="square" rtlCol="0">
+              <a:spAutoFit/>
+            </a:bodyPr>
+            <a:lstStyle/>
+            <a:p>
+              <a:r>
+                <a:rPr lang="en-US" sz="1000" b="1" noProof="0" dirty="0"/>
+                <a:t>English later</a:t>
+              </a:r>
+            </a:p>
+          </p:txBody>
+        </p:sp>
+        <p:sp>
+          <p:nvSpPr>
+            <p:cNvPr id="285" name="rbind:answers">
+              <a:extLst>
+                <a:ext uri="{FF2B5EF4-FFF2-40B4-BE49-F238E27FC236}">
+                  <a16:creationId xmlns:a16="http://schemas.microsoft.com/office/drawing/2014/main" id="{EB8A4A88-A424-6407-032D-1E4BA4B905F9}"/>
+                </a:ext>
+              </a:extLst>
+            </p:cNvPr>
+            <p:cNvSpPr txBox="1"/>
+            <p:nvPr/>
+          </p:nvSpPr>
+          <p:spPr>
+            <a:xfrm>
+              <a:off x="1152111" y="3176482"/>
+              <a:ext cx="990975" cy="400110"/>
+            </a:xfrm>
+            <a:prstGeom prst="rect">
+              <a:avLst/>
+            </a:prstGeom>
+            <a:noFill/>
+          </p:spPr>
+          <p:txBody>
+            <a:bodyPr wrap="square" rtlCol="0">
+              <a:spAutoFit/>
+            </a:bodyPr>
+            <a:lstStyle/>
+            <a:p>
+              <a:r>
+                <a:rPr lang="en-US" sz="1000" b="1" noProof="0" dirty="0"/>
+                <a:t>France next summer</a:t>
+              </a:r>
+            </a:p>
+          </p:txBody>
+        </p:sp>
+      </p:grpSp>
+      <p:grpSp>
+        <p:nvGrpSpPr>
+          <p:cNvPr id="286" name="repeat:characters">
+            <a:extLst>
+              <a:ext uri="{FF2B5EF4-FFF2-40B4-BE49-F238E27FC236}">
+                <a16:creationId xmlns:a16="http://schemas.microsoft.com/office/drawing/2014/main" id="{98B00602-B7A4-57B9-3D3A-A9E93301A196}"/>
+              </a:ext>
+            </a:extLst>
+          </p:cNvPr>
+          <p:cNvGrpSpPr/>
+          <p:nvPr/>
+        </p:nvGrpSpPr>
+        <p:grpSpPr>
+          <a:xfrm>
+            <a:off x="4591796" y="6755187"/>
+            <a:ext cx="2054622" cy="1653650"/>
+            <a:chOff x="161930" y="1944956"/>
+            <a:chExt cx="2054622" cy="1653650"/>
+          </a:xfrm>
+        </p:grpSpPr>
+        <p:sp>
+          <p:nvSpPr>
+            <p:cNvPr id="287" name="Rectangle: Rounded Corners 286">
+              <a:extLst>
+                <a:ext uri="{FF2B5EF4-FFF2-40B4-BE49-F238E27FC236}">
+                  <a16:creationId xmlns:a16="http://schemas.microsoft.com/office/drawing/2014/main" id="{6835CF79-9CBC-0589-535A-8394BAC19A01}"/>
+                </a:ext>
+              </a:extLst>
+            </p:cNvPr>
+            <p:cNvSpPr/>
+            <p:nvPr/>
+          </p:nvSpPr>
+          <p:spPr>
+            <a:xfrm>
+              <a:off x="161930" y="1944956"/>
+              <a:ext cx="2054622" cy="1653650"/>
+            </a:xfrm>
+            <a:prstGeom prst="roundRect">
+              <a:avLst/>
+            </a:prstGeom>
+            <a:noFill/>
+            <a:ln>
+              <a:solidFill>
+                <a:schemeClr val="tx1"/>
+              </a:solidFill>
+            </a:ln>
+          </p:spPr>
+          <p:style>
+            <a:lnRef idx="2">
+              <a:schemeClr val="accent1">
+                <a:shade val="15000"/>
+              </a:schemeClr>
+            </a:lnRef>
+            <a:fillRef idx="1">
+              <a:schemeClr val="accent1"/>
+            </a:fillRef>
+            <a:effectRef idx="0">
+              <a:schemeClr val="accent1"/>
+            </a:effectRef>
+            <a:fontRef idx="minor">
+              <a:schemeClr val="lt1"/>
+            </a:fontRef>
+          </p:style>
+          <p:txBody>
+            <a:bodyPr rtlCol="0" anchor="ctr"/>
+            <a:lstStyle/>
+            <a:p>
+              <a:pPr algn="ctr"/>
+              <a:endParaRPr lang="en-US" noProof="0" dirty="0"/>
+            </a:p>
+          </p:txBody>
+        </p:sp>
+        <p:pic>
+          <p:nvPicPr>
+            <p:cNvPr id="288" name="Picture 287">
+              <a:extLst>
+                <a:ext uri="{FF2B5EF4-FFF2-40B4-BE49-F238E27FC236}">
+                  <a16:creationId xmlns:a16="http://schemas.microsoft.com/office/drawing/2014/main" id="{9A401153-D7A1-7029-B141-4BA84275289A}"/>
+                </a:ext>
+              </a:extLst>
+            </p:cNvPr>
+            <p:cNvPicPr>
+              <a:picLocks noChangeAspect="1"/>
+            </p:cNvPicPr>
+            <p:nvPr/>
+          </p:nvPicPr>
+          <p:blipFill>
+            <a:blip r:embed="rId16">
+              <a:extLst>
+                <a:ext uri="{28A0092B-C50C-407E-A947-70E740481C1C}">
+                  <a14:useLocalDpi xmlns:a14="http://schemas.microsoft.com/office/drawing/2010/main" val="0"/>
+                </a:ext>
+              </a:extLst>
+            </a:blip>
+            <a:srcRect/>
+            <a:stretch/>
+          </p:blipFill>
+          <p:spPr>
+            <a:xfrm>
+              <a:off x="291465" y="2073961"/>
+              <a:ext cx="630560" cy="697819"/>
+            </a:xfrm>
+            <a:prstGeom prst="rect">
+              <a:avLst/>
+            </a:prstGeom>
+          </p:spPr>
+        </p:pic>
+        <p:sp>
+          <p:nvSpPr>
+            <p:cNvPr id="289" name="TextBox 288">
+              <a:extLst>
+                <a:ext uri="{FF2B5EF4-FFF2-40B4-BE49-F238E27FC236}">
+                  <a16:creationId xmlns:a16="http://schemas.microsoft.com/office/drawing/2014/main" id="{DA757830-12A3-A5EC-DE85-FF2524FC8913}"/>
+                </a:ext>
+              </a:extLst>
+            </p:cNvPr>
+            <p:cNvSpPr txBox="1"/>
+            <p:nvPr/>
+          </p:nvSpPr>
+          <p:spPr>
+            <a:xfrm>
+              <a:off x="164245" y="2763786"/>
+              <a:ext cx="914400" cy="430887"/>
+            </a:xfrm>
+            <a:prstGeom prst="rect">
+              <a:avLst/>
+            </a:prstGeom>
+            <a:noFill/>
+          </p:spPr>
+          <p:txBody>
+            <a:bodyPr wrap="square" rtlCol="0">
+              <a:spAutoFit/>
+            </a:bodyPr>
+            <a:lstStyle/>
+            <a:p>
+              <a:pPr algn="ctr"/>
+              <a:r>
+                <a:rPr lang="en-US" sz="2200" b="1" noProof="0" dirty="0">
+                  <a:latin typeface="Lato" panose="020F0502020204030203" pitchFamily="34" charset="0"/>
+                </a:rPr>
+                <a:t>Mark</a:t>
+              </a:r>
+            </a:p>
+          </p:txBody>
+        </p:sp>
+        <p:pic>
+          <p:nvPicPr>
+            <p:cNvPr id="290" name="lookup:icon1">
+              <a:extLst>
+                <a:ext uri="{FF2B5EF4-FFF2-40B4-BE49-F238E27FC236}">
+                  <a16:creationId xmlns:a16="http://schemas.microsoft.com/office/drawing/2014/main" id="{BEB7A81E-87A9-C2C8-7582-939C3A38EE45}"/>
+                </a:ext>
+              </a:extLst>
+            </p:cNvPr>
+            <p:cNvPicPr>
+              <a:picLocks noChangeAspect="1"/>
+            </p:cNvPicPr>
+            <p:nvPr/>
+          </p:nvPicPr>
+          <p:blipFill>
+            <a:blip r:embed="rId4"/>
+            <a:stretch>
+              <a:fillRect/>
+            </a:stretch>
+          </p:blipFill>
+          <p:spPr>
+            <a:xfrm>
+              <a:off x="1001387" y="2057882"/>
+              <a:ext cx="216000" cy="216000"/>
+            </a:xfrm>
+            <a:prstGeom prst="rect">
+              <a:avLst/>
+            </a:prstGeom>
+          </p:spPr>
+        </p:pic>
+        <p:pic>
+          <p:nvPicPr>
+            <p:cNvPr id="291" name="lookup:icon2">
+              <a:extLst>
+                <a:ext uri="{FF2B5EF4-FFF2-40B4-BE49-F238E27FC236}">
+                  <a16:creationId xmlns:a16="http://schemas.microsoft.com/office/drawing/2014/main" id="{C2532499-9163-A0C8-2BC9-21C3EE207329}"/>
+                </a:ext>
+              </a:extLst>
+            </p:cNvPr>
+            <p:cNvPicPr>
+              <a:picLocks noChangeAspect="1"/>
+            </p:cNvPicPr>
+            <p:nvPr/>
+          </p:nvPicPr>
+          <p:blipFill>
+            <a:blip r:embed="rId5">
+              <a:extLst>
+                <a:ext uri="{28A0092B-C50C-407E-A947-70E740481C1C}">
+                  <a14:useLocalDpi xmlns:a14="http://schemas.microsoft.com/office/drawing/2010/main" val="0"/>
+                </a:ext>
+              </a:extLst>
+            </a:blip>
+            <a:srcRect/>
+            <a:stretch/>
+          </p:blipFill>
+          <p:spPr>
+            <a:xfrm>
+              <a:off x="1001387" y="2455432"/>
+              <a:ext cx="216000" cy="216000"/>
+            </a:xfrm>
+            <a:prstGeom prst="rect">
+              <a:avLst/>
+            </a:prstGeom>
+          </p:spPr>
+        </p:pic>
+        <p:pic>
+          <p:nvPicPr>
+            <p:cNvPr id="292" name="lookup:icon3">
+              <a:extLst>
+                <a:ext uri="{FF2B5EF4-FFF2-40B4-BE49-F238E27FC236}">
+                  <a16:creationId xmlns:a16="http://schemas.microsoft.com/office/drawing/2014/main" id="{03FCA767-7987-4E2E-F463-19B9D7DDF0D1}"/>
+                </a:ext>
+              </a:extLst>
+            </p:cNvPr>
+            <p:cNvPicPr>
+              <a:picLocks noChangeAspect="1"/>
+            </p:cNvPicPr>
+            <p:nvPr/>
+          </p:nvPicPr>
+          <p:blipFill>
+            <a:blip r:embed="rId6">
+              <a:extLst>
+                <a:ext uri="{28A0092B-C50C-407E-A947-70E740481C1C}">
+                  <a14:useLocalDpi xmlns:a14="http://schemas.microsoft.com/office/drawing/2010/main" val="0"/>
+                </a:ext>
+              </a:extLst>
+            </a:blip>
+            <a:srcRect/>
+            <a:stretch/>
+          </p:blipFill>
+          <p:spPr>
+            <a:xfrm>
+              <a:off x="1001387" y="2852982"/>
+              <a:ext cx="216000" cy="216000"/>
+            </a:xfrm>
+            <a:prstGeom prst="rect">
+              <a:avLst/>
+            </a:prstGeom>
+          </p:spPr>
+        </p:pic>
+        <p:pic>
+          <p:nvPicPr>
+            <p:cNvPr id="293" name="lookup:icon4">
+              <a:extLst>
+                <a:ext uri="{FF2B5EF4-FFF2-40B4-BE49-F238E27FC236}">
+                  <a16:creationId xmlns:a16="http://schemas.microsoft.com/office/drawing/2014/main" id="{D63719E4-FCD8-BE19-239A-47A858447A80}"/>
+                </a:ext>
+              </a:extLst>
+            </p:cNvPr>
+            <p:cNvPicPr>
+              <a:picLocks noChangeAspect="1"/>
+            </p:cNvPicPr>
+            <p:nvPr/>
+          </p:nvPicPr>
+          <p:blipFill>
+            <a:blip r:embed="rId7">
+              <a:extLst>
+                <a:ext uri="{28A0092B-C50C-407E-A947-70E740481C1C}">
+                  <a14:useLocalDpi xmlns:a14="http://schemas.microsoft.com/office/drawing/2010/main" val="0"/>
+                </a:ext>
+              </a:extLst>
+            </a:blip>
+            <a:srcRect/>
+            <a:stretch/>
+          </p:blipFill>
+          <p:spPr>
+            <a:xfrm>
+              <a:off x="1014114" y="3250532"/>
+              <a:ext cx="209554" cy="216000"/>
+            </a:xfrm>
+            <a:prstGeom prst="rect">
+              <a:avLst/>
+            </a:prstGeom>
+          </p:spPr>
+        </p:pic>
+        <p:sp>
+          <p:nvSpPr>
+            <p:cNvPr id="294" name="rbind:answers">
+              <a:extLst>
+                <a:ext uri="{FF2B5EF4-FFF2-40B4-BE49-F238E27FC236}">
+                  <a16:creationId xmlns:a16="http://schemas.microsoft.com/office/drawing/2014/main" id="{803384DE-145C-716A-B50C-94B0B5A20504}"/>
+                </a:ext>
+              </a:extLst>
+            </p:cNvPr>
+            <p:cNvSpPr txBox="1"/>
+            <p:nvPr/>
+          </p:nvSpPr>
+          <p:spPr>
+            <a:xfrm>
+              <a:off x="1154055" y="1996883"/>
+              <a:ext cx="990975" cy="400110"/>
+            </a:xfrm>
+            <a:prstGeom prst="rect">
+              <a:avLst/>
+            </a:prstGeom>
+            <a:noFill/>
+          </p:spPr>
+          <p:txBody>
+            <a:bodyPr wrap="square" rtlCol="0">
+              <a:spAutoFit/>
+            </a:bodyPr>
+            <a:lstStyle/>
+            <a:p>
+              <a:r>
+                <a:rPr lang="en-US" sz="1000" b="1" noProof="0" dirty="0"/>
+                <a:t>buy a pencil tomorrow</a:t>
+              </a:r>
+            </a:p>
+          </p:txBody>
+        </p:sp>
+        <p:sp>
+          <p:nvSpPr>
+            <p:cNvPr id="295" name="rbind:answers">
+              <a:extLst>
+                <a:ext uri="{FF2B5EF4-FFF2-40B4-BE49-F238E27FC236}">
+                  <a16:creationId xmlns:a16="http://schemas.microsoft.com/office/drawing/2014/main" id="{2A83CEE2-01C3-E3AA-A7EC-1067CF1814A1}"/>
+                </a:ext>
+              </a:extLst>
+            </p:cNvPr>
+            <p:cNvSpPr txBox="1"/>
+            <p:nvPr/>
+          </p:nvSpPr>
+          <p:spPr>
+            <a:xfrm>
+              <a:off x="1152111" y="2386808"/>
+              <a:ext cx="990975" cy="400110"/>
+            </a:xfrm>
+            <a:prstGeom prst="rect">
+              <a:avLst/>
+            </a:prstGeom>
+            <a:noFill/>
+          </p:spPr>
+          <p:txBody>
+            <a:bodyPr wrap="square" rtlCol="0">
+              <a:spAutoFit/>
+            </a:bodyPr>
+            <a:lstStyle/>
+            <a:p>
+              <a:r>
+                <a:rPr lang="en-US" sz="1000" b="1" noProof="0" dirty="0"/>
+                <a:t>his friend next week</a:t>
+              </a:r>
+            </a:p>
+          </p:txBody>
+        </p:sp>
+        <p:sp>
+          <p:nvSpPr>
+            <p:cNvPr id="296" name="rbind:answers">
+              <a:extLst>
+                <a:ext uri="{FF2B5EF4-FFF2-40B4-BE49-F238E27FC236}">
+                  <a16:creationId xmlns:a16="http://schemas.microsoft.com/office/drawing/2014/main" id="{972AF9FD-A380-B810-FB9B-2C7C54DE9164}"/>
+                </a:ext>
+              </a:extLst>
+            </p:cNvPr>
+            <p:cNvSpPr txBox="1"/>
+            <p:nvPr/>
+          </p:nvSpPr>
+          <p:spPr>
+            <a:xfrm>
+              <a:off x="1152111" y="2829301"/>
+              <a:ext cx="990975" cy="246221"/>
+            </a:xfrm>
+            <a:prstGeom prst="rect">
+              <a:avLst/>
+            </a:prstGeom>
+            <a:noFill/>
+          </p:spPr>
+          <p:txBody>
+            <a:bodyPr wrap="square" rtlCol="0">
+              <a:spAutoFit/>
+            </a:bodyPr>
+            <a:lstStyle/>
+            <a:p>
+              <a:r>
+                <a:rPr lang="en-US" sz="1000" b="1" noProof="0" dirty="0"/>
+                <a:t>English later</a:t>
+              </a:r>
+            </a:p>
+          </p:txBody>
+        </p:sp>
+        <p:sp>
+          <p:nvSpPr>
+            <p:cNvPr id="297" name="rbind:answers">
+              <a:extLst>
+                <a:ext uri="{FF2B5EF4-FFF2-40B4-BE49-F238E27FC236}">
+                  <a16:creationId xmlns:a16="http://schemas.microsoft.com/office/drawing/2014/main" id="{C04D85C2-AF28-D281-2C18-EAB91603C2A0}"/>
+                </a:ext>
+              </a:extLst>
+            </p:cNvPr>
+            <p:cNvSpPr txBox="1"/>
+            <p:nvPr/>
+          </p:nvSpPr>
+          <p:spPr>
+            <a:xfrm>
+              <a:off x="1152111" y="3176482"/>
+              <a:ext cx="990975" cy="400110"/>
+            </a:xfrm>
+            <a:prstGeom prst="rect">
+              <a:avLst/>
+            </a:prstGeom>
+            <a:noFill/>
+          </p:spPr>
+          <p:txBody>
+            <a:bodyPr wrap="square" rtlCol="0">
+              <a:spAutoFit/>
+            </a:bodyPr>
+            <a:lstStyle/>
+            <a:p>
+              <a:r>
+                <a:rPr lang="en-US" sz="1000" b="1" noProof="0" dirty="0"/>
+                <a:t>France next summer</a:t>
+              </a:r>
+            </a:p>
+          </p:txBody>
+        </p:sp>
+      </p:grpSp>
+      <p:pic>
+        <p:nvPicPr>
+          <p:cNvPr id="358" name="Picture 357">
+            <a:extLst>
+              <a:ext uri="{FF2B5EF4-FFF2-40B4-BE49-F238E27FC236}">
+                <a16:creationId xmlns:a16="http://schemas.microsoft.com/office/drawing/2014/main" id="{44159B7B-1316-98A8-F065-F3C49DBCB4E8}"/>
+              </a:ext>
+            </a:extLst>
+          </p:cNvPr>
+          <p:cNvPicPr>
+            <a:picLocks noChangeAspect="1"/>
+          </p:cNvPicPr>
+          <p:nvPr/>
+        </p:nvPicPr>
+        <p:blipFill>
+          <a:blip r:embed="rId3">
+            <a:alphaModFix amt="35000"/>
+          </a:blip>
+          <a:stretch>
+            <a:fillRect/>
+          </a:stretch>
+        </p:blipFill>
         <p:spPr>
           <a:xfrm>
-            <a:off x="4023360" y="489678"/>
-            <a:ext cx="3291840" cy="217357"/>
+            <a:off x="4307251" y="6151454"/>
+            <a:ext cx="642128" cy="642128"/>
           </a:xfrm>
           <a:prstGeom prst="rect">
             <a:avLst/>
           </a:prstGeom>
-          <a:solidFill>
-            <a:srgbClr val="00B050"/>
-          </a:solidFill>
-          <a:ln>
-            <a:noFill/>
-          </a:ln>
         </p:spPr>
-        <p:style>
-          <a:lnRef idx="1">
-            <a:schemeClr val="accent1"/>
-          </a:lnRef>
-          <a:fillRef idx="3">
-            <a:schemeClr val="accent1"/>
-          </a:fillRef>
-          <a:effectRef idx="2">
-            <a:schemeClr val="accent1"/>
-          </a:effectRef>
-          <a:fontRef idx="minor">
-            <a:schemeClr val="lt1"/>
-          </a:fontRef>
-        </p:style>
-        <p:txBody>
-          <a:bodyPr rtlCol="0" anchor="ctr"/>
-          <a:lstStyle/>
-          <a:p>
-            <a:pPr algn="ctr"/>
-            <a:endParaRPr lang="es-MX"/>
-          </a:p>
-        </p:txBody>
-      </p:sp>
-      <p:sp>
-        <p:nvSpPr>
-          <p:cNvPr id="18" name="Rectangle 17">
+      </p:pic>
+      <p:pic>
+        <p:nvPicPr>
+          <p:cNvPr id="359" name="Picture 358">
             <a:extLst>
               <a:ext uri="{FF2B5EF4-FFF2-40B4-BE49-F238E27FC236}">
-                <a16:creationId xmlns:a16="http://schemas.microsoft.com/office/drawing/2014/main" id="{18529E87-1FCB-49B4-B574-466CCB5F82BA}"/>
+                <a16:creationId xmlns:a16="http://schemas.microsoft.com/office/drawing/2014/main" id="{B293AC80-3317-067A-9369-F687E607E0E0}"/>
               </a:ext>
             </a:extLst>
           </p:cNvPr>
-          <p:cNvSpPr/>
+          <p:cNvPicPr>
+            <a:picLocks noChangeAspect="1"/>
+          </p:cNvPicPr>
           <p:nvPr/>
-        </p:nvSpPr>
+        </p:nvPicPr>
+        <p:blipFill>
+          <a:blip r:embed="rId3">
+            <a:alphaModFix amt="35000"/>
+          </a:blip>
+          <a:stretch>
+            <a:fillRect/>
+          </a:stretch>
+        </p:blipFill>
         <p:spPr>
           <a:xfrm>
-            <a:off x="4023360" y="2373342"/>
-            <a:ext cx="3291840" cy="217357"/>
+            <a:off x="4231478" y="3983441"/>
+            <a:ext cx="642128" cy="642128"/>
           </a:xfrm>
           <a:prstGeom prst="rect">
             <a:avLst/>
           </a:prstGeom>
-          <a:solidFill>
-            <a:schemeClr val="tx2"/>
-          </a:solidFill>
-          <a:ln>
-            <a:noFill/>
-          </a:ln>
         </p:spPr>
-        <p:style>
-          <a:lnRef idx="1">
-            <a:schemeClr val="accent1"/>
-          </a:lnRef>
-          <a:fillRef idx="3">
-            <a:schemeClr val="accent1"/>
-          </a:fillRef>
-          <a:effectRef idx="2">
-            <a:schemeClr val="accent1"/>
-          </a:effectRef>
-          <a:fontRef idx="minor">
-            <a:schemeClr val="lt1"/>
-          </a:fontRef>
-        </p:style>
-        <p:txBody>
-          <a:bodyPr rtlCol="0" anchor="ctr"/>
-          <a:lstStyle/>
-          <a:p>
-            <a:pPr algn="ctr"/>
-            <a:endParaRPr lang="es-MX"/>
-          </a:p>
-        </p:txBody>
-      </p:sp>
-      <p:sp>
-        <p:nvSpPr>
-          <p:cNvPr id="19" name="Rectangle 18">
+      </p:pic>
+      <p:pic>
+        <p:nvPicPr>
+          <p:cNvPr id="360" name="Picture 359">
             <a:extLst>
               <a:ext uri="{FF2B5EF4-FFF2-40B4-BE49-F238E27FC236}">
-                <a16:creationId xmlns:a16="http://schemas.microsoft.com/office/drawing/2014/main" id="{BD4D1176-C3BF-F64D-7672-E2857931D71A}"/>
+                <a16:creationId xmlns:a16="http://schemas.microsoft.com/office/drawing/2014/main" id="{C89277EE-BED2-D9EC-0460-9DD0BF3A03BB}"/>
               </a:ext>
             </a:extLst>
           </p:cNvPr>
-          <p:cNvSpPr/>
+          <p:cNvPicPr>
+            <a:picLocks noChangeAspect="1"/>
+          </p:cNvPicPr>
           <p:nvPr/>
-        </p:nvSpPr>
+        </p:nvPicPr>
+        <p:blipFill>
+          <a:blip r:embed="rId3">
+            <a:alphaModFix amt="35000"/>
+          </a:blip>
+          <a:stretch>
+            <a:fillRect/>
+          </a:stretch>
+        </p:blipFill>
         <p:spPr>
           <a:xfrm>
-            <a:off x="4023360" y="4257006"/>
-            <a:ext cx="3291840" cy="217357"/>
+            <a:off x="1918661" y="6151454"/>
+            <a:ext cx="642128" cy="642128"/>
           </a:xfrm>
           <a:prstGeom prst="rect">
             <a:avLst/>
           </a:prstGeom>
-          <a:solidFill>
-            <a:srgbClr val="FFC000"/>
-          </a:solidFill>
-          <a:ln>
-            <a:noFill/>
-          </a:ln>
         </p:spPr>
-        <p:style>
-          <a:lnRef idx="1">
-            <a:schemeClr val="accent1"/>
-          </a:lnRef>
-          <a:fillRef idx="3">
-            <a:schemeClr val="accent1"/>
-          </a:fillRef>
-          <a:effectRef idx="2">
-            <a:schemeClr val="accent1"/>
-          </a:effectRef>
-          <a:fontRef idx="minor">
-            <a:schemeClr val="lt1"/>
-          </a:fontRef>
-        </p:style>
-        <p:txBody>
-          <a:bodyPr rtlCol="0" anchor="ctr"/>
-          <a:lstStyle/>
-          <a:p>
-            <a:pPr algn="ctr"/>
-            <a:endParaRPr lang="es-MX"/>
-          </a:p>
-        </p:txBody>
-      </p:sp>
-      <p:sp>
-        <p:nvSpPr>
-          <p:cNvPr id="20" name="Rectangle 19">
+      </p:pic>
+      <p:pic>
+        <p:nvPicPr>
+          <p:cNvPr id="361" name="Picture 360">
             <a:extLst>
               <a:ext uri="{FF2B5EF4-FFF2-40B4-BE49-F238E27FC236}">
-                <a16:creationId xmlns:a16="http://schemas.microsoft.com/office/drawing/2014/main" id="{EB778D72-D177-4683-750E-40C6686CA073}"/>
+                <a16:creationId xmlns:a16="http://schemas.microsoft.com/office/drawing/2014/main" id="{B7197A09-A2E0-759A-780A-5777A858B718}"/>
               </a:ext>
             </a:extLst>
           </p:cNvPr>
-          <p:cNvSpPr/>
+          <p:cNvPicPr>
+            <a:picLocks noChangeAspect="1"/>
+          </p:cNvPicPr>
           <p:nvPr/>
-        </p:nvSpPr>
+        </p:nvPicPr>
+        <p:blipFill>
+          <a:blip r:embed="rId3"/>
+          <a:stretch>
+            <a:fillRect/>
+          </a:stretch>
+        </p:blipFill>
         <p:spPr>
           <a:xfrm>
-            <a:off x="4023360" y="6108192"/>
-            <a:ext cx="3291840" cy="217357"/>
+            <a:off x="211582" y="506715"/>
+            <a:ext cx="642128" cy="642128"/>
           </a:xfrm>
           <a:prstGeom prst="rect">
             <a:avLst/>
           </a:prstGeom>
-          <a:solidFill>
-            <a:srgbClr val="C00000"/>
-          </a:solidFill>
-          <a:ln>
-            <a:noFill/>
-          </a:ln>
         </p:spPr>
-        <p:style>
-          <a:lnRef idx="1">
-            <a:schemeClr val="accent1"/>
-          </a:lnRef>
-          <a:fillRef idx="3">
-            <a:schemeClr val="accent1"/>
-          </a:fillRef>
-          <a:effectRef idx="2">
-            <a:schemeClr val="accent1"/>
-          </a:effectRef>
-          <a:fontRef idx="minor">
-            <a:schemeClr val="lt1"/>
-          </a:fontRef>
-        </p:style>
-        <p:txBody>
-          <a:bodyPr rtlCol="0" anchor="ctr"/>
-          <a:lstStyle/>
-          <a:p>
-            <a:pPr algn="ctr"/>
-            <a:endParaRPr lang="es-MX"/>
-          </a:p>
-        </p:txBody>
-      </p:sp>
-      <p:sp>
-        <p:nvSpPr>
-          <p:cNvPr id="21" name="Rectangle 20">
+      </p:pic>
+      <p:pic>
+        <p:nvPicPr>
+          <p:cNvPr id="362" name="Picture 361">
             <a:extLst>
               <a:ext uri="{FF2B5EF4-FFF2-40B4-BE49-F238E27FC236}">
-                <a16:creationId xmlns:a16="http://schemas.microsoft.com/office/drawing/2014/main" id="{D0B894DA-57BE-A345-AC02-58F7612E4C5C}"/>
+                <a16:creationId xmlns:a16="http://schemas.microsoft.com/office/drawing/2014/main" id="{C509D14A-068C-96BE-682C-DB9827EEB582}"/>
               </a:ext>
             </a:extLst>
           </p:cNvPr>
-          <p:cNvSpPr/>
+          <p:cNvPicPr>
+            <a:picLocks noChangeAspect="1"/>
+          </p:cNvPicPr>
           <p:nvPr/>
-        </p:nvSpPr>
+        </p:nvPicPr>
+        <p:blipFill>
+          <a:blip r:embed="rId3"/>
+          <a:stretch>
+            <a:fillRect/>
+          </a:stretch>
+        </p:blipFill>
         <p:spPr>
           <a:xfrm>
-            <a:off x="4023360" y="8002050"/>
-            <a:ext cx="3291840" cy="217357"/>
+            <a:off x="5917504" y="8709137"/>
+            <a:ext cx="642128" cy="642128"/>
           </a:xfrm>
           <a:prstGeom prst="rect">
             <a:avLst/>
           </a:prstGeom>
-          <a:solidFill>
-            <a:schemeClr val="accent4">
-              <a:lumMod val="50000"/>
-            </a:schemeClr>
-          </a:solidFill>
-          <a:ln>
-            <a:noFill/>
-          </a:ln>
         </p:spPr>
-        <p:style>
-          <a:lnRef idx="1">
-            <a:schemeClr val="accent1"/>
-          </a:lnRef>
-          <a:fillRef idx="3">
-            <a:schemeClr val="accent1"/>
-          </a:fillRef>
-          <a:effectRef idx="2">
-            <a:schemeClr val="accent1"/>
-          </a:effectRef>
-          <a:fontRef idx="minor">
-            <a:schemeClr val="lt1"/>
-          </a:fontRef>
-        </p:style>
-        <p:txBody>
-          <a:bodyPr rtlCol="0" anchor="ctr"/>
-          <a:lstStyle/>
-          <a:p>
-            <a:pPr algn="ctr"/>
-            <a:endParaRPr lang="es-MX"/>
-          </a:p>
-        </p:txBody>
-      </p:sp>
+      </p:pic>
+      <p:pic>
+        <p:nvPicPr>
+          <p:cNvPr id="363" name="Picture 362">
+            <a:extLst>
+              <a:ext uri="{FF2B5EF4-FFF2-40B4-BE49-F238E27FC236}">
+                <a16:creationId xmlns:a16="http://schemas.microsoft.com/office/drawing/2014/main" id="{FD23392E-85A9-68AA-3FEC-8FD6BDF76957}"/>
+              </a:ext>
+            </a:extLst>
+          </p:cNvPr>
+          <p:cNvPicPr>
+            <a:picLocks noChangeAspect="1"/>
+          </p:cNvPicPr>
+          <p:nvPr/>
+        </p:nvPicPr>
+        <p:blipFill>
+          <a:blip r:embed="rId3"/>
+          <a:stretch>
+            <a:fillRect/>
+          </a:stretch>
+        </p:blipFill>
+        <p:spPr>
+          <a:xfrm>
+            <a:off x="211582" y="8668512"/>
+            <a:ext cx="642128" cy="642128"/>
+          </a:xfrm>
+          <a:prstGeom prst="rect">
+            <a:avLst/>
+          </a:prstGeom>
+        </p:spPr>
+      </p:pic>
+      <p:pic>
+        <p:nvPicPr>
+          <p:cNvPr id="364" name="Picture 363">
+            <a:extLst>
+              <a:ext uri="{FF2B5EF4-FFF2-40B4-BE49-F238E27FC236}">
+                <a16:creationId xmlns:a16="http://schemas.microsoft.com/office/drawing/2014/main" id="{DD00CF94-C077-0523-38DA-3BC46C5D9BFE}"/>
+              </a:ext>
+            </a:extLst>
+          </p:cNvPr>
+          <p:cNvPicPr>
+            <a:picLocks noChangeAspect="1"/>
+          </p:cNvPicPr>
+          <p:nvPr/>
+        </p:nvPicPr>
+        <p:blipFill>
+          <a:blip r:embed="rId3">
+            <a:alphaModFix amt="35000"/>
+          </a:blip>
+          <a:stretch>
+            <a:fillRect/>
+          </a:stretch>
+        </p:blipFill>
+        <p:spPr>
+          <a:xfrm>
+            <a:off x="3589350" y="9030201"/>
+            <a:ext cx="642128" cy="642128"/>
+          </a:xfrm>
+          <a:prstGeom prst="rect">
+            <a:avLst/>
+          </a:prstGeom>
+        </p:spPr>
+      </p:pic>
+      <p:pic>
+        <p:nvPicPr>
+          <p:cNvPr id="365" name="Picture 364">
+            <a:extLst>
+              <a:ext uri="{FF2B5EF4-FFF2-40B4-BE49-F238E27FC236}">
+                <a16:creationId xmlns:a16="http://schemas.microsoft.com/office/drawing/2014/main" id="{4D5488F9-169F-0210-CF6B-ECA93C24CD9D}"/>
+              </a:ext>
+            </a:extLst>
+          </p:cNvPr>
+          <p:cNvPicPr>
+            <a:picLocks noChangeAspect="1"/>
+          </p:cNvPicPr>
+          <p:nvPr/>
+        </p:nvPicPr>
+        <p:blipFill>
+          <a:blip r:embed="rId3">
+            <a:alphaModFix amt="35000"/>
+          </a:blip>
+          <a:stretch>
+            <a:fillRect/>
+          </a:stretch>
+        </p:blipFill>
+        <p:spPr>
+          <a:xfrm>
+            <a:off x="1855454" y="9030201"/>
+            <a:ext cx="642128" cy="642128"/>
+          </a:xfrm>
+          <a:prstGeom prst="rect">
+            <a:avLst/>
+          </a:prstGeom>
+        </p:spPr>
+      </p:pic>
     </p:spTree>
+    <p:extLst>
+      <p:ext uri="{BB962C8B-B14F-4D97-AF65-F5344CB8AC3E}">
+        <p14:creationId xmlns:p14="http://schemas.microsoft.com/office/powerpoint/2010/main" val="3091835037"/>
+      </p:ext>
+    </p:extLst>
   </p:cSld>
   <p:clrMapOvr>
     <a:masterClrMapping/>
@@ -5016,7 +8585,7 @@
 <file path=ppt/theme/theme1.xml><?xml version="1.0" encoding="utf-8"?>
 <a:theme xmlns:a="http://schemas.openxmlformats.org/drawingml/2006/main" name="Office Theme">
   <a:themeElements>
-    <a:clrScheme name="Office">
+    <a:clrScheme name="Office Theme">
       <a:dk1>
         <a:sysClr val="windowText" lastClr="000000"/>
       </a:dk1>
@@ -5024,44 +8593,44 @@
         <a:sysClr val="window" lastClr="FFFFFF"/>
       </a:lt1>
       <a:dk2>
-        <a:srgbClr val="1F497D"/>
+        <a:srgbClr val="0E2841"/>
       </a:dk2>
       <a:lt2>
-        <a:srgbClr val="EEECE1"/>
+        <a:srgbClr val="E8E8E8"/>
       </a:lt2>
       <a:accent1>
-        <a:srgbClr val="4F81BD"/>
+        <a:srgbClr val="156082"/>
       </a:accent1>
       <a:accent2>
-        <a:srgbClr val="C0504D"/>
+        <a:srgbClr val="E97132"/>
       </a:accent2>
       <a:accent3>
-        <a:srgbClr val="9BBB59"/>
+        <a:srgbClr val="196B24"/>
       </a:accent3>
       <a:accent4>
-        <a:srgbClr val="8064A2"/>
+        <a:srgbClr val="0F9ED5"/>
       </a:accent4>
       <a:accent5>
-        <a:srgbClr val="4BACC6"/>
+        <a:srgbClr val="A02B93"/>
       </a:accent5>
       <a:accent6>
-        <a:srgbClr val="F79646"/>
+        <a:srgbClr val="4EA72E"/>
       </a:accent6>
       <a:hlink>
-        <a:srgbClr val="0000FF"/>
+        <a:srgbClr val="467886"/>
       </a:hlink>
       <a:folHlink>
-        <a:srgbClr val="800080"/>
+        <a:srgbClr val="96607D"/>
       </a:folHlink>
     </a:clrScheme>
-    <a:fontScheme name="Office">
+    <a:fontScheme name="Office Theme">
       <a:majorFont>
-        <a:latin typeface="Calibri"/>
+        <a:latin typeface="Aptos Display" panose="02110004020202020204"/>
         <a:ea typeface=""/>
         <a:cs typeface=""/>
-        <a:font script="Jpan" typeface="ＭＳ Ｐゴシック"/>
+        <a:font script="Jpan" typeface="游ゴシック Light"/>
         <a:font script="Hang" typeface="맑은 고딕"/>
-        <a:font script="Hans" typeface="宋体"/>
+        <a:font script="Hans" typeface="等线 Light"/>
         <a:font script="Hant" typeface="新細明體"/>
         <a:font script="Arab" typeface="Times New Roman"/>
         <a:font script="Hebr" typeface="Times New Roman"/>
@@ -5089,14 +8658,31 @@
         <a:font script="Viet" typeface="Times New Roman"/>
         <a:font script="Uigh" typeface="Microsoft Uighur"/>
         <a:font script="Geor" typeface="Sylfaen"/>
+        <a:font script="Armn" typeface="Arial"/>
+        <a:font script="Bugi" typeface="Leelawadee UI"/>
+        <a:font script="Bopo" typeface="Microsoft JhengHei"/>
+        <a:font script="Java" typeface="Javanese Text"/>
+        <a:font script="Lisu" typeface="Segoe UI"/>
+        <a:font script="Mymr" typeface="Myanmar Text"/>
+        <a:font script="Nkoo" typeface="Ebrima"/>
+        <a:font script="Olck" typeface="Nirmala UI"/>
+        <a:font script="Osma" typeface="Ebrima"/>
+        <a:font script="Phag" typeface="Phagspa"/>
+        <a:font script="Syrn" typeface="Estrangelo Edessa"/>
+        <a:font script="Syrj" typeface="Estrangelo Edessa"/>
+        <a:font script="Syre" typeface="Estrangelo Edessa"/>
+        <a:font script="Sora" typeface="Nirmala UI"/>
+        <a:font script="Tale" typeface="Microsoft Tai Le"/>
+        <a:font script="Talu" typeface="Microsoft New Tai Lue"/>
+        <a:font script="Tfng" typeface="Ebrima"/>
       </a:majorFont>
       <a:minorFont>
-        <a:latin typeface="Calibri"/>
+        <a:latin typeface="Aptos" panose="02110004020202020204"/>
         <a:ea typeface=""/>
         <a:cs typeface=""/>
-        <a:font script="Jpan" typeface="ＭＳ Ｐゴシック"/>
+        <a:font script="Jpan" typeface="游ゴシック"/>
         <a:font script="Hang" typeface="맑은 고딕"/>
-        <a:font script="Hans" typeface="宋体"/>
+        <a:font script="Hans" typeface="等线"/>
         <a:font script="Hant" typeface="新細明體"/>
         <a:font script="Arab" typeface="Arial"/>
         <a:font script="Hebr" typeface="Arial"/>
@@ -5124,9 +8710,26 @@
         <a:font script="Viet" typeface="Arial"/>
         <a:font script="Uigh" typeface="Microsoft Uighur"/>
         <a:font script="Geor" typeface="Sylfaen"/>
+        <a:font script="Armn" typeface="Arial"/>
+        <a:font script="Bugi" typeface="Leelawadee UI"/>
+        <a:font script="Bopo" typeface="Microsoft JhengHei"/>
+        <a:font script="Java" typeface="Javanese Text"/>
+        <a:font script="Lisu" typeface="Segoe UI"/>
+        <a:font script="Mymr" typeface="Myanmar Text"/>
+        <a:font script="Nkoo" typeface="Ebrima"/>
+        <a:font script="Olck" typeface="Nirmala UI"/>
+        <a:font script="Osma" typeface="Ebrima"/>
+        <a:font script="Phag" typeface="Phagspa"/>
+        <a:font script="Syrn" typeface="Estrangelo Edessa"/>
+        <a:font script="Syrj" typeface="Estrangelo Edessa"/>
+        <a:font script="Syre" typeface="Estrangelo Edessa"/>
+        <a:font script="Sora" typeface="Nirmala UI"/>
+        <a:font script="Tale" typeface="Microsoft Tai Le"/>
+        <a:font script="Talu" typeface="Microsoft New Tai Lue"/>
+        <a:font script="Tfng" typeface="Ebrima"/>
       </a:minorFont>
     </a:fontScheme>
-    <a:fmtScheme name="Office">
+    <a:fmtScheme name="Office Theme">
       <a:fillStyleLst>
         <a:solidFill>
           <a:schemeClr val="phClr"/>
@@ -5135,180 +8738,136 @@
           <a:gsLst>
             <a:gs pos="0">
               <a:schemeClr val="phClr">
-                <a:tint val="50000"/>
-                <a:satMod val="300000"/>
+                <a:lumMod val="110000"/>
+                <a:satMod val="105000"/>
+                <a:tint val="67000"/>
               </a:schemeClr>
             </a:gs>
-            <a:gs pos="35000">
+            <a:gs pos="50000">
               <a:schemeClr val="phClr">
-                <a:tint val="37000"/>
-                <a:satMod val="300000"/>
+                <a:lumMod val="105000"/>
+                <a:satMod val="103000"/>
+                <a:tint val="73000"/>
               </a:schemeClr>
             </a:gs>
             <a:gs pos="100000">
               <a:schemeClr val="phClr">
-                <a:tint val="15000"/>
-                <a:satMod val="350000"/>
+                <a:lumMod val="105000"/>
+                <a:satMod val="109000"/>
+                <a:tint val="81000"/>
               </a:schemeClr>
             </a:gs>
           </a:gsLst>
-          <a:lin ang="16200000" scaled="1"/>
+          <a:lin ang="5400000" scaled="0"/>
         </a:gradFill>
         <a:gradFill rotWithShape="1">
           <a:gsLst>
             <a:gs pos="0">
               <a:schemeClr val="phClr">
-                <a:tint val="100000"/>
+                <a:satMod val="103000"/>
+                <a:lumMod val="102000"/>
+                <a:tint val="94000"/>
+              </a:schemeClr>
+            </a:gs>
+            <a:gs pos="50000">
+              <a:schemeClr val="phClr">
+                <a:satMod val="110000"/>
+                <a:lumMod val="100000"/>
                 <a:shade val="100000"/>
-                <a:satMod val="130000"/>
               </a:schemeClr>
             </a:gs>
             <a:gs pos="100000">
               <a:schemeClr val="phClr">
-                <a:tint val="50000"/>
-                <a:shade val="100000"/>
-                <a:satMod val="350000"/>
+                <a:lumMod val="99000"/>
+                <a:satMod val="120000"/>
+                <a:shade val="78000"/>
               </a:schemeClr>
             </a:gs>
           </a:gsLst>
-          <a:lin ang="16200000" scaled="0"/>
+          <a:lin ang="5400000" scaled="0"/>
         </a:gradFill>
       </a:fillStyleLst>
       <a:lnStyleLst>
-        <a:ln w="9525" cap="flat" cmpd="sng" algn="ctr">
+        <a:ln w="12700" cap="flat" cmpd="sng" algn="ctr">
           <a:solidFill>
-            <a:schemeClr val="phClr">
-              <a:shade val="95000"/>
-              <a:satMod val="105000"/>
-            </a:schemeClr>
+            <a:schemeClr val="phClr"/>
           </a:solidFill>
           <a:prstDash val="solid"/>
+          <a:miter lim="800000"/>
+        </a:ln>
+        <a:ln w="19050" cap="flat" cmpd="sng" algn="ctr">
+          <a:solidFill>
+            <a:schemeClr val="phClr"/>
+          </a:solidFill>
+          <a:prstDash val="solid"/>
+          <a:miter lim="800000"/>
         </a:ln>
         <a:ln w="25400" cap="flat" cmpd="sng" algn="ctr">
           <a:solidFill>
             <a:schemeClr val="phClr"/>
           </a:solidFill>
           <a:prstDash val="solid"/>
-        </a:ln>
-        <a:ln w="38100" cap="flat" cmpd="sng" algn="ctr">
-          <a:solidFill>
-            <a:schemeClr val="phClr"/>
-          </a:solidFill>
-          <a:prstDash val="solid"/>
+          <a:miter lim="800000"/>
         </a:ln>
       </a:lnStyleLst>
       <a:effectStyleLst>
         <a:effectStyle>
+          <a:effectLst/>
+        </a:effectStyle>
+        <a:effectStyle>
+          <a:effectLst/>
+        </a:effectStyle>
+        <a:effectStyle>
           <a:effectLst>
-            <a:outerShdw blurRad="40000" dist="20000" dir="5400000" rotWithShape="0">
+            <a:outerShdw blurRad="57150" dist="19050" dir="5400000" algn="ctr" rotWithShape="0">
               <a:srgbClr val="000000">
-                <a:alpha val="38000"/>
+                <a:alpha val="63000"/>
               </a:srgbClr>
             </a:outerShdw>
           </a:effectLst>
-        </a:effectStyle>
-        <a:effectStyle>
-          <a:effectLst>
-            <a:outerShdw blurRad="40000" dist="23000" dir="5400000" rotWithShape="0">
-              <a:srgbClr val="000000">
-                <a:alpha val="35000"/>
-              </a:srgbClr>
-            </a:outerShdw>
-          </a:effectLst>
-        </a:effectStyle>
-        <a:effectStyle>
-          <a:effectLst>
-            <a:outerShdw blurRad="40000" dist="23000" dir="5400000" rotWithShape="0">
-              <a:srgbClr val="000000">
-                <a:alpha val="35000"/>
-              </a:srgbClr>
-            </a:outerShdw>
-          </a:effectLst>
-          <a:scene3d>
-            <a:camera prst="orthographicFront">
-              <a:rot lat="0" lon="0" rev="0"/>
-            </a:camera>
-            <a:lightRig rig="threePt" dir="t">
-              <a:rot lat="0" lon="0" rev="1200000"/>
-            </a:lightRig>
-          </a:scene3d>
-          <a:sp3d>
-            <a:bevelT w="63500" h="25400"/>
-          </a:sp3d>
         </a:effectStyle>
       </a:effectStyleLst>
       <a:bgFillStyleLst>
         <a:solidFill>
           <a:schemeClr val="phClr"/>
         </a:solidFill>
+        <a:solidFill>
+          <a:schemeClr val="phClr">
+            <a:tint val="95000"/>
+            <a:satMod val="170000"/>
+          </a:schemeClr>
+        </a:solidFill>
         <a:gradFill rotWithShape="1">
           <a:gsLst>
             <a:gs pos="0">
               <a:schemeClr val="phClr">
-                <a:tint val="40000"/>
-                <a:satMod val="350000"/>
+                <a:tint val="93000"/>
+                <a:satMod val="150000"/>
+                <a:shade val="98000"/>
+                <a:lumMod val="102000"/>
               </a:schemeClr>
             </a:gs>
-            <a:gs pos="40000">
+            <a:gs pos="50000">
               <a:schemeClr val="phClr">
-                <a:tint val="45000"/>
-                <a:shade val="99000"/>
-                <a:satMod val="350000"/>
+                <a:tint val="98000"/>
+                <a:satMod val="130000"/>
+                <a:shade val="90000"/>
+                <a:lumMod val="103000"/>
               </a:schemeClr>
             </a:gs>
             <a:gs pos="100000">
               <a:schemeClr val="phClr">
-                <a:shade val="20000"/>
-                <a:satMod val="255000"/>
+                <a:shade val="63000"/>
+                <a:satMod val="120000"/>
               </a:schemeClr>
             </a:gs>
           </a:gsLst>
-          <a:path path="circle">
-            <a:fillToRect l="50000" t="-80000" r="50000" b="180000"/>
-          </a:path>
-        </a:gradFill>
-        <a:gradFill rotWithShape="1">
-          <a:gsLst>
-            <a:gs pos="0">
-              <a:schemeClr val="phClr">
-                <a:tint val="80000"/>
-                <a:satMod val="300000"/>
-              </a:schemeClr>
-            </a:gs>
-            <a:gs pos="100000">
-              <a:schemeClr val="phClr">
-                <a:shade val="30000"/>
-                <a:satMod val="200000"/>
-              </a:schemeClr>
-            </a:gs>
-          </a:gsLst>
-          <a:path path="circle">
-            <a:fillToRect l="50000" t="50000" r="50000" b="50000"/>
-          </a:path>
+          <a:lin ang="5400000" scaled="0"/>
         </a:gradFill>
       </a:bgFillStyleLst>
     </a:fmtScheme>
   </a:themeElements>
   <a:objectDefaults>
-    <a:spDef>
-      <a:spPr/>
-      <a:bodyPr/>
-      <a:lstStyle/>
-      <a:style>
-        <a:lnRef idx="1">
-          <a:schemeClr val="accent1"/>
-        </a:lnRef>
-        <a:fillRef idx="3">
-          <a:schemeClr val="accent1"/>
-        </a:fillRef>
-        <a:effectRef idx="2">
-          <a:schemeClr val="accent1"/>
-        </a:effectRef>
-        <a:fontRef idx="minor">
-          <a:schemeClr val="lt1"/>
-        </a:fontRef>
-      </a:style>
-    </a:spDef>
     <a:lnDef>
       <a:spPr/>
       <a:bodyPr/>
@@ -5330,6 +8889,11 @@
     </a:lnDef>
   </a:objectDefaults>
   <a:extraClrSchemeLst/>
+  <a:extLst>
+    <a:ext uri="{05A4C25C-085E-4340-85A3-A5531E510DB2}">
+      <thm15:themeFamily xmlns:thm15="http://schemas.microsoft.com/office/thememl/2012/main" name="Office Theme" id="{2E142A2C-CD16-42D6-873A-C26D2A0506FA}" vid="{1BDDFF52-6CD6-40A5-AB3C-68EB2F1E4D0A}"/>
+    </a:ext>
+  </a:extLst>
 </a:theme>
 </file>
 
